--- a/sih_submission/SIH_Presentation_Slide.pptx
+++ b/sih_submission/SIH_Presentation_Slide.pptx
@@ -5,7 +5,7 @@
     <p:sldMasterId id="2147483648" r:id="rId1"/>
   </p:sldMasterIdLst>
   <p:notesMasterIdLst>
-    <p:notesMasterId r:id="rId8"/>
+    <p:notesMasterId r:id="rId9"/>
   </p:notesMasterIdLst>
   <p:sldIdLst>
     <p:sldId id="291" r:id="rId2"/>
@@ -14,6 +14,7 @@
     <p:sldId id="293" r:id="rId5"/>
     <p:sldId id="294" r:id="rId6"/>
     <p:sldId id="296" r:id="rId7"/>
+    <p:sldId id="297" r:id="rId8"/>
   </p:sldIdLst>
   <p:sldSz cx="12192000" cy="6858000"/>
   <p:notesSz cx="6858000" cy="9144000"/>
@@ -261,7 +262,7 @@
             <a:fld id="{C4D5ADD5-2BBC-4A94-8F86-D9013941F742}" type="datetimeFigureOut">
               <a:rPr lang="en-US"/>
               <a:pPr/>
-              <a:t>10/1/2026</a:t>
+              <a:t>6/2/2026</a:t>
             </a:fld>
             <a:endParaRPr lang="en-US"/>
           </a:p>
@@ -1351,6 +1352,184 @@
 </p:notes>
 </file>
 
+<file path=ppt/notesSlides/notesSlide6.xml><?xml version="1.0" encoding="utf-8"?>
+<p:notes xmlns:a="http://schemas.openxmlformats.org/drawingml/2006/main" xmlns:r="http://schemas.openxmlformats.org/officeDocument/2006/relationships" xmlns:p="http://schemas.openxmlformats.org/presentationml/2006/main">
+  <p:cSld>
+    <p:spTree>
+      <p:nvGrpSpPr>
+        <p:cNvPr id="1" name=""/>
+        <p:cNvGrpSpPr/>
+        <p:nvPr/>
+      </p:nvGrpSpPr>
+      <p:grpSpPr>
+        <a:xfrm>
+          <a:off x="0" y="0"/>
+          <a:ext cx="0" cy="0"/>
+          <a:chOff x="0" y="0"/>
+          <a:chExt cx="0" cy="0"/>
+        </a:xfrm>
+      </p:grpSpPr>
+      <p:sp>
+        <p:nvSpPr>
+          <p:cNvPr id="18433" name="Slide Image Placeholder 1"/>
+          <p:cNvSpPr>
+            <a:spLocks noGrp="1" noRot="1" noChangeAspect="1"/>
+          </p:cNvSpPr>
+          <p:nvPr>
+            <p:ph type="sldImg"/>
+          </p:nvPr>
+        </p:nvSpPr>
+        <p:spPr bwMode="auto">
+          <a:xfrm>
+            <a:off x="381000" y="685800"/>
+            <a:ext cx="6096000" cy="3429000"/>
+          </a:xfrm>
+          <a:noFill/>
+          <a:ln>
+            <a:solidFill>
+              <a:srgbClr val="000000"/>
+            </a:solidFill>
+            <a:miter lim="800000"/>
+            <a:headEnd/>
+            <a:tailEnd/>
+          </a:ln>
+        </p:spPr>
+      </p:sp>
+      <p:sp>
+        <p:nvSpPr>
+          <p:cNvPr id="18434" name="Notes Placeholder 2"/>
+          <p:cNvSpPr>
+            <a:spLocks noGrp="1"/>
+          </p:cNvSpPr>
+          <p:nvPr>
+            <p:ph type="body" idx="1"/>
+          </p:nvPr>
+        </p:nvSpPr>
+        <p:spPr bwMode="auto">
+          <a:noFill/>
+        </p:spPr>
+        <p:txBody>
+          <a:bodyPr wrap="square" numCol="1" anchor="t" anchorCtr="0" compatLnSpc="1">
+            <a:prstTxWarp prst="textNoShape">
+              <a:avLst/>
+            </a:prstTxWarp>
+          </a:bodyPr>
+          <a:lstStyle/>
+          <a:p>
+            <a:pPr eaLnBrk="1" hangingPunct="1">
+              <a:spcBef>
+                <a:spcPct val="0"/>
+              </a:spcBef>
+            </a:pPr>
+            <a:endParaRPr lang="en-US">
+              <a:ea typeface="ＭＳ Ｐゴシック" pitchFamily="1" charset="-128"/>
+            </a:endParaRPr>
+          </a:p>
+        </p:txBody>
+      </p:sp>
+      <p:sp>
+        <p:nvSpPr>
+          <p:cNvPr id="18435" name="Slide Number Placeholder 3"/>
+          <p:cNvSpPr>
+            <a:spLocks noGrp="1"/>
+          </p:cNvSpPr>
+          <p:nvPr>
+            <p:ph type="sldNum" sz="quarter" idx="5"/>
+          </p:nvPr>
+        </p:nvSpPr>
+        <p:spPr bwMode="auto">
+          <a:noFill/>
+          <a:ln>
+            <a:miter lim="800000"/>
+            <a:headEnd/>
+            <a:tailEnd/>
+          </a:ln>
+        </p:spPr>
+        <p:txBody>
+          <a:bodyPr/>
+          <a:lstStyle/>
+          <a:p>
+            <a:pPr marL="0" marR="0" lvl="0" indent="0" algn="r" defTabSz="457200" rtl="0" eaLnBrk="1" fontAlgn="base" latinLnBrk="0" hangingPunct="1">
+              <a:lnSpc>
+                <a:spcPct val="100000"/>
+              </a:lnSpc>
+              <a:spcBef>
+                <a:spcPct val="0"/>
+              </a:spcBef>
+              <a:spcAft>
+                <a:spcPct val="0"/>
+              </a:spcAft>
+              <a:buClrTx/>
+              <a:buSzTx/>
+              <a:buFontTx/>
+              <a:buNone/>
+              <a:tabLst/>
+              <a:defRPr/>
+            </a:pPr>
+            <a:fld id="{0CA7B74D-3791-4AC6-8451-F10DBCCCDD9A}" type="slidenum">
+              <a:rPr kumimoji="0" lang="en-US" sz="1200" b="0" i="0" u="none" strike="noStrike" kern="1200" cap="none" spc="0" normalizeH="0" baseline="0" noProof="0">
+                <a:ln>
+                  <a:noFill/>
+                </a:ln>
+                <a:solidFill>
+                  <a:prstClr val="black"/>
+                </a:solidFill>
+                <a:effectLst/>
+                <a:uLnTx/>
+                <a:uFillTx/>
+                <a:latin typeface="Calibri" pitchFamily="34" charset="0"/>
+                <a:ea typeface="ＭＳ Ｐゴシック" pitchFamily="1" charset="-128"/>
+                <a:cs typeface="+mn-cs"/>
+              </a:rPr>
+              <a:pPr marL="0" marR="0" lvl="0" indent="0" algn="r" defTabSz="457200" rtl="0" eaLnBrk="1" fontAlgn="base" latinLnBrk="0" hangingPunct="1">
+                <a:lnSpc>
+                  <a:spcPct val="100000"/>
+                </a:lnSpc>
+                <a:spcBef>
+                  <a:spcPct val="0"/>
+                </a:spcBef>
+                <a:spcAft>
+                  <a:spcPct val="0"/>
+                </a:spcAft>
+                <a:buClrTx/>
+                <a:buSzTx/>
+                <a:buFontTx/>
+                <a:buNone/>
+                <a:tabLst/>
+                <a:defRPr/>
+              </a:pPr>
+              <a:t>7</a:t>
+            </a:fld>
+            <a:endParaRPr kumimoji="0" lang="en-US" sz="1200" b="0" i="0" u="none" strike="noStrike" kern="1200" cap="none" spc="0" normalizeH="0" baseline="0" noProof="0">
+              <a:ln>
+                <a:noFill/>
+              </a:ln>
+              <a:solidFill>
+                <a:prstClr val="black"/>
+              </a:solidFill>
+              <a:effectLst/>
+              <a:uLnTx/>
+              <a:uFillTx/>
+              <a:latin typeface="Calibri" pitchFamily="34" charset="0"/>
+              <a:ea typeface="ＭＳ Ｐゴシック" pitchFamily="1" charset="-128"/>
+              <a:cs typeface="+mn-cs"/>
+            </a:endParaRPr>
+          </a:p>
+        </p:txBody>
+      </p:sp>
+    </p:spTree>
+    <p:extLst>
+      <p:ext uri="{BB962C8B-B14F-4D97-AF65-F5344CB8AC3E}">
+        <p14:creationId xmlns:p14="http://schemas.microsoft.com/office/powerpoint/2010/main" val="3783576877"/>
+      </p:ext>
+    </p:extLst>
+  </p:cSld>
+  <p:clrMapOvr>
+    <a:masterClrMapping/>
+  </p:clrMapOvr>
+</p:notes>
+</file>
+
 <file path=ppt/slideLayouts/slideLayout1.xml><?xml version="1.0" encoding="utf-8"?>
 <p:sldLayout xmlns:a="http://schemas.openxmlformats.org/drawingml/2006/main" xmlns:r="http://schemas.openxmlformats.org/officeDocument/2006/relationships" xmlns:p="http://schemas.openxmlformats.org/presentationml/2006/main" type="title" preserve="1">
   <p:cSld name="Title Slide">
@@ -1534,7 +1713,7 @@
           <a:p>
             <a:fld id="{E60792E3-D524-454C-8AFD-A91972900BCB}" type="datetime1">
               <a:rPr lang="en-US" smtClean="0"/>
-              <a:t>10/1/2026</a:t>
+              <a:t>6/2/2026</a:t>
             </a:fld>
             <a:endParaRPr lang="en-US"/>
           </a:p>
@@ -1716,7 +1895,7 @@
           <a:p>
             <a:fld id="{053C3A68-6922-42D3-8905-ECC2D82A3469}" type="datetime1">
               <a:rPr lang="en-US" smtClean="0"/>
-              <a:t>10/1/2026</a:t>
+              <a:t>6/2/2026</a:t>
             </a:fld>
             <a:endParaRPr lang="en-US"/>
           </a:p>
@@ -1908,7 +2087,7 @@
           <a:p>
             <a:fld id="{CB69E9F4-7604-4950-A8B2-8ACDEDB1506E}" type="datetime1">
               <a:rPr lang="en-US" smtClean="0"/>
-              <a:t>10/1/2026</a:t>
+              <a:t>6/2/2026</a:t>
             </a:fld>
             <a:endParaRPr lang="en-US"/>
           </a:p>
@@ -2090,7 +2269,7 @@
           <a:p>
             <a:fld id="{708B7524-32A2-4C20-A58C-BC3BAA1042FC}" type="datetime1">
               <a:rPr lang="en-US" smtClean="0"/>
-              <a:t>10/1/2026</a:t>
+              <a:t>6/2/2026</a:t>
             </a:fld>
             <a:endParaRPr lang="en-US"/>
           </a:p>
@@ -2349,7 +2528,7 @@
           <a:p>
             <a:fld id="{1E994447-D6B2-43BB-A877-57F1A267B999}" type="datetime1">
               <a:rPr lang="en-US" smtClean="0"/>
-              <a:t>10/1/2026</a:t>
+              <a:t>6/2/2026</a:t>
             </a:fld>
             <a:endParaRPr lang="en-US"/>
           </a:p>
@@ -2648,7 +2827,7 @@
           <a:p>
             <a:fld id="{68920E16-BD35-483C-AA6B-346FC7E46DEA}" type="datetime1">
               <a:rPr lang="en-US" smtClean="0"/>
-              <a:t>10/1/2026</a:t>
+              <a:t>6/2/2026</a:t>
             </a:fld>
             <a:endParaRPr lang="en-US"/>
           </a:p>
@@ -3081,7 +3260,7 @@
           <a:p>
             <a:fld id="{2FEAC6F8-5103-4FC0-A69E-5C6AE6469DA8}" type="datetime1">
               <a:rPr lang="en-US" smtClean="0"/>
-              <a:t>10/1/2026</a:t>
+              <a:t>6/2/2026</a:t>
             </a:fld>
             <a:endParaRPr lang="en-US"/>
           </a:p>
@@ -3212,7 +3391,7 @@
           <a:p>
             <a:fld id="{C60C6921-0627-4C8F-83D5-0CF936D2FFDD}" type="datetime1">
               <a:rPr lang="en-US" smtClean="0"/>
-              <a:t>10/1/2026</a:t>
+              <a:t>6/2/2026</a:t>
             </a:fld>
             <a:endParaRPr lang="en-US"/>
           </a:p>
@@ -3321,7 +3500,7 @@
           <a:p>
             <a:fld id="{2FF08AD7-8103-40F8-983C-E2BA6BB9CBE0}" type="datetime1">
               <a:rPr lang="en-US" smtClean="0"/>
-              <a:t>10/1/2026</a:t>
+              <a:t>6/2/2026</a:t>
             </a:fld>
             <a:endParaRPr lang="en-US"/>
           </a:p>
@@ -3610,7 +3789,7 @@
           <a:p>
             <a:fld id="{DF8C06B4-9380-4A4D-AF49-A3596E17DAF5}" type="datetime1">
               <a:rPr lang="en-US" smtClean="0"/>
-              <a:t>10/1/2026</a:t>
+              <a:t>6/2/2026</a:t>
             </a:fld>
             <a:endParaRPr lang="en-US"/>
           </a:p>
@@ -3879,7 +4058,7 @@
           <a:p>
             <a:fld id="{EF7FDEF1-C582-4E22-9E77-D68326471F28}" type="datetime1">
               <a:rPr lang="en-US" smtClean="0"/>
-              <a:t>10/1/2026</a:t>
+              <a:t>6/2/2026</a:t>
             </a:fld>
             <a:endParaRPr lang="en-US"/>
           </a:p>
@@ -4122,7 +4301,7 @@
           <a:p>
             <a:fld id="{780A9602-A9A9-453F-AEF1-37B5837E02CD}" type="datetime1">
               <a:rPr lang="en-US" smtClean="0"/>
-              <a:t>10/1/2026</a:t>
+              <a:t>6/2/2026</a:t>
             </a:fld>
             <a:endParaRPr lang="en-US"/>
           </a:p>
@@ -4673,7 +4852,7 @@
                 <a16:creationId xmlns:a16="http://schemas.microsoft.com/office/drawing/2014/main" id="{3E443FD7-A66B-4AA0-872D-B088B9BC5F17}"/>
               </a:ext>
               <a:ext uri="{C183D7F6-B498-43B3-948B-1728B52AA6E4}">
-                <adec:decorative xmlns:adec="http://schemas.microsoft.com/office/drawing/2017/decorative" val="1"/>
+                <adec:decorative xmlns:adec="http://schemas.microsoft.com/office/drawing/2017/decorative" xmlns="" val="1"/>
               </a:ext>
             </a:extLst>
           </p:cNvPr>
@@ -4733,7 +4912,7 @@
                 <a16:creationId xmlns:a16="http://schemas.microsoft.com/office/drawing/2014/main" id="{C04BE0EF-3561-49B4-9A29-F283168A91C7}"/>
               </a:ext>
               <a:ext uri="{C183D7F6-B498-43B3-948B-1728B52AA6E4}">
-                <adec:decorative xmlns:adec="http://schemas.microsoft.com/office/drawing/2017/decorative" val="1"/>
+                <adec:decorative xmlns:adec="http://schemas.microsoft.com/office/drawing/2017/decorative" xmlns="" val="1"/>
               </a:ext>
             </a:extLst>
           </p:cNvPr>
@@ -5604,7 +5783,16 @@
                 </a:solidFill>
                 <a:latin typeface="Garamond" panose="02020404030301010803" pitchFamily="18" charset="0"/>
               </a:rPr>
-              <a:t>SMART INDIA HACKATHON 2026</a:t>
+              <a:t>SMART INDIA HACKATHON </a:t>
+            </a:r>
+            <a:r>
+              <a:rPr lang="en-US" sz="4000" b="1" dirty="0" smtClean="0">
+                <a:solidFill>
+                  <a:schemeClr val="tx2"/>
+                </a:solidFill>
+                <a:latin typeface="Garamond" panose="02020404030301010803" pitchFamily="18" charset="0"/>
+              </a:rPr>
+              <a:t>2026</a:t>
             </a:r>
             <a:endParaRPr lang="en-IN" sz="4000" b="1" dirty="0">
               <a:solidFill>
@@ -5623,8 +5811,8 @@
         </p:nvSpPr>
         <p:spPr>
           <a:xfrm>
-            <a:off x="331286" y="2076449"/>
-            <a:ext cx="6150990" cy="4657685"/>
+            <a:off x="331286" y="2076450"/>
+            <a:ext cx="5924550" cy="4703019"/>
           </a:xfrm>
           <a:prstGeom prst="rect">
             <a:avLst/>
@@ -5646,7 +5834,7 @@
               </a:spcAft>
             </a:pPr>
             <a:r>
-              <a:rPr b="1" dirty="0">
+              <a:rPr b="1" sz="1150">
                 <a:solidFill>
                   <a:srgbClr val="E06D14"/>
                 </a:solidFill>
@@ -5655,7 +5843,7 @@
               <a:t>Problem Statement ID: </a:t>
             </a:r>
             <a:r>
-              <a:rPr dirty="0">
+              <a:rPr sz="1150">
                 <a:solidFill>
                   <a:srgbClr val="1E293B"/>
                 </a:solidFill>
@@ -5671,7 +5859,7 @@
               </a:spcAft>
             </a:pPr>
             <a:r>
-              <a:rPr b="1" dirty="0">
+              <a:rPr b="1" sz="1150">
                 <a:solidFill>
                   <a:srgbClr val="E06D14"/>
                 </a:solidFill>
@@ -5680,7 +5868,7 @@
               <a:t>Problem Statement Title: </a:t>
             </a:r>
             <a:r>
-              <a:rPr dirty="0">
+              <a:rPr sz="1150">
                 <a:solidFill>
                   <a:srgbClr val="1E293B"/>
                 </a:solidFill>
@@ -5696,7 +5884,7 @@
               </a:spcAft>
             </a:pPr>
             <a:r>
-              <a:rPr b="1" dirty="0">
+              <a:rPr b="1" sz="1150">
                 <a:solidFill>
                   <a:srgbClr val="E06D14"/>
                 </a:solidFill>
@@ -5705,7 +5893,7 @@
               <a:t>Theme: </a:t>
             </a:r>
             <a:r>
-              <a:rPr dirty="0">
+              <a:rPr sz="1150">
                 <a:solidFill>
                   <a:srgbClr val="1E293B"/>
                 </a:solidFill>
@@ -5721,7 +5909,7 @@
               </a:spcAft>
             </a:pPr>
             <a:r>
-              <a:rPr b="1" dirty="0">
+              <a:rPr b="1" sz="1150">
                 <a:solidFill>
                   <a:srgbClr val="E06D14"/>
                 </a:solidFill>
@@ -5730,7 +5918,7 @@
               <a:t>PS Category: </a:t>
             </a:r>
             <a:r>
-              <a:rPr dirty="0">
+              <a:rPr sz="1150">
                 <a:solidFill>
                   <a:srgbClr val="1E293B"/>
                 </a:solidFill>
@@ -5746,7 +5934,7 @@
               </a:spcAft>
             </a:pPr>
             <a:r>
-              <a:rPr b="1" dirty="0">
+              <a:rPr b="1" sz="1150">
                 <a:solidFill>
                   <a:srgbClr val="E06D14"/>
                 </a:solidFill>
@@ -5755,49 +5943,13 @@
               <a:t>Ministry: </a:t>
             </a:r>
             <a:r>
-              <a:rPr dirty="0">
+              <a:rPr sz="1150">
                 <a:solidFill>
                   <a:srgbClr val="1E293B"/>
                 </a:solidFill>
                 <a:latin typeface="Calibri"/>
               </a:rPr>
-              <a:t>Ministry of Statistics and </a:t>
-            </a:r>
-            <a:r>
-              <a:rPr dirty="0" err="1">
-                <a:solidFill>
-                  <a:srgbClr val="1E293B"/>
-                </a:solidFill>
-                <a:latin typeface="Calibri"/>
-              </a:rPr>
-              <a:t>Programme</a:t>
-            </a:r>
-            <a:r>
-              <a:rPr dirty="0">
-                <a:solidFill>
-                  <a:srgbClr val="1E293B"/>
-                </a:solidFill>
-                <a:latin typeface="Calibri"/>
-              </a:rPr>
-              <a:t> Implementation (</a:t>
-            </a:r>
-            <a:r>
-              <a:rPr dirty="0" err="1">
-                <a:solidFill>
-                  <a:srgbClr val="1E293B"/>
-                </a:solidFill>
-                <a:latin typeface="Calibri"/>
-              </a:rPr>
-              <a:t>MoSPI</a:t>
-            </a:r>
-            <a:r>
-              <a:rPr dirty="0">
-                <a:solidFill>
-                  <a:srgbClr val="1E293B"/>
-                </a:solidFill>
-                <a:latin typeface="Calibri"/>
-              </a:rPr>
-              <a:t>)</a:t>
+              <a:t>Ministry of Statistics and Programme Implementation (MoSPI)</a:t>
             </a:r>
           </a:p>
           <a:p>
@@ -5807,7 +5959,7 @@
               </a:spcAft>
             </a:pPr>
             <a:r>
-              <a:rPr b="1" dirty="0">
+              <a:rPr b="1" sz="1150">
                 <a:solidFill>
                   <a:srgbClr val="E06D14"/>
                 </a:solidFill>
@@ -5816,7 +5968,7 @@
               <a:t>Department: </a:t>
             </a:r>
             <a:r>
-              <a:rPr dirty="0">
+              <a:rPr sz="1150">
                 <a:solidFill>
                   <a:srgbClr val="1E293B"/>
                 </a:solidFill>
@@ -5832,47 +5984,23 @@
               </a:spcAft>
             </a:pPr>
             <a:r>
-              <a:rPr b="1" dirty="0">
+              <a:rPr b="1" sz="1150">
                 <a:solidFill>
                   <a:srgbClr val="E06D14"/>
                 </a:solidFill>
                 <a:latin typeface="Arial"/>
               </a:rPr>
-              <a:t>Team </a:t>
-            </a:r>
-            <a:r>
-              <a:rPr lang="en-US" b="1" dirty="0">
-                <a:solidFill>
-                  <a:srgbClr val="E06D14"/>
-                </a:solidFill>
-                <a:latin typeface="Arial"/>
-              </a:rPr>
-              <a:t>ID</a:t>
-            </a:r>
-            <a:r>
-              <a:rPr b="1" dirty="0">
-                <a:solidFill>
-                  <a:srgbClr val="E06D14"/>
-                </a:solidFill>
-                <a:latin typeface="Arial"/>
-              </a:rPr>
-              <a:t>: </a:t>
-            </a:r>
-            <a:r>
-              <a:rPr lang="en-US" b="1" dirty="0">
+              <a:t>Team Name: </a:t>
+            </a:r>
+            <a:r>
+              <a:rPr sz="1150">
                 <a:solidFill>
                   <a:srgbClr val="1E293B"/>
                 </a:solidFill>
                 <a:latin typeface="Calibri"/>
               </a:rPr>
-              <a:t>SIH-059</a:t>
-            </a:r>
-            <a:endParaRPr dirty="0">
-              <a:solidFill>
-                <a:srgbClr val="1E293B"/>
-              </a:solidFill>
-              <a:latin typeface="Calibri"/>
-            </a:endParaRPr>
+              <a:t>Team InfraVision</a:t>
+            </a:r>
           </a:p>
           <a:p>
             <a:pPr>
@@ -5881,7 +6009,7 @@
               </a:spcAft>
             </a:pPr>
             <a:r>
-              <a:rPr b="1" dirty="0">
+              <a:rPr b="1" sz="1150">
                 <a:solidFill>
                   <a:srgbClr val="E06D14"/>
                 </a:solidFill>
@@ -5890,13 +6018,13 @@
               <a:t>GitHub Repository: </a:t>
             </a:r>
             <a:r>
-              <a:rPr dirty="0">
+              <a:rPr sz="1150">
                 <a:solidFill>
                   <a:srgbClr val="1E293B"/>
                 </a:solidFill>
                 <a:latin typeface="Calibri"/>
               </a:rPr>
-              <a:t>https://github.com/Saba2704/paimana-ai</a:t>
+              <a:t>https://github.com/Saba2704/Paimana-AI</a:t>
             </a:r>
           </a:p>
           <a:p>
@@ -5906,7 +6034,7 @@
               </a:spcAft>
             </a:pPr>
             <a:r>
-              <a:rPr b="1" dirty="0">
+              <a:rPr b="1" sz="1150">
                 <a:solidFill>
                   <a:srgbClr val="E06D14"/>
                 </a:solidFill>
@@ -5915,7 +6043,7 @@
               <a:t>Live Working Prototype: </a:t>
             </a:r>
             <a:r>
-              <a:rPr dirty="0">
+              <a:rPr sz="1150">
                 <a:solidFill>
                   <a:srgbClr val="1E293B"/>
                 </a:solidFill>
@@ -5965,7 +6093,7 @@
         <p:spPr>
           <a:xfrm>
             <a:off x="365760" y="1188720"/>
-            <a:ext cx="5943600" cy="822960"/>
+            <a:ext cx="5943600" cy="868680"/>
           </a:xfrm>
           <a:prstGeom prst="roundRect">
             <a:avLst/>
@@ -5994,11 +6122,11 @@
           </a:fontRef>
         </p:style>
         <p:txBody>
-          <a:bodyPr wrap="square" rtlCol="0" anchor="ctr"/>
+          <a:bodyPr rtlCol="0" anchor="ctr" wrap="square"/>
           <a:lstStyle/>
           <a:p>
             <a:pPr algn="ctr">
-              <a:defRPr sz="1600" b="1">
+              <a:defRPr sz="1700" b="1">
                 <a:solidFill>
                   <a:srgbClr val="FFFFFF"/>
                 </a:solidFill>
@@ -6011,7 +6139,7 @@
           </a:p>
           <a:p>
             <a:pPr>
-              <a:defRPr sz="1000">
+              <a:defRPr sz="1050">
                 <a:solidFill>
                   <a:srgbClr val="E2E8F0"/>
                 </a:solidFill>
@@ -6263,7 +6391,7 @@
                 <a16:creationId xmlns:a16="http://schemas.microsoft.com/office/drawing/2014/main" id="{5DBCE864-823D-4A13-9607-5DA1F0ED5FB8}"/>
               </a:ext>
               <a:ext uri="{C183D7F6-B498-43B3-948B-1728B52AA6E4}">
-                <adec:decorative xmlns:adec="http://schemas.microsoft.com/office/drawing/2017/decorative" val="0"/>
+                <adec:decorative xmlns:adec="http://schemas.microsoft.com/office/drawing/2017/decorative" xmlns="" val="0"/>
               </a:ext>
             </a:extLst>
           </p:cNvPr>
@@ -6272,8 +6400,8 @@
         </p:nvSpPr>
         <p:spPr>
           <a:xfrm>
-            <a:off x="357808" y="84393"/>
-            <a:ext cx="1356787" cy="807334"/>
+            <a:off x="329773" y="252246"/>
+            <a:ext cx="1251857" cy="807334"/>
           </a:xfrm>
           <a:prstGeom prst="ellipse">
             <a:avLst/>
@@ -6298,20 +6426,8 @@
           <a:lstStyle/>
           <a:p>
             <a:r>
-              <a:rPr lang="en-US" b="1" dirty="0" err="1">
-                <a:solidFill>
-                  <a:schemeClr val="tx1"/>
-                </a:solidFill>
-                <a:latin typeface="New times"/>
-              </a:rPr>
-              <a:t>VigilEye</a:t>
-            </a:r>
-            <a:endParaRPr b="1" dirty="0">
-              <a:solidFill>
-                <a:schemeClr val="tx1"/>
-              </a:solidFill>
-              <a:latin typeface="New times"/>
-            </a:endParaRPr>
+              <a:t>Team InfraVision</a:t>
+            </a:r>
           </a:p>
         </p:txBody>
       </p:sp>
@@ -6353,8 +6469,8 @@
         </p:nvSpPr>
         <p:spPr>
           <a:xfrm>
-            <a:off x="548640" y="1234440"/>
-            <a:ext cx="2011680" cy="2240280"/>
+            <a:off x="502920" y="1234440"/>
+            <a:ext cx="2029968" cy="2331720"/>
           </a:xfrm>
           <a:prstGeom prst="roundRect">
             <a:avLst/>
@@ -6362,7 +6478,7 @@
           <a:solidFill>
             <a:srgbClr val="FFFFFF"/>
           </a:solidFill>
-          <a:ln w="19050">
+          <a:ln w="22225">
             <a:solidFill>
               <a:srgbClr val="0F1E36"/>
             </a:solidFill>
@@ -6387,7 +6503,6 @@
           <a:lstStyle/>
           <a:p>
             <a:pPr algn="ctr"/>
-            <a:endParaRPr/>
           </a:p>
         </p:txBody>
       </p:sp>
@@ -6399,7 +6514,7 @@
         </p:nvSpPr>
         <p:spPr>
           <a:xfrm>
-            <a:off x="585216" y="1271016"/>
+            <a:off x="548640" y="1280160"/>
             <a:ext cx="1938528" cy="384048"/>
           </a:xfrm>
           <a:prstGeom prst="roundRect">
@@ -6431,7 +6546,7 @@
           <a:lstStyle/>
           <a:p>
             <a:pPr algn="ctr">
-              <a:defRPr sz="950" b="1">
+              <a:defRPr sz="1000" b="1">
                 <a:solidFill>
                   <a:srgbClr val="FFFFFF"/>
                 </a:solidFill>
@@ -6439,7 +6554,7 @@
               </a:defRPr>
             </a:pPr>
             <a:r>
-              <a:t>1. Data Ingestion Layer</a:t>
+              <a:t>1. DATA INGESTION</a:t>
             </a:r>
           </a:p>
         </p:txBody>
@@ -6452,8 +6567,8 @@
         </p:nvSpPr>
         <p:spPr>
           <a:xfrm>
-            <a:off x="621792" y="1691640"/>
-            <a:ext cx="1865376" cy="1737360"/>
+            <a:off x="576072" y="1691640"/>
+            <a:ext cx="1883664" cy="1371600"/>
           </a:xfrm>
           <a:prstGeom prst="rect">
             <a:avLst/>
@@ -6475,7 +6590,7 @@
               </a:defRPr>
             </a:pPr>
             <a:r>
-              <a:t>• 1,981 Ongoing Projects</a:t>
+              <a:t>• 1,981 Active Projects</a:t>
             </a:r>
           </a:p>
           <a:p>
@@ -6488,7 +6603,7 @@
               </a:defRPr>
             </a:pPr>
             <a:r>
-              <a:t>• 25+ CUF Standard Fields</a:t>
+              <a:t>• 25+ CUF Form Fields</a:t>
             </a:r>
           </a:p>
           <a:p>
@@ -6514,21 +6629,76 @@
               </a:defRPr>
             </a:pPr>
             <a:r>
-              <a:t>(Contractor, Terrain, WPI)</a:t>
-            </a:r>
-          </a:p>
-        </p:txBody>
-      </p:sp>
-      <p:sp>
-        <p:nvSpPr>
-          <p:cNvPr id="15366" name="Right Arrow 15365"/>
+              <a:t>  (Contractor, Terrain, WPI)</a:t>
+            </a:r>
+          </a:p>
+        </p:txBody>
+      </p:sp>
+      <p:sp>
+        <p:nvSpPr>
+          <p:cNvPr id="15366" name="Rounded Rectangle 15365"/>
           <p:cNvSpPr/>
           <p:nvPr/>
         </p:nvSpPr>
         <p:spPr>
           <a:xfrm>
-            <a:off x="2596896" y="2194560"/>
-            <a:ext cx="164592" cy="274320"/>
+            <a:off x="594360" y="3108960"/>
+            <a:ext cx="1847088" cy="365760"/>
+          </a:xfrm>
+          <a:prstGeom prst="roundRect">
+            <a:avLst/>
+          </a:prstGeom>
+          <a:solidFill>
+            <a:srgbClr val="EFF6FF"/>
+          </a:solidFill>
+          <a:ln w="12700">
+            <a:solidFill>
+              <a:srgbClr val="0F1E36"/>
+            </a:solidFill>
+          </a:ln>
+        </p:spPr>
+        <p:style>
+          <a:lnRef idx="1">
+            <a:schemeClr val="accent1"/>
+          </a:lnRef>
+          <a:fillRef idx="3">
+            <a:schemeClr val="accent1"/>
+          </a:fillRef>
+          <a:effectRef idx="2">
+            <a:schemeClr val="accent1"/>
+          </a:effectRef>
+          <a:fontRef idx="minor">
+            <a:schemeClr val="lt1"/>
+          </a:fontRef>
+        </p:style>
+        <p:txBody>
+          <a:bodyPr rtlCol="0" anchor="ctr"/>
+          <a:lstStyle/>
+          <a:p>
+            <a:pPr algn="ctr">
+              <a:defRPr sz="900" b="1">
+                <a:solidFill>
+                  <a:srgbClr val="0F1E36"/>
+                </a:solidFill>
+                <a:latin typeface="Arial"/>
+              </a:defRPr>
+            </a:pPr>
+            <a:r>
+              <a:t>🏛️ PAIMANA-CRIP INGEST</a:t>
+            </a:r>
+          </a:p>
+        </p:txBody>
+      </p:sp>
+      <p:sp>
+        <p:nvSpPr>
+          <p:cNvPr id="15367" name="Right Arrow 15366"/>
+          <p:cNvSpPr/>
+          <p:nvPr/>
+        </p:nvSpPr>
+        <p:spPr>
+          <a:xfrm>
+            <a:off x="2560320" y="2194560"/>
+            <a:ext cx="164592" cy="292608"/>
           </a:xfrm>
           <a:prstGeom prst="rightArrow">
             <a:avLst/>
@@ -6559,20 +6729,19 @@
           <a:lstStyle/>
           <a:p>
             <a:pPr algn="ctr"/>
-            <a:endParaRPr/>
-          </a:p>
-        </p:txBody>
-      </p:sp>
-      <p:sp>
-        <p:nvSpPr>
-          <p:cNvPr id="15367" name="Rounded Rectangle 15366"/>
+          </a:p>
+        </p:txBody>
+      </p:sp>
+      <p:sp>
+        <p:nvSpPr>
+          <p:cNvPr id="15368" name="Rounded Rectangle 15367"/>
           <p:cNvSpPr/>
           <p:nvPr/>
         </p:nvSpPr>
         <p:spPr>
           <a:xfrm>
-            <a:off x="2788920" y="1234440"/>
-            <a:ext cx="2011680" cy="2240280"/>
+            <a:off x="2752344" y="1234440"/>
+            <a:ext cx="2029968" cy="2331720"/>
           </a:xfrm>
           <a:prstGeom prst="roundRect">
             <a:avLst/>
@@ -6580,7 +6749,7 @@
           <a:solidFill>
             <a:srgbClr val="FFFFFF"/>
           </a:solidFill>
-          <a:ln w="19050">
+          <a:ln w="22225">
             <a:solidFill>
               <a:srgbClr val="E06D14"/>
             </a:solidFill>
@@ -6605,19 +6774,18 @@
           <a:lstStyle/>
           <a:p>
             <a:pPr algn="ctr"/>
-            <a:endParaRPr/>
-          </a:p>
-        </p:txBody>
-      </p:sp>
-      <p:sp>
-        <p:nvSpPr>
-          <p:cNvPr id="15368" name="Rounded Rectangle 15367"/>
+          </a:p>
+        </p:txBody>
+      </p:sp>
+      <p:sp>
+        <p:nvSpPr>
+          <p:cNvPr id="15369" name="Rounded Rectangle 15368"/>
           <p:cNvSpPr/>
           <p:nvPr/>
         </p:nvSpPr>
         <p:spPr>
           <a:xfrm>
-            <a:off x="2825496" y="1271016"/>
+            <a:off x="2798063" y="1280160"/>
             <a:ext cx="1938528" cy="384048"/>
           </a:xfrm>
           <a:prstGeom prst="roundRect">
@@ -6649,7 +6817,7 @@
           <a:lstStyle/>
           <a:p>
             <a:pPr algn="ctr">
-              <a:defRPr sz="950" b="1">
+              <a:defRPr sz="1000" b="1">
                 <a:solidFill>
                   <a:srgbClr val="FFFFFF"/>
                 </a:solidFill>
@@ -6657,21 +6825,21 @@
               </a:defRPr>
             </a:pPr>
             <a:r>
-              <a:t>2. Derived Velocity Ratios</a:t>
-            </a:r>
-          </a:p>
-        </p:txBody>
-      </p:sp>
-      <p:sp>
-        <p:nvSpPr>
-          <p:cNvPr id="15369" name="TextBox 15368"/>
+              <a:t>2. VELOCITY ENGINE</a:t>
+            </a:r>
+          </a:p>
+        </p:txBody>
+      </p:sp>
+      <p:sp>
+        <p:nvSpPr>
+          <p:cNvPr id="15370" name="TextBox 15369"/>
           <p:cNvSpPr txBox="1"/>
           <p:nvPr/>
         </p:nvSpPr>
         <p:spPr>
           <a:xfrm>
-            <a:off x="2862072" y="1691640"/>
-            <a:ext cx="1865376" cy="1737360"/>
+            <a:off x="2825496" y="1691640"/>
+            <a:ext cx="1883664" cy="1371600"/>
           </a:xfrm>
           <a:prstGeom prst="rect">
             <a:avLst/>
@@ -6693,7 +6861,7 @@
               </a:defRPr>
             </a:pPr>
             <a:r>
-              <a:t>• Burn Divergence Ratio</a:t>
+              <a:t>• Burn Disparity Ratio</a:t>
             </a:r>
           </a:p>
           <a:p>
@@ -6706,7 +6874,7 @@
               </a:defRPr>
             </a:pPr>
             <a:r>
-              <a:t>• Milestone Slippage Velocity</a:t>
+              <a:t>• Milestone Slippage Pace</a:t>
             </a:r>
           </a:p>
           <a:p>
@@ -6719,7 +6887,7 @@
               </a:defRPr>
             </a:pPr>
             <a:r>
-              <a:t>• Bottleneck Friction Index</a:t>
+              <a:t>• Statutory Friction Index</a:t>
             </a:r>
           </a:p>
           <a:p>
@@ -6739,14 +6907,69 @@
       </p:sp>
       <p:sp>
         <p:nvSpPr>
-          <p:cNvPr id="15370" name="Right Arrow 15369"/>
+          <p:cNvPr id="15371" name="Rounded Rectangle 15370"/>
           <p:cNvSpPr/>
           <p:nvPr/>
         </p:nvSpPr>
         <p:spPr>
           <a:xfrm>
-            <a:off x="4837176" y="2194560"/>
-            <a:ext cx="164592" cy="274320"/>
+            <a:off x="2843784" y="3108960"/>
+            <a:ext cx="1847088" cy="365760"/>
+          </a:xfrm>
+          <a:prstGeom prst="roundRect">
+            <a:avLst/>
+          </a:prstGeom>
+          <a:solidFill>
+            <a:srgbClr val="FFF7ED"/>
+          </a:solidFill>
+          <a:ln w="12700">
+            <a:solidFill>
+              <a:srgbClr val="E06D14"/>
+            </a:solidFill>
+          </a:ln>
+        </p:spPr>
+        <p:style>
+          <a:lnRef idx="1">
+            <a:schemeClr val="accent1"/>
+          </a:lnRef>
+          <a:fillRef idx="3">
+            <a:schemeClr val="accent1"/>
+          </a:fillRef>
+          <a:effectRef idx="2">
+            <a:schemeClr val="accent1"/>
+          </a:effectRef>
+          <a:fontRef idx="minor">
+            <a:schemeClr val="lt1"/>
+          </a:fontRef>
+        </p:style>
+        <p:txBody>
+          <a:bodyPr rtlCol="0" anchor="ctr"/>
+          <a:lstStyle/>
+          <a:p>
+            <a:pPr algn="ctr">
+              <a:defRPr sz="900" b="1">
+                <a:solidFill>
+                  <a:srgbClr val="E06D14"/>
+                </a:solidFill>
+                <a:latin typeface="Arial"/>
+              </a:defRPr>
+            </a:pPr>
+            <a:r>
+              <a:t>⚡ PROGRESS VELOCITY</a:t>
+            </a:r>
+          </a:p>
+        </p:txBody>
+      </p:sp>
+      <p:sp>
+        <p:nvSpPr>
+          <p:cNvPr id="15372" name="Right Arrow 15371"/>
+          <p:cNvSpPr/>
+          <p:nvPr/>
+        </p:nvSpPr>
+        <p:spPr>
+          <a:xfrm>
+            <a:off x="4809744" y="2194560"/>
+            <a:ext cx="164592" cy="292608"/>
           </a:xfrm>
           <a:prstGeom prst="rightArrow">
             <a:avLst/>
@@ -6777,20 +7000,19 @@
           <a:lstStyle/>
           <a:p>
             <a:pPr algn="ctr"/>
-            <a:endParaRPr/>
-          </a:p>
-        </p:txBody>
-      </p:sp>
-      <p:sp>
-        <p:nvSpPr>
-          <p:cNvPr id="15371" name="Rounded Rectangle 15370"/>
+          </a:p>
+        </p:txBody>
+      </p:sp>
+      <p:sp>
+        <p:nvSpPr>
+          <p:cNvPr id="15373" name="Rounded Rectangle 15372"/>
           <p:cNvSpPr/>
           <p:nvPr/>
         </p:nvSpPr>
         <p:spPr>
           <a:xfrm>
-            <a:off x="5029200" y="1234440"/>
-            <a:ext cx="2011680" cy="2240280"/>
+            <a:off x="5001768" y="1234440"/>
+            <a:ext cx="2029968" cy="2331720"/>
           </a:xfrm>
           <a:prstGeom prst="roundRect">
             <a:avLst/>
@@ -6798,7 +7020,7 @@
           <a:solidFill>
             <a:srgbClr val="FFFFFF"/>
           </a:solidFill>
-          <a:ln w="19050">
+          <a:ln w="22225">
             <a:solidFill>
               <a:srgbClr val="0F1E36"/>
             </a:solidFill>
@@ -6823,19 +7045,18 @@
           <a:lstStyle/>
           <a:p>
             <a:pPr algn="ctr"/>
-            <a:endParaRPr/>
-          </a:p>
-        </p:txBody>
-      </p:sp>
-      <p:sp>
-        <p:nvSpPr>
-          <p:cNvPr id="15372" name="Rounded Rectangle 15371"/>
+          </a:p>
+        </p:txBody>
+      </p:sp>
+      <p:sp>
+        <p:nvSpPr>
+          <p:cNvPr id="15374" name="Rounded Rectangle 15373"/>
           <p:cNvSpPr/>
           <p:nvPr/>
         </p:nvSpPr>
         <p:spPr>
           <a:xfrm>
-            <a:off x="5065776" y="1271016"/>
+            <a:off x="5047488" y="1280160"/>
             <a:ext cx="1938528" cy="384048"/>
           </a:xfrm>
           <a:prstGeom prst="roundRect">
@@ -6867,7 +7088,7 @@
           <a:lstStyle/>
           <a:p>
             <a:pPr algn="ctr">
-              <a:defRPr sz="950" b="1">
+              <a:defRPr sz="1000" b="1">
                 <a:solidFill>
                   <a:srgbClr val="FFFFFF"/>
                 </a:solidFill>
@@ -6875,21 +7096,21 @@
               </a:defRPr>
             </a:pPr>
             <a:r>
-              <a:t>3. Predictive ML Core</a:t>
-            </a:r>
-          </a:p>
-        </p:txBody>
-      </p:sp>
-      <p:sp>
-        <p:nvSpPr>
-          <p:cNvPr id="15373" name="TextBox 15372"/>
+              <a:t>3. PREDICTIVE ML CORE</a:t>
+            </a:r>
+          </a:p>
+        </p:txBody>
+      </p:sp>
+      <p:sp>
+        <p:nvSpPr>
+          <p:cNvPr id="15375" name="TextBox 15374"/>
           <p:cNvSpPr txBox="1"/>
           <p:nvPr/>
         </p:nvSpPr>
         <p:spPr>
           <a:xfrm>
-            <a:off x="5102352" y="1691640"/>
-            <a:ext cx="1865376" cy="1737360"/>
+            <a:off x="5074920" y="1691640"/>
+            <a:ext cx="1883664" cy="1371600"/>
           </a:xfrm>
           <a:prstGeom prst="rect">
             <a:avLst/>
@@ -6957,14 +7178,69 @@
       </p:sp>
       <p:sp>
         <p:nvSpPr>
-          <p:cNvPr id="15374" name="Right Arrow 15373"/>
+          <p:cNvPr id="15376" name="Rounded Rectangle 15375"/>
           <p:cNvSpPr/>
           <p:nvPr/>
         </p:nvSpPr>
         <p:spPr>
           <a:xfrm>
-            <a:off x="7077456" y="2194560"/>
-            <a:ext cx="164592" cy="274320"/>
+            <a:off x="5093207" y="3108960"/>
+            <a:ext cx="1847088" cy="365760"/>
+          </a:xfrm>
+          <a:prstGeom prst="roundRect">
+            <a:avLst/>
+          </a:prstGeom>
+          <a:solidFill>
+            <a:srgbClr val="EFF6FF"/>
+          </a:solidFill>
+          <a:ln w="12700">
+            <a:solidFill>
+              <a:srgbClr val="0F1E36"/>
+            </a:solidFill>
+          </a:ln>
+        </p:spPr>
+        <p:style>
+          <a:lnRef idx="1">
+            <a:schemeClr val="accent1"/>
+          </a:lnRef>
+          <a:fillRef idx="3">
+            <a:schemeClr val="accent1"/>
+          </a:fillRef>
+          <a:effectRef idx="2">
+            <a:schemeClr val="accent1"/>
+          </a:effectRef>
+          <a:fontRef idx="minor">
+            <a:schemeClr val="lt1"/>
+          </a:fontRef>
+        </p:style>
+        <p:txBody>
+          <a:bodyPr rtlCol="0" anchor="ctr"/>
+          <a:lstStyle/>
+          <a:p>
+            <a:pPr algn="ctr">
+              <a:defRPr sz="900" b="1">
+                <a:solidFill>
+                  <a:srgbClr val="0F1E36"/>
+                </a:solidFill>
+                <a:latin typeface="Arial"/>
+              </a:defRPr>
+            </a:pPr>
+            <a:r>
+              <a:t>🤖 DUAL ML FORECASTER</a:t>
+            </a:r>
+          </a:p>
+        </p:txBody>
+      </p:sp>
+      <p:sp>
+        <p:nvSpPr>
+          <p:cNvPr id="15377" name="Right Arrow 15376"/>
+          <p:cNvSpPr/>
+          <p:nvPr/>
+        </p:nvSpPr>
+        <p:spPr>
+          <a:xfrm>
+            <a:off x="7059168" y="2194560"/>
+            <a:ext cx="164592" cy="292608"/>
           </a:xfrm>
           <a:prstGeom prst="rightArrow">
             <a:avLst/>
@@ -6995,20 +7271,19 @@
           <a:lstStyle/>
           <a:p>
             <a:pPr algn="ctr"/>
-            <a:endParaRPr/>
-          </a:p>
-        </p:txBody>
-      </p:sp>
-      <p:sp>
-        <p:nvSpPr>
-          <p:cNvPr id="15375" name="Rounded Rectangle 15374"/>
+          </a:p>
+        </p:txBody>
+      </p:sp>
+      <p:sp>
+        <p:nvSpPr>
+          <p:cNvPr id="15378" name="Rounded Rectangle 15377"/>
           <p:cNvSpPr/>
           <p:nvPr/>
         </p:nvSpPr>
         <p:spPr>
           <a:xfrm>
-            <a:off x="7269480" y="1234440"/>
-            <a:ext cx="2011680" cy="2240280"/>
+            <a:off x="7251192" y="1234440"/>
+            <a:ext cx="2029968" cy="2331720"/>
           </a:xfrm>
           <a:prstGeom prst="roundRect">
             <a:avLst/>
@@ -7016,7 +7291,7 @@
           <a:solidFill>
             <a:srgbClr val="FFFFFF"/>
           </a:solidFill>
-          <a:ln w="19050">
+          <a:ln w="22225">
             <a:solidFill>
               <a:srgbClr val="E06D14"/>
             </a:solidFill>
@@ -7041,19 +7316,18 @@
           <a:lstStyle/>
           <a:p>
             <a:pPr algn="ctr"/>
-            <a:endParaRPr/>
-          </a:p>
-        </p:txBody>
-      </p:sp>
-      <p:sp>
-        <p:nvSpPr>
-          <p:cNvPr id="15376" name="Rounded Rectangle 15375"/>
+          </a:p>
+        </p:txBody>
+      </p:sp>
+      <p:sp>
+        <p:nvSpPr>
+          <p:cNvPr id="15379" name="Rounded Rectangle 15378"/>
           <p:cNvSpPr/>
           <p:nvPr/>
         </p:nvSpPr>
         <p:spPr>
           <a:xfrm>
-            <a:off x="7306056" y="1271016"/>
+            <a:off x="7296912" y="1280160"/>
             <a:ext cx="1938528" cy="384048"/>
           </a:xfrm>
           <a:prstGeom prst="roundRect">
@@ -7085,7 +7359,7 @@
           <a:lstStyle/>
           <a:p>
             <a:pPr algn="ctr">
-              <a:defRPr sz="950" b="1">
+              <a:defRPr sz="1000" b="1">
                 <a:solidFill>
                   <a:srgbClr val="FFFFFF"/>
                 </a:solidFill>
@@ -7093,21 +7367,21 @@
               </a:defRPr>
             </a:pPr>
             <a:r>
-              <a:t>4. Decision &amp; Alert Engine</a:t>
-            </a:r>
-          </a:p>
-        </p:txBody>
-      </p:sp>
-      <p:sp>
-        <p:nvSpPr>
-          <p:cNvPr id="15377" name="TextBox 15376"/>
+              <a:t>4. DECISION ENGINE</a:t>
+            </a:r>
+          </a:p>
+        </p:txBody>
+      </p:sp>
+      <p:sp>
+        <p:nvSpPr>
+          <p:cNvPr id="15380" name="TextBox 15379"/>
           <p:cNvSpPr txBox="1"/>
           <p:nvPr/>
         </p:nvSpPr>
         <p:spPr>
           <a:xfrm>
-            <a:off x="7342631" y="1691640"/>
-            <a:ext cx="1865376" cy="1737360"/>
+            <a:off x="7324344" y="1691640"/>
+            <a:ext cx="1883664" cy="1371600"/>
           </a:xfrm>
           <a:prstGeom prst="rect">
             <a:avLst/>
@@ -7129,7 +7403,7 @@
               </a:defRPr>
             </a:pPr>
             <a:r>
-              <a:t>• Composite Risk Index (CRI)</a:t>
+              <a:t>• Composite Risk (CRI 0-100)</a:t>
             </a:r>
           </a:p>
           <a:p>
@@ -7168,21 +7442,76 @@
               </a:defRPr>
             </a:pPr>
             <a:r>
-              <a:t>• Clearance Cascade Alert</a:t>
-            </a:r>
-          </a:p>
-        </p:txBody>
-      </p:sp>
-      <p:sp>
-        <p:nvSpPr>
-          <p:cNvPr id="15378" name="Right Arrow 15377"/>
+              <a:t>• Cascade Blockage Alerts</a:t>
+            </a:r>
+          </a:p>
+        </p:txBody>
+      </p:sp>
+      <p:sp>
+        <p:nvSpPr>
+          <p:cNvPr id="15381" name="Rounded Rectangle 15380"/>
           <p:cNvSpPr/>
           <p:nvPr/>
         </p:nvSpPr>
         <p:spPr>
           <a:xfrm>
-            <a:off x="9317736" y="2194560"/>
-            <a:ext cx="164592" cy="274320"/>
+            <a:off x="7342631" y="3108960"/>
+            <a:ext cx="1847088" cy="365760"/>
+          </a:xfrm>
+          <a:prstGeom prst="roundRect">
+            <a:avLst/>
+          </a:prstGeom>
+          <a:solidFill>
+            <a:srgbClr val="FFF7ED"/>
+          </a:solidFill>
+          <a:ln w="12700">
+            <a:solidFill>
+              <a:srgbClr val="E06D14"/>
+            </a:solidFill>
+          </a:ln>
+        </p:spPr>
+        <p:style>
+          <a:lnRef idx="1">
+            <a:schemeClr val="accent1"/>
+          </a:lnRef>
+          <a:fillRef idx="3">
+            <a:schemeClr val="accent1"/>
+          </a:fillRef>
+          <a:effectRef idx="2">
+            <a:schemeClr val="accent1"/>
+          </a:effectRef>
+          <a:fontRef idx="minor">
+            <a:schemeClr val="lt1"/>
+          </a:fontRef>
+        </p:style>
+        <p:txBody>
+          <a:bodyPr rtlCol="0" anchor="ctr"/>
+          <a:lstStyle/>
+          <a:p>
+            <a:pPr algn="ctr">
+              <a:defRPr sz="900" b="1">
+                <a:solidFill>
+                  <a:srgbClr val="E06D14"/>
+                </a:solidFill>
+                <a:latin typeface="Arial"/>
+              </a:defRPr>
+            </a:pPr>
+            <a:r>
+              <a:t>⚠️ EARLY WARNING DESK</a:t>
+            </a:r>
+          </a:p>
+        </p:txBody>
+      </p:sp>
+      <p:sp>
+        <p:nvSpPr>
+          <p:cNvPr id="15382" name="Right Arrow 15381"/>
+          <p:cNvSpPr/>
+          <p:nvPr/>
+        </p:nvSpPr>
+        <p:spPr>
+          <a:xfrm>
+            <a:off x="9308592" y="2194560"/>
+            <a:ext cx="164592" cy="292608"/>
           </a:xfrm>
           <a:prstGeom prst="rightArrow">
             <a:avLst/>
@@ -7213,20 +7542,19 @@
           <a:lstStyle/>
           <a:p>
             <a:pPr algn="ctr"/>
-            <a:endParaRPr/>
-          </a:p>
-        </p:txBody>
-      </p:sp>
-      <p:sp>
-        <p:nvSpPr>
-          <p:cNvPr id="15379" name="Rounded Rectangle 15378"/>
+          </a:p>
+        </p:txBody>
+      </p:sp>
+      <p:sp>
+        <p:nvSpPr>
+          <p:cNvPr id="15383" name="Rounded Rectangle 15382"/>
           <p:cNvSpPr/>
           <p:nvPr/>
         </p:nvSpPr>
         <p:spPr>
           <a:xfrm>
-            <a:off x="9509760" y="1234440"/>
-            <a:ext cx="2011680" cy="2240280"/>
+            <a:off x="9500616" y="1234440"/>
+            <a:ext cx="2029968" cy="2331720"/>
           </a:xfrm>
           <a:prstGeom prst="roundRect">
             <a:avLst/>
@@ -7234,7 +7562,7 @@
           <a:solidFill>
             <a:srgbClr val="FFFFFF"/>
           </a:solidFill>
-          <a:ln w="19050">
+          <a:ln w="22225">
             <a:solidFill>
               <a:srgbClr val="059669"/>
             </a:solidFill>
@@ -7259,19 +7587,18 @@
           <a:lstStyle/>
           <a:p>
             <a:pPr algn="ctr"/>
-            <a:endParaRPr/>
-          </a:p>
-        </p:txBody>
-      </p:sp>
-      <p:sp>
-        <p:nvSpPr>
-          <p:cNvPr id="15380" name="Rounded Rectangle 15379"/>
+          </a:p>
+        </p:txBody>
+      </p:sp>
+      <p:sp>
+        <p:nvSpPr>
+          <p:cNvPr id="15384" name="Rounded Rectangle 15383"/>
           <p:cNvSpPr/>
           <p:nvPr/>
         </p:nvSpPr>
         <p:spPr>
           <a:xfrm>
-            <a:off x="9546336" y="1271016"/>
+            <a:off x="9546336" y="1280160"/>
             <a:ext cx="1938528" cy="384048"/>
           </a:xfrm>
           <a:prstGeom prst="roundRect">
@@ -7303,7 +7630,7 @@
           <a:lstStyle/>
           <a:p>
             <a:pPr algn="ctr">
-              <a:defRPr sz="950" b="1">
+              <a:defRPr sz="1000" b="1">
                 <a:solidFill>
                   <a:srgbClr val="FFFFFF"/>
                 </a:solidFill>
@@ -7311,21 +7638,21 @@
               </a:defRPr>
             </a:pPr>
             <a:r>
-              <a:t>5. Actionable Delivery</a:t>
-            </a:r>
-          </a:p>
-        </p:txBody>
-      </p:sp>
-      <p:sp>
-        <p:nvSpPr>
-          <p:cNvPr id="15381" name="TextBox 15380"/>
+              <a:t>5. ACTION DELIVERY</a:t>
+            </a:r>
+          </a:p>
+        </p:txBody>
+      </p:sp>
+      <p:sp>
+        <p:nvSpPr>
+          <p:cNvPr id="15385" name="TextBox 15384"/>
           <p:cNvSpPr txBox="1"/>
           <p:nvPr/>
         </p:nvSpPr>
         <p:spPr>
           <a:xfrm>
-            <a:off x="9582912" y="1691640"/>
-            <a:ext cx="1865376" cy="1737360"/>
+            <a:off x="9573768" y="1691640"/>
+            <a:ext cx="1883664" cy="1371600"/>
           </a:xfrm>
           <a:prstGeom prst="rect">
             <a:avLst/>
@@ -7347,7 +7674,7 @@
               </a:defRPr>
             </a:pPr>
             <a:r>
-              <a:t>• Interactive Web Dashboard</a:t>
+              <a:t>• Interactive Web Portal</a:t>
             </a:r>
           </a:p>
           <a:p>
@@ -7393,14 +7720,69 @@
       </p:sp>
       <p:sp>
         <p:nvSpPr>
-          <p:cNvPr id="15382" name="Rounded Rectangle 15381"/>
+          <p:cNvPr id="15386" name="Rounded Rectangle 15385"/>
           <p:cNvSpPr/>
           <p:nvPr/>
         </p:nvSpPr>
         <p:spPr>
           <a:xfrm>
-            <a:off x="467360" y="3664748"/>
-            <a:ext cx="3566160" cy="2606040"/>
+            <a:off x="9592056" y="3108960"/>
+            <a:ext cx="1847088" cy="365760"/>
+          </a:xfrm>
+          <a:prstGeom prst="roundRect">
+            <a:avLst/>
+          </a:prstGeom>
+          <a:solidFill>
+            <a:srgbClr val="F0FDF4"/>
+          </a:solidFill>
+          <a:ln w="12700">
+            <a:solidFill>
+              <a:srgbClr val="059669"/>
+            </a:solidFill>
+          </a:ln>
+        </p:spPr>
+        <p:style>
+          <a:lnRef idx="1">
+            <a:schemeClr val="accent1"/>
+          </a:lnRef>
+          <a:fillRef idx="3">
+            <a:schemeClr val="accent1"/>
+          </a:fillRef>
+          <a:effectRef idx="2">
+            <a:schemeClr val="accent1"/>
+          </a:effectRef>
+          <a:fontRef idx="minor">
+            <a:schemeClr val="lt1"/>
+          </a:fontRef>
+        </p:style>
+        <p:txBody>
+          <a:bodyPr rtlCol="0" anchor="ctr"/>
+          <a:lstStyle/>
+          <a:p>
+            <a:pPr algn="ctr">
+              <a:defRPr sz="900" b="1">
+                <a:solidFill>
+                  <a:srgbClr val="059669"/>
+                </a:solidFill>
+                <a:latin typeface="Arial"/>
+              </a:defRPr>
+            </a:pPr>
+            <a:r>
+              <a:t>📊 EXECUTIVE COPILOT</a:t>
+            </a:r>
+          </a:p>
+        </p:txBody>
+      </p:sp>
+      <p:sp>
+        <p:nvSpPr>
+          <p:cNvPr id="15387" name="Rounded Rectangle 15386"/>
+          <p:cNvSpPr/>
+          <p:nvPr/>
+        </p:nvSpPr>
+        <p:spPr>
+          <a:xfrm>
+            <a:off x="502920" y="3703320"/>
+            <a:ext cx="3611880" cy="2560320"/>
           </a:xfrm>
           <a:prstGeom prst="roundRect">
             <a:avLst/>
@@ -7429,7 +7811,7 @@
           </a:fontRef>
         </p:style>
         <p:txBody>
-          <a:bodyPr wrap="square" rtlCol="0" anchor="ctr"/>
+          <a:bodyPr rtlCol="0" anchor="ctr" wrap="square"/>
           <a:lstStyle/>
           <a:p>
             <a:pPr algn="ctr">
@@ -7441,7 +7823,6 @@
               </a:defRPr>
             </a:pPr>
             <a:r>
-              <a:rPr sz="1400" dirty="0"/>
               <a:t>Detailed Explanation of Proposed Solution</a:t>
             </a:r>
           </a:p>
@@ -7458,16 +7839,7 @@
               </a:defRPr>
             </a:pPr>
             <a:r>
-              <a:rPr sz="1200" dirty="0"/>
-              <a:t>• Transforms </a:t>
-            </a:r>
-            <a:r>
-              <a:rPr sz="1200" dirty="0" err="1"/>
-              <a:t>MoSPI</a:t>
-            </a:r>
-            <a:r>
-              <a:rPr sz="1200" dirty="0"/>
-              <a:t> infrastructure monitoring from descriptive reports into an autonomous predictive &amp; prescriptive system.</a:t>
+              <a:t>• Transforms MoSPI infrastructure monitoring from retrospective reporting into an autonomous early warning system.</a:t>
             </a:r>
           </a:p>
           <a:p>
@@ -7483,8 +7855,7 @@
               </a:defRPr>
             </a:pPr>
             <a:r>
-              <a:rPr sz="1200" dirty="0"/>
-              <a:t>• Deploys dual machine learning regressors to forecast cost escalations and schedule delays 6-12 months in advance.</a:t>
+              <a:t>• Deploys dual machine learning regressors to forecast cost escalations and schedule delays 6 to 12 months in advance.</a:t>
             </a:r>
           </a:p>
           <a:p>
@@ -7500,7 +7871,6 @@
               </a:defRPr>
             </a:pPr>
             <a:r>
-              <a:rPr sz="1200" dirty="0"/>
               <a:t>• Calculates a Composite Risk Index (CRI 0-100) assigning dynamic Red/Amber/Green status across all 1,981 central projects.</a:t>
             </a:r>
           </a:p>
@@ -7508,14 +7878,14 @@
       </p:sp>
       <p:sp>
         <p:nvSpPr>
-          <p:cNvPr id="15383" name="Rounded Rectangle 15382"/>
+          <p:cNvPr id="15388" name="Rounded Rectangle 15387"/>
           <p:cNvSpPr/>
           <p:nvPr/>
         </p:nvSpPr>
         <p:spPr>
           <a:xfrm>
-            <a:off x="4279392" y="3657600"/>
-            <a:ext cx="3566160" cy="2606040"/>
+            <a:off x="4261104" y="3703320"/>
+            <a:ext cx="3611880" cy="2560320"/>
           </a:xfrm>
           <a:prstGeom prst="roundRect">
             <a:avLst/>
@@ -7544,7 +7914,7 @@
           </a:fontRef>
         </p:style>
         <p:txBody>
-          <a:bodyPr wrap="square" rtlCol="0" anchor="ctr"/>
+          <a:bodyPr rtlCol="0" anchor="ctr" wrap="square"/>
           <a:lstStyle/>
           <a:p>
             <a:pPr algn="ctr">
@@ -7556,7 +7926,6 @@
               </a:defRPr>
             </a:pPr>
             <a:r>
-              <a:rPr sz="1400" dirty="0"/>
               <a:t>How It Addresses The Problem</a:t>
             </a:r>
           </a:p>
@@ -7573,7 +7942,6 @@
               </a:defRPr>
             </a:pPr>
             <a:r>
-              <a:rPr sz="1400" dirty="0"/>
               <a:t>• Detects 'Ghost Progress' when financial spending outpaces verified physical progress by &gt;1.65x.</a:t>
             </a:r>
           </a:p>
@@ -7590,7 +7958,6 @@
               </a:defRPr>
             </a:pPr>
             <a:r>
-              <a:rPr sz="1400" dirty="0"/>
               <a:t>• Preempts Stage-II Forest Clearance and Land Acquisition bottlenecks before critical path milestones stall.</a:t>
             </a:r>
           </a:p>
@@ -7607,34 +7974,21 @@
               </a:defRPr>
             </a:pPr>
             <a:r>
-              <a:rPr sz="1400" dirty="0"/>
-              <a:t>• Simulates What-If interventions (e.g. +6 </a:t>
-            </a:r>
-            <a:r>
-              <a:rPr sz="1400" dirty="0" err="1"/>
-              <a:t>mo</a:t>
-            </a:r>
-            <a:r>
-              <a:rPr sz="1400" dirty="0"/>
-              <a:t> land delay, +15% steel inflation) so ministers can stress-test capex before sanctioning</a:t>
-            </a:r>
-            <a:r>
-              <a:rPr dirty="0"/>
-              <a:t>.</a:t>
-            </a:r>
-          </a:p>
-        </p:txBody>
-      </p:sp>
-      <p:sp>
-        <p:nvSpPr>
-          <p:cNvPr id="15384" name="Rounded Rectangle 15383"/>
+              <a:t>• Simulates What-If interventions (e.g. +6 mo land delay, +15% steel inflation) so ministers can stress-test capex before sanctioning.</a:t>
+            </a:r>
+          </a:p>
+        </p:txBody>
+      </p:sp>
+      <p:sp>
+        <p:nvSpPr>
+          <p:cNvPr id="15389" name="Rounded Rectangle 15388"/>
           <p:cNvSpPr/>
           <p:nvPr/>
         </p:nvSpPr>
         <p:spPr>
           <a:xfrm>
-            <a:off x="8010144" y="3657600"/>
-            <a:ext cx="3566160" cy="2606040"/>
+            <a:off x="8019288" y="3703320"/>
+            <a:ext cx="3611880" cy="2560320"/>
           </a:xfrm>
           <a:prstGeom prst="roundRect">
             <a:avLst/>
@@ -7663,7 +8017,7 @@
           </a:fontRef>
         </p:style>
         <p:txBody>
-          <a:bodyPr wrap="square" rtlCol="0" anchor="ctr"/>
+          <a:bodyPr rtlCol="0" anchor="ctr" wrap="square"/>
           <a:lstStyle/>
           <a:p>
             <a:pPr algn="ctr">
@@ -7675,7 +8029,6 @@
               </a:defRPr>
             </a:pPr>
             <a:r>
-              <a:rPr sz="1400" dirty="0"/>
               <a:t>Innovation &amp; Uniqueness</a:t>
             </a:r>
           </a:p>
@@ -7692,8 +8045,7 @@
               </a:defRPr>
             </a:pPr>
             <a:r>
-              <a:rPr sz="1400" dirty="0"/>
-              <a:t>• Proves AI superiority: Achieves +22.4% higher variance explained (R²) and +0.12 ROC-AUC over classical linear regressions.</a:t>
+              <a:t>• Proves AI superiority: Delivers +22.4% higher variance explained (R²) and +0.12 ROC-AUC over classical linear regressions.</a:t>
             </a:r>
           </a:p>
           <a:p>
@@ -7709,7 +8061,6 @@
               </a:defRPr>
             </a:pPr>
             <a:r>
-              <a:rPr sz="1400" dirty="0"/>
               <a:t>• Evidence-based CUF reform: Demonstrates +16.8% variance uplift by adding 4 high-ROI fields to PAIMANA-CRIP.</a:t>
             </a:r>
           </a:p>
@@ -7726,7 +8077,6 @@
               </a:defRPr>
             </a:pPr>
             <a:r>
-              <a:rPr sz="1400" dirty="0"/>
               <a:t>• LLM Copilot: Instant ministerial executive briefings with targeted administrative escalation pathways.</a:t>
             </a:r>
           </a:p>
@@ -7882,7 +8232,6 @@
               <a:buFont typeface="Arial" panose="020B0604020202020204" pitchFamily="34" charset="0"/>
               <a:buChar char="•"/>
             </a:pPr>
-            <a:endParaRPr/>
           </a:p>
         </p:txBody>
       </p:sp>
@@ -7954,6 +8303,54 @@
                 <a:schemeClr val="bg1"/>
               </a:solidFill>
             </a:endParaRPr>
+          </a:p>
+        </p:txBody>
+      </p:sp>
+      <p:sp>
+        <p:nvSpPr>
+          <p:cNvPr id="11" name="Oval 10" descr="Your startup LOGO">
+            <a:extLst>
+              <a:ext uri="{FF2B5EF4-FFF2-40B4-BE49-F238E27FC236}">
+                <a16:creationId xmlns:a16="http://schemas.microsoft.com/office/drawing/2014/main" id="{5DBCE864-823D-4A13-9607-5DA1F0ED5FB8}"/>
+              </a:ext>
+              <a:ext uri="{C183D7F6-B498-43B3-948B-1728B52AA6E4}">
+                <adec:decorative xmlns:adec="http://schemas.microsoft.com/office/drawing/2017/decorative" xmlns="" val="0"/>
+              </a:ext>
+            </a:extLst>
+          </p:cNvPr>
+          <p:cNvSpPr/>
+          <p:nvPr/>
+        </p:nvSpPr>
+        <p:spPr>
+          <a:xfrm>
+            <a:off x="329773" y="252246"/>
+            <a:ext cx="1251857" cy="807334"/>
+          </a:xfrm>
+          <a:prstGeom prst="ellipse">
+            <a:avLst/>
+          </a:prstGeom>
+        </p:spPr>
+        <p:style>
+          <a:lnRef idx="2">
+            <a:schemeClr val="accent4"/>
+          </a:lnRef>
+          <a:fillRef idx="1">
+            <a:schemeClr val="lt1"/>
+          </a:fillRef>
+          <a:effectRef idx="0">
+            <a:schemeClr val="accent4"/>
+          </a:effectRef>
+          <a:fontRef idx="minor">
+            <a:schemeClr val="dk1"/>
+          </a:fontRef>
+        </p:style>
+        <p:txBody>
+          <a:bodyPr rtlCol="0" anchor="ctr"/>
+          <a:lstStyle/>
+          <a:p>
+            <a:r>
+              <a:t>Team InfraVision</a:t>
+            </a:r>
           </a:p>
         </p:txBody>
       </p:sp>
@@ -7987,30 +8384,51 @@
           </a:prstGeom>
         </p:spPr>
       </p:pic>
-      <p:pic>
-        <p:nvPicPr>
-          <p:cNvPr id="17411" name="Picture 17410" descr="architecture_diagram.png"/>
-          <p:cNvPicPr>
-            <a:picLocks noChangeAspect="1"/>
-          </p:cNvPicPr>
+      <p:sp>
+        <p:nvSpPr>
+          <p:cNvPr id="17411" name="Rounded Rectangle 17410"/>
+          <p:cNvSpPr/>
           <p:nvPr/>
-        </p:nvPicPr>
-        <p:blipFill>
-          <a:blip r:embed="rId4"/>
-          <a:stretch>
-            <a:fillRect/>
-          </a:stretch>
-        </p:blipFill>
+        </p:nvSpPr>
         <p:spPr>
           <a:xfrm>
-            <a:off x="579120" y="1164970"/>
-            <a:ext cx="7010399" cy="5052950"/>
+            <a:off x="502920" y="1188720"/>
+            <a:ext cx="7040880" cy="1078992"/>
           </a:xfrm>
-          <a:prstGeom prst="rect">
+          <a:prstGeom prst="roundRect">
             <a:avLst/>
           </a:prstGeom>
-        </p:spPr>
-      </p:pic>
+          <a:solidFill>
+            <a:srgbClr val="F8FAFC"/>
+          </a:solidFill>
+          <a:ln w="22225">
+            <a:solidFill>
+              <a:srgbClr val="0F1E36"/>
+            </a:solidFill>
+          </a:ln>
+        </p:spPr>
+        <p:style>
+          <a:lnRef idx="1">
+            <a:schemeClr val="accent1"/>
+          </a:lnRef>
+          <a:fillRef idx="3">
+            <a:schemeClr val="accent1"/>
+          </a:fillRef>
+          <a:effectRef idx="2">
+            <a:schemeClr val="accent1"/>
+          </a:effectRef>
+          <a:fontRef idx="minor">
+            <a:schemeClr val="lt1"/>
+          </a:fontRef>
+        </p:style>
+        <p:txBody>
+          <a:bodyPr rtlCol="0" anchor="ctr"/>
+          <a:lstStyle/>
+          <a:p>
+            <a:pPr algn="ctr"/>
+          </a:p>
+        </p:txBody>
+      </p:sp>
       <p:sp>
         <p:nvSpPr>
           <p:cNvPr id="17412" name="Rounded Rectangle 17411"/>
@@ -8019,8 +8437,1336 @@
         </p:nvSpPr>
         <p:spPr>
           <a:xfrm>
-            <a:off x="7726679" y="1143000"/>
-            <a:ext cx="3886200" cy="5074920"/>
+            <a:off x="594360" y="1243584"/>
+            <a:ext cx="3840480" cy="292608"/>
+          </a:xfrm>
+          <a:prstGeom prst="roundRect">
+            <a:avLst/>
+          </a:prstGeom>
+          <a:solidFill>
+            <a:srgbClr val="0F1E36"/>
+          </a:solidFill>
+          <a:ln>
+            <a:noFill/>
+          </a:ln>
+        </p:spPr>
+        <p:style>
+          <a:lnRef idx="1">
+            <a:schemeClr val="accent1"/>
+          </a:lnRef>
+          <a:fillRef idx="3">
+            <a:schemeClr val="accent1"/>
+          </a:fillRef>
+          <a:effectRef idx="2">
+            <a:schemeClr val="accent1"/>
+          </a:effectRef>
+          <a:fontRef idx="minor">
+            <a:schemeClr val="lt1"/>
+          </a:fontRef>
+        </p:style>
+        <p:txBody>
+          <a:bodyPr rtlCol="0" anchor="ctr"/>
+          <a:lstStyle/>
+          <a:p>
+            <a:pPr algn="ctr">
+              <a:defRPr sz="1000" b="1">
+                <a:solidFill>
+                  <a:srgbClr val="FFFFFF"/>
+                </a:solidFill>
+                <a:latin typeface="Arial"/>
+              </a:defRPr>
+            </a:pPr>
+            <a:r>
+              <a:t>TIER 1: DATA INGESTION &amp; CUF SCHEMA LAYER</a:t>
+            </a:r>
+          </a:p>
+        </p:txBody>
+      </p:sp>
+      <p:sp>
+        <p:nvSpPr>
+          <p:cNvPr id="17413" name="Rounded Rectangle 17412"/>
+          <p:cNvSpPr/>
+          <p:nvPr/>
+        </p:nvSpPr>
+        <p:spPr>
+          <a:xfrm>
+            <a:off x="612648" y="1572768"/>
+            <a:ext cx="2194560" cy="621792"/>
+          </a:xfrm>
+          <a:prstGeom prst="roundRect">
+            <a:avLst/>
+          </a:prstGeom>
+          <a:solidFill>
+            <a:srgbClr val="FFFFFF"/>
+          </a:solidFill>
+          <a:ln w="12700">
+            <a:solidFill>
+              <a:srgbClr val="CBD5E1"/>
+            </a:solidFill>
+          </a:ln>
+        </p:spPr>
+        <p:style>
+          <a:lnRef idx="1">
+            <a:schemeClr val="accent1"/>
+          </a:lnRef>
+          <a:fillRef idx="3">
+            <a:schemeClr val="accent1"/>
+          </a:fillRef>
+          <a:effectRef idx="2">
+            <a:schemeClr val="accent1"/>
+          </a:effectRef>
+          <a:fontRef idx="minor">
+            <a:schemeClr val="lt1"/>
+          </a:fontRef>
+        </p:style>
+        <p:txBody>
+          <a:bodyPr rtlCol="0" anchor="ctr" wrap="square"/>
+          <a:lstStyle/>
+          <a:p>
+            <a:pPr algn="ctr">
+              <a:defRPr sz="950" b="1">
+                <a:solidFill>
+                  <a:srgbClr val="0F1E36"/>
+                </a:solidFill>
+                <a:latin typeface="Arial"/>
+              </a:defRPr>
+            </a:pPr>
+            <a:r>
+              <a:t>📁 Standard CUF Fields</a:t>
+            </a:r>
+          </a:p>
+          <a:p>
+            <a:pPr>
+              <a:spcBef>
+                <a:spcPts val="200"/>
+              </a:spcBef>
+              <a:defRPr sz="850">
+                <a:solidFill>
+                  <a:srgbClr val="1E293B"/>
+                </a:solidFill>
+                <a:latin typeface="Calibri"/>
+              </a:defRPr>
+            </a:pPr>
+            <a:r>
+              <a:t>25+ Fields: Sanctioned Cost, Original/Revised DOC, Physical &amp; Financial %</a:t>
+            </a:r>
+          </a:p>
+        </p:txBody>
+      </p:sp>
+      <p:sp>
+        <p:nvSpPr>
+          <p:cNvPr id="17414" name="Rounded Rectangle 17413"/>
+          <p:cNvSpPr/>
+          <p:nvPr/>
+        </p:nvSpPr>
+        <p:spPr>
+          <a:xfrm>
+            <a:off x="2916936" y="1572768"/>
+            <a:ext cx="2194560" cy="621792"/>
+          </a:xfrm>
+          <a:prstGeom prst="roundRect">
+            <a:avLst/>
+          </a:prstGeom>
+          <a:solidFill>
+            <a:srgbClr val="FFFFFF"/>
+          </a:solidFill>
+          <a:ln w="12700">
+            <a:solidFill>
+              <a:srgbClr val="CBD5E1"/>
+            </a:solidFill>
+          </a:ln>
+        </p:spPr>
+        <p:style>
+          <a:lnRef idx="1">
+            <a:schemeClr val="accent1"/>
+          </a:lnRef>
+          <a:fillRef idx="3">
+            <a:schemeClr val="accent1"/>
+          </a:fillRef>
+          <a:effectRef idx="2">
+            <a:schemeClr val="accent1"/>
+          </a:effectRef>
+          <a:fontRef idx="minor">
+            <a:schemeClr val="lt1"/>
+          </a:fontRef>
+        </p:style>
+        <p:txBody>
+          <a:bodyPr rtlCol="0" anchor="ctr" wrap="square"/>
+          <a:lstStyle/>
+          <a:p>
+            <a:pPr algn="ctr">
+              <a:defRPr sz="950" b="1">
+                <a:solidFill>
+                  <a:srgbClr val="0F1E36"/>
+                </a:solidFill>
+                <a:latin typeface="Arial"/>
+              </a:defRPr>
+            </a:pPr>
+            <a:r>
+              <a:t>🌐 Augmented Indicators</a:t>
+            </a:r>
+          </a:p>
+          <a:p>
+            <a:pPr>
+              <a:spcBef>
+                <a:spcPts val="200"/>
+              </a:spcBef>
+              <a:defRPr sz="850">
+                <a:solidFill>
+                  <a:srgbClr val="1E293B"/>
+                </a:solidFill>
+                <a:latin typeface="Calibri"/>
+              </a:defRPr>
+            </a:pPr>
+            <a:r>
+              <a:t>Contractor Delivery Score, Terrain Index, WPI Commodity Exposure</a:t>
+            </a:r>
+          </a:p>
+        </p:txBody>
+      </p:sp>
+      <p:sp>
+        <p:nvSpPr>
+          <p:cNvPr id="17415" name="Rounded Rectangle 17414"/>
+          <p:cNvSpPr/>
+          <p:nvPr/>
+        </p:nvSpPr>
+        <p:spPr>
+          <a:xfrm>
+            <a:off x="5221224" y="1572768"/>
+            <a:ext cx="2194560" cy="621792"/>
+          </a:xfrm>
+          <a:prstGeom prst="roundRect">
+            <a:avLst/>
+          </a:prstGeom>
+          <a:solidFill>
+            <a:srgbClr val="FFFFFF"/>
+          </a:solidFill>
+          <a:ln w="12700">
+            <a:solidFill>
+              <a:srgbClr val="CBD5E1"/>
+            </a:solidFill>
+          </a:ln>
+        </p:spPr>
+        <p:style>
+          <a:lnRef idx="1">
+            <a:schemeClr val="accent1"/>
+          </a:lnRef>
+          <a:fillRef idx="3">
+            <a:schemeClr val="accent1"/>
+          </a:fillRef>
+          <a:effectRef idx="2">
+            <a:schemeClr val="accent1"/>
+          </a:effectRef>
+          <a:fontRef idx="minor">
+            <a:schemeClr val="lt1"/>
+          </a:fontRef>
+        </p:style>
+        <p:txBody>
+          <a:bodyPr rtlCol="0" anchor="ctr" wrap="square"/>
+          <a:lstStyle/>
+          <a:p>
+            <a:pPr algn="ctr">
+              <a:defRPr sz="950" b="1">
+                <a:solidFill>
+                  <a:srgbClr val="0F1E36"/>
+                </a:solidFill>
+                <a:latin typeface="Arial"/>
+              </a:defRPr>
+            </a:pPr>
+            <a:r>
+              <a:t>⚙️ Derived Feature Pipeline</a:t>
+            </a:r>
+          </a:p>
+          <a:p>
+            <a:pPr>
+              <a:spcBef>
+                <a:spcPts val="200"/>
+              </a:spcBef>
+              <a:defRPr sz="850">
+                <a:solidFill>
+                  <a:srgbClr val="1E293B"/>
+                </a:solidFill>
+                <a:latin typeface="Calibri"/>
+              </a:defRPr>
+            </a:pPr>
+            <a:r>
+              <a:t>Burn Disparity Ratio &amp; Milestone Slippage Velocity Derivation</a:t>
+            </a:r>
+          </a:p>
+        </p:txBody>
+      </p:sp>
+      <p:sp>
+        <p:nvSpPr>
+          <p:cNvPr id="17416" name="Down Arrow 17415"/>
+          <p:cNvSpPr/>
+          <p:nvPr/>
+        </p:nvSpPr>
+        <p:spPr>
+          <a:xfrm>
+            <a:off x="3913632" y="2286000"/>
+            <a:ext cx="219456" cy="164592"/>
+          </a:xfrm>
+          <a:prstGeom prst="downArrow">
+            <a:avLst/>
+          </a:prstGeom>
+          <a:solidFill>
+            <a:srgbClr val="E06D14"/>
+          </a:solidFill>
+          <a:ln>
+            <a:noFill/>
+          </a:ln>
+        </p:spPr>
+        <p:style>
+          <a:lnRef idx="1">
+            <a:schemeClr val="accent1"/>
+          </a:lnRef>
+          <a:fillRef idx="3">
+            <a:schemeClr val="accent1"/>
+          </a:fillRef>
+          <a:effectRef idx="2">
+            <a:schemeClr val="accent1"/>
+          </a:effectRef>
+          <a:fontRef idx="minor">
+            <a:schemeClr val="lt1"/>
+          </a:fontRef>
+        </p:style>
+        <p:txBody>
+          <a:bodyPr rtlCol="0" anchor="ctr"/>
+          <a:lstStyle/>
+          <a:p>
+            <a:pPr algn="ctr"/>
+          </a:p>
+        </p:txBody>
+      </p:sp>
+      <p:sp>
+        <p:nvSpPr>
+          <p:cNvPr id="17417" name="Rounded Rectangle 17416"/>
+          <p:cNvSpPr/>
+          <p:nvPr/>
+        </p:nvSpPr>
+        <p:spPr>
+          <a:xfrm>
+            <a:off x="502920" y="2468880"/>
+            <a:ext cx="7040880" cy="1078992"/>
+          </a:xfrm>
+          <a:prstGeom prst="roundRect">
+            <a:avLst/>
+          </a:prstGeom>
+          <a:solidFill>
+            <a:srgbClr val="F8FAFC"/>
+          </a:solidFill>
+          <a:ln w="22225">
+            <a:solidFill>
+              <a:srgbClr val="E06D14"/>
+            </a:solidFill>
+          </a:ln>
+        </p:spPr>
+        <p:style>
+          <a:lnRef idx="1">
+            <a:schemeClr val="accent1"/>
+          </a:lnRef>
+          <a:fillRef idx="3">
+            <a:schemeClr val="accent1"/>
+          </a:fillRef>
+          <a:effectRef idx="2">
+            <a:schemeClr val="accent1"/>
+          </a:effectRef>
+          <a:fontRef idx="minor">
+            <a:schemeClr val="lt1"/>
+          </a:fontRef>
+        </p:style>
+        <p:txBody>
+          <a:bodyPr rtlCol="0" anchor="ctr"/>
+          <a:lstStyle/>
+          <a:p>
+            <a:pPr algn="ctr"/>
+          </a:p>
+        </p:txBody>
+      </p:sp>
+      <p:sp>
+        <p:nvSpPr>
+          <p:cNvPr id="17418" name="Rounded Rectangle 17417"/>
+          <p:cNvSpPr/>
+          <p:nvPr/>
+        </p:nvSpPr>
+        <p:spPr>
+          <a:xfrm>
+            <a:off x="594360" y="2523744"/>
+            <a:ext cx="3840480" cy="292608"/>
+          </a:xfrm>
+          <a:prstGeom prst="roundRect">
+            <a:avLst/>
+          </a:prstGeom>
+          <a:solidFill>
+            <a:srgbClr val="E06D14"/>
+          </a:solidFill>
+          <a:ln>
+            <a:noFill/>
+          </a:ln>
+        </p:spPr>
+        <p:style>
+          <a:lnRef idx="1">
+            <a:schemeClr val="accent1"/>
+          </a:lnRef>
+          <a:fillRef idx="3">
+            <a:schemeClr val="accent1"/>
+          </a:fillRef>
+          <a:effectRef idx="2">
+            <a:schemeClr val="accent1"/>
+          </a:effectRef>
+          <a:fontRef idx="minor">
+            <a:schemeClr val="lt1"/>
+          </a:fontRef>
+        </p:style>
+        <p:txBody>
+          <a:bodyPr rtlCol="0" anchor="ctr"/>
+          <a:lstStyle/>
+          <a:p>
+            <a:pPr algn="ctr">
+              <a:defRPr sz="1000" b="1">
+                <a:solidFill>
+                  <a:srgbClr val="FFFFFF"/>
+                </a:solidFill>
+                <a:latin typeface="Arial"/>
+              </a:defRPr>
+            </a:pPr>
+            <a:r>
+              <a:t>TIER 2: PREDICTIVE ANALYTICS &amp; BENCHMARK CORE</a:t>
+            </a:r>
+          </a:p>
+        </p:txBody>
+      </p:sp>
+      <p:sp>
+        <p:nvSpPr>
+          <p:cNvPr id="17419" name="Rounded Rectangle 17418"/>
+          <p:cNvSpPr/>
+          <p:nvPr/>
+        </p:nvSpPr>
+        <p:spPr>
+          <a:xfrm>
+            <a:off x="612648" y="2852928"/>
+            <a:ext cx="2194560" cy="621792"/>
+          </a:xfrm>
+          <a:prstGeom prst="roundRect">
+            <a:avLst/>
+          </a:prstGeom>
+          <a:solidFill>
+            <a:srgbClr val="FFFFFF"/>
+          </a:solidFill>
+          <a:ln w="12700">
+            <a:solidFill>
+              <a:srgbClr val="CBD5E1"/>
+            </a:solidFill>
+          </a:ln>
+        </p:spPr>
+        <p:style>
+          <a:lnRef idx="1">
+            <a:schemeClr val="accent1"/>
+          </a:lnRef>
+          <a:fillRef idx="3">
+            <a:schemeClr val="accent1"/>
+          </a:fillRef>
+          <a:effectRef idx="2">
+            <a:schemeClr val="accent1"/>
+          </a:effectRef>
+          <a:fontRef idx="minor">
+            <a:schemeClr val="lt1"/>
+          </a:fontRef>
+        </p:style>
+        <p:txBody>
+          <a:bodyPr rtlCol="0" anchor="ctr" wrap="square"/>
+          <a:lstStyle/>
+          <a:p>
+            <a:pPr algn="ctr">
+              <a:defRPr sz="950" b="1">
+                <a:solidFill>
+                  <a:srgbClr val="E06D14"/>
+                </a:solidFill>
+                <a:latin typeface="Arial"/>
+              </a:defRPr>
+            </a:pPr>
+            <a:r>
+              <a:t>📈 Cost Overrun Model</a:t>
+            </a:r>
+          </a:p>
+          <a:p>
+            <a:pPr>
+              <a:spcBef>
+                <a:spcPts val="200"/>
+              </a:spcBef>
+              <a:defRPr sz="850">
+                <a:solidFill>
+                  <a:srgbClr val="1E293B"/>
+                </a:solidFill>
+                <a:latin typeface="Calibri"/>
+              </a:defRPr>
+            </a:pPr>
+            <a:r>
+              <a:t>HistGradientBoosting Regressor (R² = 0.88, MAE = 3.2% Overrun)</a:t>
+            </a:r>
+          </a:p>
+        </p:txBody>
+      </p:sp>
+      <p:sp>
+        <p:nvSpPr>
+          <p:cNvPr id="17420" name="Rounded Rectangle 17419"/>
+          <p:cNvSpPr/>
+          <p:nvPr/>
+        </p:nvSpPr>
+        <p:spPr>
+          <a:xfrm>
+            <a:off x="2916936" y="2852928"/>
+            <a:ext cx="2194560" cy="621792"/>
+          </a:xfrm>
+          <a:prstGeom prst="roundRect">
+            <a:avLst/>
+          </a:prstGeom>
+          <a:solidFill>
+            <a:srgbClr val="FFFFFF"/>
+          </a:solidFill>
+          <a:ln w="12700">
+            <a:solidFill>
+              <a:srgbClr val="CBD5E1"/>
+            </a:solidFill>
+          </a:ln>
+        </p:spPr>
+        <p:style>
+          <a:lnRef idx="1">
+            <a:schemeClr val="accent1"/>
+          </a:lnRef>
+          <a:fillRef idx="3">
+            <a:schemeClr val="accent1"/>
+          </a:fillRef>
+          <a:effectRef idx="2">
+            <a:schemeClr val="accent1"/>
+          </a:effectRef>
+          <a:fontRef idx="minor">
+            <a:schemeClr val="lt1"/>
+          </a:fontRef>
+        </p:style>
+        <p:txBody>
+          <a:bodyPr rtlCol="0" anchor="ctr" wrap="square"/>
+          <a:lstStyle/>
+          <a:p>
+            <a:pPr algn="ctr">
+              <a:defRPr sz="950" b="1">
+                <a:solidFill>
+                  <a:srgbClr val="E06D14"/>
+                </a:solidFill>
+                <a:latin typeface="Arial"/>
+              </a:defRPr>
+            </a:pPr>
+            <a:r>
+              <a:t>⏱️ Time Delay Model</a:t>
+            </a:r>
+          </a:p>
+          <a:p>
+            <a:pPr>
+              <a:spcBef>
+                <a:spcPts val="200"/>
+              </a:spcBef>
+              <a:defRPr sz="850">
+                <a:solidFill>
+                  <a:srgbClr val="1E293B"/>
+                </a:solidFill>
+                <a:latin typeface="Calibri"/>
+              </a:defRPr>
+            </a:pPr>
+            <a:r>
+              <a:t>Forecasts Schedule Slip in Months &amp; Revised Commissioning DOC</a:t>
+            </a:r>
+          </a:p>
+        </p:txBody>
+      </p:sp>
+      <p:sp>
+        <p:nvSpPr>
+          <p:cNvPr id="17421" name="Rounded Rectangle 17420"/>
+          <p:cNvSpPr/>
+          <p:nvPr/>
+        </p:nvSpPr>
+        <p:spPr>
+          <a:xfrm>
+            <a:off x="5221224" y="2852928"/>
+            <a:ext cx="2194560" cy="621792"/>
+          </a:xfrm>
+          <a:prstGeom prst="roundRect">
+            <a:avLst/>
+          </a:prstGeom>
+          <a:solidFill>
+            <a:srgbClr val="FFFFFF"/>
+          </a:solidFill>
+          <a:ln w="12700">
+            <a:solidFill>
+              <a:srgbClr val="CBD5E1"/>
+            </a:solidFill>
+          </a:ln>
+        </p:spPr>
+        <p:style>
+          <a:lnRef idx="1">
+            <a:schemeClr val="accent1"/>
+          </a:lnRef>
+          <a:fillRef idx="3">
+            <a:schemeClr val="accent1"/>
+          </a:fillRef>
+          <a:effectRef idx="2">
+            <a:schemeClr val="accent1"/>
+          </a:effectRef>
+          <a:fontRef idx="minor">
+            <a:schemeClr val="lt1"/>
+          </a:fontRef>
+        </p:style>
+        <p:txBody>
+          <a:bodyPr rtlCol="0" anchor="ctr" wrap="square"/>
+          <a:lstStyle/>
+          <a:p>
+            <a:pPr algn="ctr">
+              <a:defRPr sz="950" b="1">
+                <a:solidFill>
+                  <a:srgbClr val="E06D14"/>
+                </a:solidFill>
+                <a:latin typeface="Arial"/>
+              </a:defRPr>
+            </a:pPr>
+            <a:r>
+              <a:t>🔬 Empirical Benchmark</a:t>
+            </a:r>
+          </a:p>
+          <a:p>
+            <a:pPr>
+              <a:spcBef>
+                <a:spcPts val="200"/>
+              </a:spcBef>
+              <a:defRPr sz="850">
+                <a:solidFill>
+                  <a:srgbClr val="1E293B"/>
+                </a:solidFill>
+                <a:latin typeface="Calibri"/>
+              </a:defRPr>
+            </a:pPr>
+            <a:r>
+              <a:t>Empirical Proof: +22.4% R² Lift &amp; +0.12 AUC Gain over Linear OLS</a:t>
+            </a:r>
+          </a:p>
+        </p:txBody>
+      </p:sp>
+      <p:sp>
+        <p:nvSpPr>
+          <p:cNvPr id="17422" name="Down Arrow 17421"/>
+          <p:cNvSpPr/>
+          <p:nvPr/>
+        </p:nvSpPr>
+        <p:spPr>
+          <a:xfrm>
+            <a:off x="3913632" y="3566160"/>
+            <a:ext cx="219456" cy="164592"/>
+          </a:xfrm>
+          <a:prstGeom prst="downArrow">
+            <a:avLst/>
+          </a:prstGeom>
+          <a:solidFill>
+            <a:srgbClr val="E06D14"/>
+          </a:solidFill>
+          <a:ln>
+            <a:noFill/>
+          </a:ln>
+        </p:spPr>
+        <p:style>
+          <a:lnRef idx="1">
+            <a:schemeClr val="accent1"/>
+          </a:lnRef>
+          <a:fillRef idx="3">
+            <a:schemeClr val="accent1"/>
+          </a:fillRef>
+          <a:effectRef idx="2">
+            <a:schemeClr val="accent1"/>
+          </a:effectRef>
+          <a:fontRef idx="minor">
+            <a:schemeClr val="lt1"/>
+          </a:fontRef>
+        </p:style>
+        <p:txBody>
+          <a:bodyPr rtlCol="0" anchor="ctr"/>
+          <a:lstStyle/>
+          <a:p>
+            <a:pPr algn="ctr"/>
+          </a:p>
+        </p:txBody>
+      </p:sp>
+      <p:sp>
+        <p:nvSpPr>
+          <p:cNvPr id="17423" name="Rounded Rectangle 17422"/>
+          <p:cNvSpPr/>
+          <p:nvPr/>
+        </p:nvSpPr>
+        <p:spPr>
+          <a:xfrm>
+            <a:off x="502920" y="3749039"/>
+            <a:ext cx="7040880" cy="1078992"/>
+          </a:xfrm>
+          <a:prstGeom prst="roundRect">
+            <a:avLst/>
+          </a:prstGeom>
+          <a:solidFill>
+            <a:srgbClr val="F8FAFC"/>
+          </a:solidFill>
+          <a:ln w="22225">
+            <a:solidFill>
+              <a:srgbClr val="0F1E36"/>
+            </a:solidFill>
+          </a:ln>
+        </p:spPr>
+        <p:style>
+          <a:lnRef idx="1">
+            <a:schemeClr val="accent1"/>
+          </a:lnRef>
+          <a:fillRef idx="3">
+            <a:schemeClr val="accent1"/>
+          </a:fillRef>
+          <a:effectRef idx="2">
+            <a:schemeClr val="accent1"/>
+          </a:effectRef>
+          <a:fontRef idx="minor">
+            <a:schemeClr val="lt1"/>
+          </a:fontRef>
+        </p:style>
+        <p:txBody>
+          <a:bodyPr rtlCol="0" anchor="ctr"/>
+          <a:lstStyle/>
+          <a:p>
+            <a:pPr algn="ctr"/>
+          </a:p>
+        </p:txBody>
+      </p:sp>
+      <p:sp>
+        <p:nvSpPr>
+          <p:cNvPr id="17424" name="Rounded Rectangle 17423"/>
+          <p:cNvSpPr/>
+          <p:nvPr/>
+        </p:nvSpPr>
+        <p:spPr>
+          <a:xfrm>
+            <a:off x="594360" y="3803903"/>
+            <a:ext cx="3840480" cy="292608"/>
+          </a:xfrm>
+          <a:prstGeom prst="roundRect">
+            <a:avLst/>
+          </a:prstGeom>
+          <a:solidFill>
+            <a:srgbClr val="0F1E36"/>
+          </a:solidFill>
+          <a:ln>
+            <a:noFill/>
+          </a:ln>
+        </p:spPr>
+        <p:style>
+          <a:lnRef idx="1">
+            <a:schemeClr val="accent1"/>
+          </a:lnRef>
+          <a:fillRef idx="3">
+            <a:schemeClr val="accent1"/>
+          </a:fillRef>
+          <a:effectRef idx="2">
+            <a:schemeClr val="accent1"/>
+          </a:effectRef>
+          <a:fontRef idx="minor">
+            <a:schemeClr val="lt1"/>
+          </a:fontRef>
+        </p:style>
+        <p:txBody>
+          <a:bodyPr rtlCol="0" anchor="ctr"/>
+          <a:lstStyle/>
+          <a:p>
+            <a:pPr algn="ctr">
+              <a:defRPr sz="1000" b="1">
+                <a:solidFill>
+                  <a:srgbClr val="FFFFFF"/>
+                </a:solidFill>
+                <a:latin typeface="Arial"/>
+              </a:defRPr>
+            </a:pPr>
+            <a:r>
+              <a:t>TIER 3: DECISION SUPPORT &amp; EARLY WARNING SYSTEM</a:t>
+            </a:r>
+          </a:p>
+        </p:txBody>
+      </p:sp>
+      <p:sp>
+        <p:nvSpPr>
+          <p:cNvPr id="17425" name="Rounded Rectangle 17424"/>
+          <p:cNvSpPr/>
+          <p:nvPr/>
+        </p:nvSpPr>
+        <p:spPr>
+          <a:xfrm>
+            <a:off x="612648" y="4133087"/>
+            <a:ext cx="2194560" cy="621792"/>
+          </a:xfrm>
+          <a:prstGeom prst="roundRect">
+            <a:avLst/>
+          </a:prstGeom>
+          <a:solidFill>
+            <a:srgbClr val="FFFFFF"/>
+          </a:solidFill>
+          <a:ln w="12700">
+            <a:solidFill>
+              <a:srgbClr val="CBD5E1"/>
+            </a:solidFill>
+          </a:ln>
+        </p:spPr>
+        <p:style>
+          <a:lnRef idx="1">
+            <a:schemeClr val="accent1"/>
+          </a:lnRef>
+          <a:fillRef idx="3">
+            <a:schemeClr val="accent1"/>
+          </a:fillRef>
+          <a:effectRef idx="2">
+            <a:schemeClr val="accent1"/>
+          </a:effectRef>
+          <a:fontRef idx="minor">
+            <a:schemeClr val="lt1"/>
+          </a:fontRef>
+        </p:style>
+        <p:txBody>
+          <a:bodyPr rtlCol="0" anchor="ctr" wrap="square"/>
+          <a:lstStyle/>
+          <a:p>
+            <a:pPr algn="ctr">
+              <a:defRPr sz="950" b="1">
+                <a:solidFill>
+                  <a:srgbClr val="0F1E36"/>
+                </a:solidFill>
+                <a:latin typeface="Arial"/>
+              </a:defRPr>
+            </a:pPr>
+            <a:r>
+              <a:t>🎯 Composite Risk (CRI)</a:t>
+            </a:r>
+          </a:p>
+          <a:p>
+            <a:pPr>
+              <a:spcBef>
+                <a:spcPts val="200"/>
+              </a:spcBef>
+              <a:defRPr sz="850">
+                <a:solidFill>
+                  <a:srgbClr val="1E293B"/>
+                </a:solidFill>
+                <a:latin typeface="Calibri"/>
+              </a:defRPr>
+            </a:pPr>
+            <a:r>
+              <a:t>Multi-factor score (0-100) assigning dynamic RED / AMBER / GREEN status</a:t>
+            </a:r>
+          </a:p>
+        </p:txBody>
+      </p:sp>
+      <p:sp>
+        <p:nvSpPr>
+          <p:cNvPr id="17426" name="Rounded Rectangle 17425"/>
+          <p:cNvSpPr/>
+          <p:nvPr/>
+        </p:nvSpPr>
+        <p:spPr>
+          <a:xfrm>
+            <a:off x="2916936" y="4133087"/>
+            <a:ext cx="2194560" cy="621792"/>
+          </a:xfrm>
+          <a:prstGeom prst="roundRect">
+            <a:avLst/>
+          </a:prstGeom>
+          <a:solidFill>
+            <a:srgbClr val="FFFFFF"/>
+          </a:solidFill>
+          <a:ln w="12700">
+            <a:solidFill>
+              <a:srgbClr val="CBD5E1"/>
+            </a:solidFill>
+          </a:ln>
+        </p:spPr>
+        <p:style>
+          <a:lnRef idx="1">
+            <a:schemeClr val="accent1"/>
+          </a:lnRef>
+          <a:fillRef idx="3">
+            <a:schemeClr val="accent1"/>
+          </a:fillRef>
+          <a:effectRef idx="2">
+            <a:schemeClr val="accent1"/>
+          </a:effectRef>
+          <a:fontRef idx="minor">
+            <a:schemeClr val="lt1"/>
+          </a:fontRef>
+        </p:style>
+        <p:txBody>
+          <a:bodyPr rtlCol="0" anchor="ctr" wrap="square"/>
+          <a:lstStyle/>
+          <a:p>
+            <a:pPr algn="ctr">
+              <a:defRPr sz="950" b="1">
+                <a:solidFill>
+                  <a:srgbClr val="0F1E36"/>
+                </a:solidFill>
+                <a:latin typeface="Arial"/>
+              </a:defRPr>
+            </a:pPr>
+            <a:r>
+              <a:t>🚨 4 Anomaly Triggers</a:t>
+            </a:r>
+          </a:p>
+          <a:p>
+            <a:pPr>
+              <a:spcBef>
+                <a:spcPts val="200"/>
+              </a:spcBef>
+              <a:defRPr sz="850">
+                <a:solidFill>
+                  <a:srgbClr val="1E293B"/>
+                </a:solidFill>
+                <a:latin typeface="Calibri"/>
+              </a:defRPr>
+            </a:pPr>
+            <a:r>
+              <a:t>Autonomous Alerts: Ghost Progress, Clearance Cascade, Velocity Cliff</a:t>
+            </a:r>
+          </a:p>
+        </p:txBody>
+      </p:sp>
+      <p:sp>
+        <p:nvSpPr>
+          <p:cNvPr id="17427" name="Rounded Rectangle 17426"/>
+          <p:cNvSpPr/>
+          <p:nvPr/>
+        </p:nvSpPr>
+        <p:spPr>
+          <a:xfrm>
+            <a:off x="5221224" y="4133087"/>
+            <a:ext cx="2194560" cy="621792"/>
+          </a:xfrm>
+          <a:prstGeom prst="roundRect">
+            <a:avLst/>
+          </a:prstGeom>
+          <a:solidFill>
+            <a:srgbClr val="FFFFFF"/>
+          </a:solidFill>
+          <a:ln w="12700">
+            <a:solidFill>
+              <a:srgbClr val="CBD5E1"/>
+            </a:solidFill>
+          </a:ln>
+        </p:spPr>
+        <p:style>
+          <a:lnRef idx="1">
+            <a:schemeClr val="accent1"/>
+          </a:lnRef>
+          <a:fillRef idx="3">
+            <a:schemeClr val="accent1"/>
+          </a:fillRef>
+          <a:effectRef idx="2">
+            <a:schemeClr val="accent1"/>
+          </a:effectRef>
+          <a:fontRef idx="minor">
+            <a:schemeClr val="lt1"/>
+          </a:fontRef>
+        </p:style>
+        <p:txBody>
+          <a:bodyPr rtlCol="0" anchor="ctr" wrap="square"/>
+          <a:lstStyle/>
+          <a:p>
+            <a:pPr algn="ctr">
+              <a:defRPr sz="950" b="1">
+                <a:solidFill>
+                  <a:srgbClr val="0F1E36"/>
+                </a:solidFill>
+                <a:latin typeface="Arial"/>
+              </a:defRPr>
+            </a:pPr>
+            <a:r>
+              <a:t>🎛️ Scenario Simulator</a:t>
+            </a:r>
+          </a:p>
+          <a:p>
+            <a:pPr>
+              <a:spcBef>
+                <a:spcPts val="200"/>
+              </a:spcBef>
+              <a:defRPr sz="850">
+                <a:solidFill>
+                  <a:srgbClr val="1E293B"/>
+                </a:solidFill>
+                <a:latin typeface="Calibri"/>
+              </a:defRPr>
+            </a:pPr>
+            <a:r>
+              <a:t>Real-Time sensitivity sliders for clearance delays &amp; material inflation</a:t>
+            </a:r>
+          </a:p>
+        </p:txBody>
+      </p:sp>
+      <p:sp>
+        <p:nvSpPr>
+          <p:cNvPr id="17428" name="Down Arrow 17427"/>
+          <p:cNvSpPr/>
+          <p:nvPr/>
+        </p:nvSpPr>
+        <p:spPr>
+          <a:xfrm>
+            <a:off x="3913632" y="4846319"/>
+            <a:ext cx="219456" cy="164592"/>
+          </a:xfrm>
+          <a:prstGeom prst="downArrow">
+            <a:avLst/>
+          </a:prstGeom>
+          <a:solidFill>
+            <a:srgbClr val="E06D14"/>
+          </a:solidFill>
+          <a:ln>
+            <a:noFill/>
+          </a:ln>
+        </p:spPr>
+        <p:style>
+          <a:lnRef idx="1">
+            <a:schemeClr val="accent1"/>
+          </a:lnRef>
+          <a:fillRef idx="3">
+            <a:schemeClr val="accent1"/>
+          </a:fillRef>
+          <a:effectRef idx="2">
+            <a:schemeClr val="accent1"/>
+          </a:effectRef>
+          <a:fontRef idx="minor">
+            <a:schemeClr val="lt1"/>
+          </a:fontRef>
+        </p:style>
+        <p:txBody>
+          <a:bodyPr rtlCol="0" anchor="ctr"/>
+          <a:lstStyle/>
+          <a:p>
+            <a:pPr algn="ctr"/>
+          </a:p>
+        </p:txBody>
+      </p:sp>
+      <p:sp>
+        <p:nvSpPr>
+          <p:cNvPr id="17429" name="Rounded Rectangle 17428"/>
+          <p:cNvSpPr/>
+          <p:nvPr/>
+        </p:nvSpPr>
+        <p:spPr>
+          <a:xfrm>
+            <a:off x="502920" y="5029200"/>
+            <a:ext cx="7040880" cy="1143000"/>
+          </a:xfrm>
+          <a:prstGeom prst="roundRect">
+            <a:avLst/>
+          </a:prstGeom>
+          <a:solidFill>
+            <a:srgbClr val="F8FAFC"/>
+          </a:solidFill>
+          <a:ln w="22225">
+            <a:solidFill>
+              <a:srgbClr val="059669"/>
+            </a:solidFill>
+          </a:ln>
+        </p:spPr>
+        <p:style>
+          <a:lnRef idx="1">
+            <a:schemeClr val="accent1"/>
+          </a:lnRef>
+          <a:fillRef idx="3">
+            <a:schemeClr val="accent1"/>
+          </a:fillRef>
+          <a:effectRef idx="2">
+            <a:schemeClr val="accent1"/>
+          </a:effectRef>
+          <a:fontRef idx="minor">
+            <a:schemeClr val="lt1"/>
+          </a:fontRef>
+        </p:style>
+        <p:txBody>
+          <a:bodyPr rtlCol="0" anchor="ctr"/>
+          <a:lstStyle/>
+          <a:p>
+            <a:pPr algn="ctr"/>
+          </a:p>
+        </p:txBody>
+      </p:sp>
+      <p:sp>
+        <p:nvSpPr>
+          <p:cNvPr id="17430" name="Rounded Rectangle 17429"/>
+          <p:cNvSpPr/>
+          <p:nvPr/>
+        </p:nvSpPr>
+        <p:spPr>
+          <a:xfrm>
+            <a:off x="594360" y="5084064"/>
+            <a:ext cx="3840480" cy="292608"/>
+          </a:xfrm>
+          <a:prstGeom prst="roundRect">
+            <a:avLst/>
+          </a:prstGeom>
+          <a:solidFill>
+            <a:srgbClr val="059669"/>
+          </a:solidFill>
+          <a:ln>
+            <a:noFill/>
+          </a:ln>
+        </p:spPr>
+        <p:style>
+          <a:lnRef idx="1">
+            <a:schemeClr val="accent1"/>
+          </a:lnRef>
+          <a:fillRef idx="3">
+            <a:schemeClr val="accent1"/>
+          </a:fillRef>
+          <a:effectRef idx="2">
+            <a:schemeClr val="accent1"/>
+          </a:effectRef>
+          <a:fontRef idx="minor">
+            <a:schemeClr val="lt1"/>
+          </a:fontRef>
+        </p:style>
+        <p:txBody>
+          <a:bodyPr rtlCol="0" anchor="ctr"/>
+          <a:lstStyle/>
+          <a:p>
+            <a:pPr algn="ctr">
+              <a:defRPr sz="1000" b="1">
+                <a:solidFill>
+                  <a:srgbClr val="FFFFFF"/>
+                </a:solidFill>
+                <a:latin typeface="Arial"/>
+              </a:defRPr>
+            </a:pPr>
+            <a:r>
+              <a:t>TIER 4: ENTERPRISE DELIVERY &amp; AI ASSISTANT</a:t>
+            </a:r>
+          </a:p>
+        </p:txBody>
+      </p:sp>
+      <p:sp>
+        <p:nvSpPr>
+          <p:cNvPr id="17431" name="Rounded Rectangle 17430"/>
+          <p:cNvSpPr/>
+          <p:nvPr/>
+        </p:nvSpPr>
+        <p:spPr>
+          <a:xfrm>
+            <a:off x="612648" y="5413248"/>
+            <a:ext cx="2194560" cy="685800"/>
+          </a:xfrm>
+          <a:prstGeom prst="roundRect">
+            <a:avLst/>
+          </a:prstGeom>
+          <a:solidFill>
+            <a:srgbClr val="FFFFFF"/>
+          </a:solidFill>
+          <a:ln w="12700">
+            <a:solidFill>
+              <a:srgbClr val="CBD5E1"/>
+            </a:solidFill>
+          </a:ln>
+        </p:spPr>
+        <p:style>
+          <a:lnRef idx="1">
+            <a:schemeClr val="accent1"/>
+          </a:lnRef>
+          <a:fillRef idx="3">
+            <a:schemeClr val="accent1"/>
+          </a:fillRef>
+          <a:effectRef idx="2">
+            <a:schemeClr val="accent1"/>
+          </a:effectRef>
+          <a:fontRef idx="minor">
+            <a:schemeClr val="lt1"/>
+          </a:fontRef>
+        </p:style>
+        <p:txBody>
+          <a:bodyPr rtlCol="0" anchor="ctr" wrap="square"/>
+          <a:lstStyle/>
+          <a:p>
+            <a:pPr algn="ctr">
+              <a:defRPr sz="950" b="1">
+                <a:solidFill>
+                  <a:srgbClr val="059669"/>
+                </a:solidFill>
+                <a:latin typeface="Arial"/>
+              </a:defRPr>
+            </a:pPr>
+            <a:r>
+              <a:t>⚡ FastAPI REST Engine</a:t>
+            </a:r>
+          </a:p>
+          <a:p>
+            <a:pPr>
+              <a:spcBef>
+                <a:spcPts val="200"/>
+              </a:spcBef>
+              <a:defRPr sz="850">
+                <a:solidFill>
+                  <a:srgbClr val="1E293B"/>
+                </a:solidFill>
+                <a:latin typeface="Calibri"/>
+              </a:defRPr>
+            </a:pPr>
+            <a:r>
+              <a:t>Asynchronous sub-5ms model inference &amp; auto-generated OpenAPI Swagger</a:t>
+            </a:r>
+          </a:p>
+        </p:txBody>
+      </p:sp>
+      <p:sp>
+        <p:nvSpPr>
+          <p:cNvPr id="17432" name="Rounded Rectangle 17431"/>
+          <p:cNvSpPr/>
+          <p:nvPr/>
+        </p:nvSpPr>
+        <p:spPr>
+          <a:xfrm>
+            <a:off x="2916936" y="5413248"/>
+            <a:ext cx="2194560" cy="685800"/>
+          </a:xfrm>
+          <a:prstGeom prst="roundRect">
+            <a:avLst/>
+          </a:prstGeom>
+          <a:solidFill>
+            <a:srgbClr val="FFFFFF"/>
+          </a:solidFill>
+          <a:ln w="12700">
+            <a:solidFill>
+              <a:srgbClr val="CBD5E1"/>
+            </a:solidFill>
+          </a:ln>
+        </p:spPr>
+        <p:style>
+          <a:lnRef idx="1">
+            <a:schemeClr val="accent1"/>
+          </a:lnRef>
+          <a:fillRef idx="3">
+            <a:schemeClr val="accent1"/>
+          </a:fillRef>
+          <a:effectRef idx="2">
+            <a:schemeClr val="accent1"/>
+          </a:effectRef>
+          <a:fontRef idx="minor">
+            <a:schemeClr val="lt1"/>
+          </a:fontRef>
+        </p:style>
+        <p:txBody>
+          <a:bodyPr rtlCol="0" anchor="ctr" wrap="square"/>
+          <a:lstStyle/>
+          <a:p>
+            <a:pPr algn="ctr">
+              <a:defRPr sz="950" b="1">
+                <a:solidFill>
+                  <a:srgbClr val="059669"/>
+                </a:solidFill>
+                <a:latin typeface="Arial"/>
+              </a:defRPr>
+            </a:pPr>
+            <a:r>
+              <a:t>📊 Executive Dashboard</a:t>
+            </a:r>
+          </a:p>
+          <a:p>
+            <a:pPr>
+              <a:spcBef>
+                <a:spcPts val="200"/>
+              </a:spcBef>
+              <a:defRPr sz="850">
+                <a:solidFill>
+                  <a:srgbClr val="1E293B"/>
+                </a:solidFill>
+                <a:latin typeface="Calibri"/>
+              </a:defRPr>
+            </a:pPr>
+            <a:r>
+              <a:t>Interactive portfolio analytics, project drilldown modals &amp; peer cohorts</a:t>
+            </a:r>
+          </a:p>
+        </p:txBody>
+      </p:sp>
+      <p:sp>
+        <p:nvSpPr>
+          <p:cNvPr id="17433" name="Rounded Rectangle 17432"/>
+          <p:cNvSpPr/>
+          <p:nvPr/>
+        </p:nvSpPr>
+        <p:spPr>
+          <a:xfrm>
+            <a:off x="5221224" y="5413248"/>
+            <a:ext cx="2194560" cy="685800"/>
+          </a:xfrm>
+          <a:prstGeom prst="roundRect">
+            <a:avLst/>
+          </a:prstGeom>
+          <a:solidFill>
+            <a:srgbClr val="FFFFFF"/>
+          </a:solidFill>
+          <a:ln w="12700">
+            <a:solidFill>
+              <a:srgbClr val="CBD5E1"/>
+            </a:solidFill>
+          </a:ln>
+        </p:spPr>
+        <p:style>
+          <a:lnRef idx="1">
+            <a:schemeClr val="accent1"/>
+          </a:lnRef>
+          <a:fillRef idx="3">
+            <a:schemeClr val="accent1"/>
+          </a:fillRef>
+          <a:effectRef idx="2">
+            <a:schemeClr val="accent1"/>
+          </a:effectRef>
+          <a:fontRef idx="minor">
+            <a:schemeClr val="lt1"/>
+          </a:fontRef>
+        </p:style>
+        <p:txBody>
+          <a:bodyPr rtlCol="0" anchor="ctr" wrap="square"/>
+          <a:lstStyle/>
+          <a:p>
+            <a:pPr algn="ctr">
+              <a:defRPr sz="950" b="1">
+                <a:solidFill>
+                  <a:srgbClr val="059669"/>
+                </a:solidFill>
+                <a:latin typeface="Arial"/>
+              </a:defRPr>
+            </a:pPr>
+            <a:r>
+              <a:t>🧠 Project Copilot</a:t>
+            </a:r>
+          </a:p>
+          <a:p>
+            <a:pPr>
+              <a:spcBef>
+                <a:spcPts val="200"/>
+              </a:spcBef>
+              <a:defRPr sz="850">
+                <a:solidFill>
+                  <a:srgbClr val="1E293B"/>
+                </a:solidFill>
+                <a:latin typeface="Calibri"/>
+              </a:defRPr>
+            </a:pPr>
+            <a:r>
+              <a:t>Instant 1-page Ministerial briefs &amp; prescriptive bottleneck remedies</a:t>
+            </a:r>
+          </a:p>
+        </p:txBody>
+      </p:sp>
+      <p:sp>
+        <p:nvSpPr>
+          <p:cNvPr id="17434" name="Rounded Rectangle 17433"/>
+          <p:cNvSpPr/>
+          <p:nvPr/>
+        </p:nvSpPr>
+        <p:spPr>
+          <a:xfrm>
+            <a:off x="7726679" y="1188720"/>
+            <a:ext cx="3977639" cy="4983480"/>
           </a:xfrm>
           <a:prstGeom prst="roundRect">
             <a:avLst/>
@@ -8049,57 +9795,76 @@
           </a:fontRef>
         </p:style>
         <p:txBody>
-          <a:bodyPr wrap="square" rtlCol="0" anchor="ctr"/>
+          <a:bodyPr rtlCol="0" anchor="ctr"/>
           <a:lstStyle/>
           <a:p>
-            <a:pPr algn="ctr">
-              <a:defRPr sz="1150" b="1">
-                <a:solidFill>
-                  <a:srgbClr val="0F1E36"/>
-                </a:solidFill>
-                <a:latin typeface="Arial"/>
-              </a:defRPr>
-            </a:pPr>
-            <a:r>
-              <a:t>TECHNOLOGY STACK &amp; OPEN TOOLS</a:t>
-            </a:r>
-          </a:p>
-        </p:txBody>
-      </p:sp>
-      <p:pic>
-        <p:nvPicPr>
-          <p:cNvPr id="17413" name="Picture 17412" descr="python_badge.png"/>
-          <p:cNvPicPr>
-            <a:picLocks noChangeAspect="1"/>
-          </p:cNvPicPr>
+            <a:pPr algn="ctr"/>
+          </a:p>
+        </p:txBody>
+      </p:sp>
+      <p:sp>
+        <p:nvSpPr>
+          <p:cNvPr id="17435" name="Rounded Rectangle 17434"/>
+          <p:cNvSpPr/>
           <p:nvPr/>
-        </p:nvPicPr>
-        <p:blipFill>
-          <a:blip r:embed="rId5"/>
-          <a:stretch>
-            <a:fillRect/>
-          </a:stretch>
-        </p:blipFill>
+        </p:nvSpPr>
         <p:spPr>
           <a:xfrm>
-            <a:off x="7818120" y="1737360"/>
-            <a:ext cx="1371600" cy="428625"/>
+            <a:off x="7863840" y="1298448"/>
+            <a:ext cx="3703320" cy="438912"/>
           </a:xfrm>
-          <a:prstGeom prst="rect">
+          <a:prstGeom prst="roundRect">
             <a:avLst/>
           </a:prstGeom>
-        </p:spPr>
-      </p:pic>
-      <p:sp>
-        <p:nvSpPr>
-          <p:cNvPr id="17414" name="TextBox 17413"/>
+          <a:solidFill>
+            <a:srgbClr val="0F1E36"/>
+          </a:solidFill>
+          <a:ln>
+            <a:noFill/>
+          </a:ln>
+        </p:spPr>
+        <p:style>
+          <a:lnRef idx="1">
+            <a:schemeClr val="accent1"/>
+          </a:lnRef>
+          <a:fillRef idx="3">
+            <a:schemeClr val="accent1"/>
+          </a:fillRef>
+          <a:effectRef idx="2">
+            <a:schemeClr val="accent1"/>
+          </a:effectRef>
+          <a:fontRef idx="minor">
+            <a:schemeClr val="lt1"/>
+          </a:fontRef>
+        </p:style>
+        <p:txBody>
+          <a:bodyPr rtlCol="0" anchor="ctr"/>
+          <a:lstStyle/>
+          <a:p>
+            <a:pPr algn="ctr">
+              <a:defRPr sz="1300" b="1">
+                <a:solidFill>
+                  <a:srgbClr val="FFFFFF"/>
+                </a:solidFill>
+                <a:latin typeface="Arial"/>
+              </a:defRPr>
+            </a:pPr>
+            <a:r>
+              <a:t>TECHNOLOGY STACK &amp; OPEN TOOLS</a:t>
+            </a:r>
+          </a:p>
+        </p:txBody>
+      </p:sp>
+      <p:sp>
+        <p:nvSpPr>
+          <p:cNvPr id="17436" name="TextBox 17435"/>
           <p:cNvSpPr txBox="1"/>
           <p:nvPr/>
         </p:nvSpPr>
         <p:spPr>
           <a:xfrm>
-            <a:off x="9281160" y="1691639"/>
-            <a:ext cx="2194560" cy="502920"/>
+            <a:off x="9372600" y="1828799"/>
+            <a:ext cx="2240279" cy="594360"/>
           </a:xfrm>
           <a:prstGeom prst="rect">
             <a:avLst/>
@@ -8113,7 +9878,7 @@
           <a:lstStyle/>
           <a:p>
             <a:pPr>
-              <a:defRPr sz="1000" b="1">
+              <a:defRPr sz="1200" b="1">
                 <a:solidFill>
                   <a:srgbClr val="0F1E36"/>
                 </a:solidFill>
@@ -8126,7 +9891,7 @@
           </a:p>
           <a:p>
             <a:pPr>
-              <a:defRPr sz="850">
+              <a:defRPr sz="950">
                 <a:solidFill>
                   <a:srgbClr val="1E293B"/>
                 </a:solidFill>
@@ -8134,45 +9899,21 @@
               </a:defRPr>
             </a:pPr>
             <a:r>
-              <a:t>Core data science &amp; ML runtime</a:t>
-            </a:r>
-          </a:p>
-        </p:txBody>
-      </p:sp>
-      <p:pic>
-        <p:nvPicPr>
-          <p:cNvPr id="17415" name="Picture 17414" descr="scikit_badge.png"/>
-          <p:cNvPicPr>
-            <a:picLocks noChangeAspect="1"/>
-          </p:cNvPicPr>
+              <a:t>Core data science &amp; ML runtime environment</a:t>
+            </a:r>
+          </a:p>
+        </p:txBody>
+      </p:sp>
+      <p:sp>
+        <p:nvSpPr>
+          <p:cNvPr id="17437" name="TextBox 17436"/>
+          <p:cNvSpPr txBox="1"/>
           <p:nvPr/>
-        </p:nvPicPr>
-        <p:blipFill>
-          <a:blip r:embed="rId6"/>
-          <a:stretch>
-            <a:fillRect/>
-          </a:stretch>
-        </p:blipFill>
+        </p:nvSpPr>
         <p:spPr>
           <a:xfrm>
-            <a:off x="7818120" y="2487168"/>
-            <a:ext cx="1371600" cy="428625"/>
-          </a:xfrm>
-          <a:prstGeom prst="rect">
-            <a:avLst/>
-          </a:prstGeom>
-        </p:spPr>
-      </p:pic>
-      <p:sp>
-        <p:nvSpPr>
-          <p:cNvPr id="17416" name="TextBox 17415"/>
-          <p:cNvSpPr txBox="1"/>
-          <p:nvPr/>
-        </p:nvSpPr>
-        <p:spPr>
-          <a:xfrm>
-            <a:off x="9281160" y="2441448"/>
-            <a:ext cx="2194560" cy="502920"/>
+            <a:off x="9372600" y="2578608"/>
+            <a:ext cx="2240279" cy="594360"/>
           </a:xfrm>
           <a:prstGeom prst="rect">
             <a:avLst/>
@@ -8186,7 +9927,7 @@
           <a:lstStyle/>
           <a:p>
             <a:pPr>
-              <a:defRPr sz="1000" b="1">
+              <a:defRPr sz="1200" b="1">
                 <a:solidFill>
                   <a:srgbClr val="0F1E36"/>
                 </a:solidFill>
@@ -8199,7 +9940,7 @@
           </a:p>
           <a:p>
             <a:pPr>
-              <a:defRPr sz="850">
+              <a:defRPr sz="950">
                 <a:solidFill>
                   <a:srgbClr val="1E293B"/>
                 </a:solidFill>
@@ -8207,45 +9948,21 @@
               </a:defRPr>
             </a:pPr>
             <a:r>
-              <a:t>HistGradientBoosting, RF &amp; Linear GLMs</a:t>
-            </a:r>
-          </a:p>
-        </p:txBody>
-      </p:sp>
-      <p:pic>
-        <p:nvPicPr>
-          <p:cNvPr id="17417" name="Picture 17416" descr="fastapi_badge.png"/>
-          <p:cNvPicPr>
-            <a:picLocks noChangeAspect="1"/>
-          </p:cNvPicPr>
+              <a:t>HistGradientBoosting, Random Forest &amp; GLM pipelines</a:t>
+            </a:r>
+          </a:p>
+        </p:txBody>
+      </p:sp>
+      <p:sp>
+        <p:nvSpPr>
+          <p:cNvPr id="17438" name="TextBox 17437"/>
+          <p:cNvSpPr txBox="1"/>
           <p:nvPr/>
-        </p:nvPicPr>
-        <p:blipFill>
-          <a:blip r:embed="rId7"/>
-          <a:stretch>
-            <a:fillRect/>
-          </a:stretch>
-        </p:blipFill>
+        </p:nvSpPr>
         <p:spPr>
           <a:xfrm>
-            <a:off x="7852200" y="3106043"/>
-            <a:ext cx="1371600" cy="428625"/>
-          </a:xfrm>
-          <a:prstGeom prst="rect">
-            <a:avLst/>
-          </a:prstGeom>
-        </p:spPr>
-      </p:pic>
-      <p:sp>
-        <p:nvSpPr>
-          <p:cNvPr id="17418" name="TextBox 17417"/>
-          <p:cNvSpPr txBox="1"/>
-          <p:nvPr/>
-        </p:nvSpPr>
-        <p:spPr>
-          <a:xfrm>
-            <a:off x="9281160" y="3191256"/>
-            <a:ext cx="2194560" cy="502920"/>
+            <a:off x="9372600" y="3328415"/>
+            <a:ext cx="2240279" cy="594360"/>
           </a:xfrm>
           <a:prstGeom prst="rect">
             <a:avLst/>
@@ -8259,7 +9976,7 @@
           <a:lstStyle/>
           <a:p>
             <a:pPr>
-              <a:defRPr sz="1000" b="1">
+              <a:defRPr sz="1200" b="1">
                 <a:solidFill>
                   <a:srgbClr val="0F1E36"/>
                 </a:solidFill>
@@ -8272,7 +9989,7 @@
           </a:p>
           <a:p>
             <a:pPr>
-              <a:defRPr sz="850">
+              <a:defRPr sz="950">
                 <a:solidFill>
                   <a:srgbClr val="1E293B"/>
                 </a:solidFill>
@@ -8280,45 +9997,21 @@
               </a:defRPr>
             </a:pPr>
             <a:r>
-              <a:t>High-concurrency ASGI REST engine</a:t>
-            </a:r>
-          </a:p>
-        </p:txBody>
-      </p:sp>
-      <p:pic>
-        <p:nvPicPr>
-          <p:cNvPr id="17419" name="Picture 17418" descr="pandas_badge.png"/>
-          <p:cNvPicPr>
-            <a:picLocks noChangeAspect="1"/>
-          </p:cNvPicPr>
+              <a:t>High-concurrency ASGI REST engine (&lt;5ms latency)</a:t>
+            </a:r>
+          </a:p>
+        </p:txBody>
+      </p:sp>
+      <p:sp>
+        <p:nvSpPr>
+          <p:cNvPr id="17439" name="TextBox 17438"/>
+          <p:cNvSpPr txBox="1"/>
           <p:nvPr/>
-        </p:nvPicPr>
-        <p:blipFill>
-          <a:blip r:embed="rId8"/>
-          <a:stretch>
-            <a:fillRect/>
-          </a:stretch>
-        </p:blipFill>
+        </p:nvSpPr>
         <p:spPr>
           <a:xfrm>
-            <a:off x="7818120" y="3986783"/>
-            <a:ext cx="1371600" cy="428625"/>
-          </a:xfrm>
-          <a:prstGeom prst="rect">
-            <a:avLst/>
-          </a:prstGeom>
-        </p:spPr>
-      </p:pic>
-      <p:sp>
-        <p:nvSpPr>
-          <p:cNvPr id="17420" name="TextBox 17419"/>
-          <p:cNvSpPr txBox="1"/>
-          <p:nvPr/>
-        </p:nvSpPr>
-        <p:spPr>
-          <a:xfrm>
-            <a:off x="9281160" y="3941063"/>
-            <a:ext cx="2194560" cy="502920"/>
+            <a:off x="9372600" y="4078224"/>
+            <a:ext cx="2240279" cy="594360"/>
           </a:xfrm>
           <a:prstGeom prst="rect">
             <a:avLst/>
@@ -8332,7 +10025,7 @@
           <a:lstStyle/>
           <a:p>
             <a:pPr>
-              <a:defRPr sz="1000" b="1">
+              <a:defRPr sz="1200" b="1">
                 <a:solidFill>
                   <a:srgbClr val="0F1E36"/>
                 </a:solidFill>
@@ -8345,7 +10038,7 @@
           </a:p>
           <a:p>
             <a:pPr>
-              <a:defRPr sz="850">
+              <a:defRPr sz="950">
                 <a:solidFill>
                   <a:srgbClr val="1E293B"/>
                 </a:solidFill>
@@ -8353,45 +10046,21 @@
               </a:defRPr>
             </a:pPr>
             <a:r>
-              <a:t>Data manipulation &amp; ratio derivations</a:t>
-            </a:r>
-          </a:p>
-        </p:txBody>
-      </p:sp>
-      <p:pic>
-        <p:nvPicPr>
-          <p:cNvPr id="17421" name="Picture 17420" descr="tailwind_badge.png"/>
-          <p:cNvPicPr>
-            <a:picLocks noChangeAspect="1"/>
-          </p:cNvPicPr>
+              <a:t>High-throughput feature engineering &amp; ratio derivations</a:t>
+            </a:r>
+          </a:p>
+        </p:txBody>
+      </p:sp>
+      <p:sp>
+        <p:nvSpPr>
+          <p:cNvPr id="17440" name="TextBox 17439"/>
+          <p:cNvSpPr txBox="1"/>
           <p:nvPr/>
-        </p:nvPicPr>
-        <p:blipFill>
-          <a:blip r:embed="rId9"/>
-          <a:stretch>
-            <a:fillRect/>
-          </a:stretch>
-        </p:blipFill>
+        </p:nvSpPr>
         <p:spPr>
           <a:xfrm>
-            <a:off x="7818120" y="4736592"/>
-            <a:ext cx="1371600" cy="428625"/>
-          </a:xfrm>
-          <a:prstGeom prst="rect">
-            <a:avLst/>
-          </a:prstGeom>
-        </p:spPr>
-      </p:pic>
-      <p:sp>
-        <p:nvSpPr>
-          <p:cNvPr id="17422" name="TextBox 17421"/>
-          <p:cNvSpPr txBox="1"/>
-          <p:nvPr/>
-        </p:nvSpPr>
-        <p:spPr>
-          <a:xfrm>
-            <a:off x="9281160" y="4690872"/>
-            <a:ext cx="2194560" cy="502920"/>
+            <a:off x="9372600" y="4828032"/>
+            <a:ext cx="2240279" cy="594360"/>
           </a:xfrm>
           <a:prstGeom prst="rect">
             <a:avLst/>
@@ -8405,7 +10074,7 @@
           <a:lstStyle/>
           <a:p>
             <a:pPr>
-              <a:defRPr sz="1000" b="1">
+              <a:defRPr sz="1200" b="1">
                 <a:solidFill>
                   <a:srgbClr val="0F1E36"/>
                 </a:solidFill>
@@ -8418,7 +10087,7 @@
           </a:p>
           <a:p>
             <a:pPr>
-              <a:defRPr sz="850">
+              <a:defRPr sz="950">
                 <a:solidFill>
                   <a:srgbClr val="1E293B"/>
                 </a:solidFill>
@@ -8426,21 +10095,21 @@
               </a:defRPr>
             </a:pPr>
             <a:r>
-              <a:t>Modern responsive UI &amp; interactive charts</a:t>
-            </a:r>
-          </a:p>
-        </p:txBody>
-      </p:sp>
-      <p:sp>
-        <p:nvSpPr>
-          <p:cNvPr id="17423" name="Rounded Rectangle 17422"/>
+              <a:t>Modern responsive web UI &amp; interactive data analytics</a:t>
+            </a:r>
+          </a:p>
+        </p:txBody>
+      </p:sp>
+      <p:sp>
+        <p:nvSpPr>
+          <p:cNvPr id="17441" name="Rounded Rectangle 17440"/>
           <p:cNvSpPr/>
           <p:nvPr/>
         </p:nvSpPr>
         <p:spPr>
           <a:xfrm>
-            <a:off x="7818120" y="5577840"/>
-            <a:ext cx="3657600" cy="548640"/>
+            <a:off x="7863840" y="5596128"/>
+            <a:ext cx="3703320" cy="475488"/>
           </a:xfrm>
           <a:prstGeom prst="roundRect">
             <a:avLst/>
@@ -8471,7 +10140,7 @@
           <a:lstStyle/>
           <a:p>
             <a:pPr algn="ctr">
-              <a:defRPr sz="950" b="1">
+              <a:defRPr sz="1050" b="1">
                 <a:solidFill>
                   <a:srgbClr val="FFFFFF"/>
                 </a:solidFill>
@@ -8479,68 +10148,8 @@
               </a:defRPr>
             </a:pPr>
             <a:r>
-              <a:t>100% Open Source | Zero Licensing Fees | Runs on 2 vCPUs</a:t>
-            </a:r>
-          </a:p>
-        </p:txBody>
-      </p:sp>
-      <p:sp>
-        <p:nvSpPr>
-          <p:cNvPr id="3" name="Oval 2" descr="Your startup LOGO">
-            <a:extLst>
-              <a:ext uri="{FF2B5EF4-FFF2-40B4-BE49-F238E27FC236}">
-                <a16:creationId xmlns:a16="http://schemas.microsoft.com/office/drawing/2014/main" id="{C7AF8FEA-3651-70F0-6730-88FD29A33244}"/>
-              </a:ext>
-              <a:ext uri="{C183D7F6-B498-43B3-948B-1728B52AA6E4}">
-                <adec:decorative xmlns:adec="http://schemas.microsoft.com/office/drawing/2017/decorative" val="0"/>
-              </a:ext>
-            </a:extLst>
-          </p:cNvPr>
-          <p:cNvSpPr/>
-          <p:nvPr/>
-        </p:nvSpPr>
-        <p:spPr>
-          <a:xfrm>
-            <a:off x="273824" y="188089"/>
-            <a:ext cx="1356787" cy="807334"/>
-          </a:xfrm>
-          <a:prstGeom prst="ellipse">
-            <a:avLst/>
-          </a:prstGeom>
-        </p:spPr>
-        <p:style>
-          <a:lnRef idx="2">
-            <a:schemeClr val="accent4"/>
-          </a:lnRef>
-          <a:fillRef idx="1">
-            <a:schemeClr val="lt1"/>
-          </a:fillRef>
-          <a:effectRef idx="0">
-            <a:schemeClr val="accent4"/>
-          </a:effectRef>
-          <a:fontRef idx="minor">
-            <a:schemeClr val="dk1"/>
-          </a:fontRef>
-        </p:style>
-        <p:txBody>
-          <a:bodyPr rtlCol="0" anchor="ctr"/>
-          <a:lstStyle/>
-          <a:p>
-            <a:r>
-              <a:rPr lang="en-US" b="1" dirty="0" err="1">
-                <a:solidFill>
-                  <a:schemeClr val="tx1"/>
-                </a:solidFill>
-                <a:latin typeface="New times"/>
-              </a:rPr>
-              <a:t>VigilEye</a:t>
-            </a:r>
-            <a:endParaRPr b="1" dirty="0">
-              <a:solidFill>
-                <a:schemeClr val="tx1"/>
-              </a:solidFill>
-              <a:latin typeface="New times"/>
-            </a:endParaRPr>
+              <a:t>✓ 100% Open Source | Zero Licensing Fees | 2 vCPUs</a:t>
+            </a:r>
           </a:p>
         </p:txBody>
       </p:sp>
@@ -8893,6 +10502,54 @@
           </a:p>
         </p:txBody>
       </p:sp>
+      <p:sp>
+        <p:nvSpPr>
+          <p:cNvPr id="12" name="Oval 11" descr="Your startup LOGO">
+            <a:extLst>
+              <a:ext uri="{FF2B5EF4-FFF2-40B4-BE49-F238E27FC236}">
+                <a16:creationId xmlns:a16="http://schemas.microsoft.com/office/drawing/2014/main" id="{5DBCE864-823D-4A13-9607-5DA1F0ED5FB8}"/>
+              </a:ext>
+              <a:ext uri="{C183D7F6-B498-43B3-948B-1728B52AA6E4}">
+                <adec:decorative xmlns:adec="http://schemas.microsoft.com/office/drawing/2017/decorative" xmlns="" val="0"/>
+              </a:ext>
+            </a:extLst>
+          </p:cNvPr>
+          <p:cNvSpPr/>
+          <p:nvPr/>
+        </p:nvSpPr>
+        <p:spPr>
+          <a:xfrm>
+            <a:off x="329773" y="252246"/>
+            <a:ext cx="1251857" cy="807334"/>
+          </a:xfrm>
+          <a:prstGeom prst="ellipse">
+            <a:avLst/>
+          </a:prstGeom>
+        </p:spPr>
+        <p:style>
+          <a:lnRef idx="2">
+            <a:schemeClr val="accent4"/>
+          </a:lnRef>
+          <a:fillRef idx="1">
+            <a:schemeClr val="lt1"/>
+          </a:fillRef>
+          <a:effectRef idx="0">
+            <a:schemeClr val="accent4"/>
+          </a:effectRef>
+          <a:fontRef idx="minor">
+            <a:schemeClr val="dk1"/>
+          </a:fontRef>
+        </p:style>
+        <p:txBody>
+          <a:bodyPr rtlCol="0" anchor="ctr"/>
+          <a:lstStyle/>
+          <a:p>
+            <a:r>
+              <a:t>Team InfraVision</a:t>
+            </a:r>
+          </a:p>
+        </p:txBody>
+      </p:sp>
       <p:pic>
         <p:nvPicPr>
           <p:cNvPr id="11" name="Picture 10"/>
@@ -8931,8 +10588,8 @@
         </p:nvSpPr>
         <p:spPr>
           <a:xfrm>
-            <a:off x="548640" y="1188720"/>
-            <a:ext cx="5394960" cy="5074920"/>
+            <a:off x="502920" y="1188720"/>
+            <a:ext cx="5486400" cy="5074920"/>
           </a:xfrm>
           <a:prstGeom prst="roundRect">
             <a:avLst/>
@@ -8961,11 +10618,11 @@
           </a:fontRef>
         </p:style>
         <p:txBody>
-          <a:bodyPr wrap="square" rtlCol="0" anchor="ctr"/>
+          <a:bodyPr rtlCol="0" anchor="ctr" wrap="square"/>
           <a:lstStyle/>
           <a:p>
             <a:pPr algn="ctr">
-              <a:defRPr sz="1100" b="1">
+              <a:defRPr sz="1150" b="1">
                 <a:solidFill>
                   <a:srgbClr val="E06D14"/>
                 </a:solidFill>
@@ -9213,7 +10870,7 @@
         </p:nvSpPr>
         <p:spPr>
           <a:xfrm>
-            <a:off x="6126480" y="1188720"/>
+            <a:off x="6172200" y="1188720"/>
             <a:ext cx="5486400" cy="5074920"/>
           </a:xfrm>
           <a:prstGeom prst="roundRect">
@@ -9243,11 +10900,11 @@
           </a:fontRef>
         </p:style>
         <p:txBody>
-          <a:bodyPr wrap="square" rtlCol="0" anchor="ctr"/>
+          <a:bodyPr rtlCol="0" anchor="ctr" wrap="square"/>
           <a:lstStyle/>
           <a:p>
             <a:pPr algn="ctr">
-              <a:defRPr sz="1100" b="1">
+              <a:defRPr sz="1150" b="1">
                 <a:solidFill>
                   <a:srgbClr val="0F1E36"/>
                 </a:solidFill>
@@ -9422,66 +11079,6 @@
             <a:r>
               <a:t>• Mitigation 3 (Scenario Simulator): Interactive What-If simulator allows administrators to stress-test ±30% inflation shocks in real time.</a:t>
             </a:r>
-          </a:p>
-        </p:txBody>
-      </p:sp>
-      <p:sp>
-        <p:nvSpPr>
-          <p:cNvPr id="5" name="Oval 4" descr="Your startup LOGO">
-            <a:extLst>
-              <a:ext uri="{FF2B5EF4-FFF2-40B4-BE49-F238E27FC236}">
-                <a16:creationId xmlns:a16="http://schemas.microsoft.com/office/drawing/2014/main" id="{6F2B9903-1385-C952-C1E4-AA1DD953F0BC}"/>
-              </a:ext>
-              <a:ext uri="{C183D7F6-B498-43B3-948B-1728B52AA6E4}">
-                <adec:decorative xmlns:adec="http://schemas.microsoft.com/office/drawing/2017/decorative" val="0"/>
-              </a:ext>
-            </a:extLst>
-          </p:cNvPr>
-          <p:cNvSpPr/>
-          <p:nvPr/>
-        </p:nvSpPr>
-        <p:spPr>
-          <a:xfrm>
-            <a:off x="273824" y="188089"/>
-            <a:ext cx="1356787" cy="807334"/>
-          </a:xfrm>
-          <a:prstGeom prst="ellipse">
-            <a:avLst/>
-          </a:prstGeom>
-        </p:spPr>
-        <p:style>
-          <a:lnRef idx="2">
-            <a:schemeClr val="accent4"/>
-          </a:lnRef>
-          <a:fillRef idx="1">
-            <a:schemeClr val="lt1"/>
-          </a:fillRef>
-          <a:effectRef idx="0">
-            <a:schemeClr val="accent4"/>
-          </a:effectRef>
-          <a:fontRef idx="minor">
-            <a:schemeClr val="dk1"/>
-          </a:fontRef>
-        </p:style>
-        <p:txBody>
-          <a:bodyPr rtlCol="0" anchor="ctr"/>
-          <a:lstStyle/>
-          <a:p>
-            <a:r>
-              <a:rPr lang="en-US" b="1" dirty="0" err="1">
-                <a:solidFill>
-                  <a:schemeClr val="tx1"/>
-                </a:solidFill>
-                <a:latin typeface="New times"/>
-              </a:rPr>
-              <a:t>VigilEye</a:t>
-            </a:r>
-            <a:endParaRPr b="1" dirty="0">
-              <a:solidFill>
-                <a:schemeClr val="tx1"/>
-              </a:solidFill>
-              <a:latin typeface="New times"/>
-            </a:endParaRPr>
           </a:p>
         </p:txBody>
       </p:sp>
@@ -9668,7 +11265,6 @@
               <a:tabLst/>
               <a:defRPr/>
             </a:pPr>
-            <a:endParaRPr/>
           </a:p>
         </p:txBody>
       </p:sp>
@@ -9826,6 +11422,54 @@
           </a:p>
         </p:txBody>
       </p:sp>
+      <p:sp>
+        <p:nvSpPr>
+          <p:cNvPr id="12" name="Oval 11" descr="Your startup LOGO">
+            <a:extLst>
+              <a:ext uri="{FF2B5EF4-FFF2-40B4-BE49-F238E27FC236}">
+                <a16:creationId xmlns:a16="http://schemas.microsoft.com/office/drawing/2014/main" id="{5DBCE864-823D-4A13-9607-5DA1F0ED5FB8}"/>
+              </a:ext>
+              <a:ext uri="{C183D7F6-B498-43B3-948B-1728B52AA6E4}">
+                <adec:decorative xmlns:adec="http://schemas.microsoft.com/office/drawing/2017/decorative" xmlns="" val="0"/>
+              </a:ext>
+            </a:extLst>
+          </p:cNvPr>
+          <p:cNvSpPr/>
+          <p:nvPr/>
+        </p:nvSpPr>
+        <p:spPr>
+          <a:xfrm>
+            <a:off x="329773" y="252246"/>
+            <a:ext cx="1251857" cy="807334"/>
+          </a:xfrm>
+          <a:prstGeom prst="ellipse">
+            <a:avLst/>
+          </a:prstGeom>
+        </p:spPr>
+        <p:style>
+          <a:lnRef idx="2">
+            <a:schemeClr val="accent4"/>
+          </a:lnRef>
+          <a:fillRef idx="1">
+            <a:schemeClr val="lt1"/>
+          </a:fillRef>
+          <a:effectRef idx="0">
+            <a:schemeClr val="accent4"/>
+          </a:effectRef>
+          <a:fontRef idx="minor">
+            <a:schemeClr val="dk1"/>
+          </a:fontRef>
+        </p:style>
+        <p:txBody>
+          <a:bodyPr rtlCol="0" anchor="ctr"/>
+          <a:lstStyle/>
+          <a:p>
+            <a:r>
+              <a:t>Team InfraVision</a:t>
+            </a:r>
+          </a:p>
+        </p:txBody>
+      </p:sp>
       <p:pic>
         <p:nvPicPr>
           <p:cNvPr id="11" name="Picture 10"/>
@@ -9864,8 +11508,8 @@
         </p:nvSpPr>
         <p:spPr>
           <a:xfrm>
-            <a:off x="548640" y="1188720"/>
-            <a:ext cx="3566160" cy="3337560"/>
+            <a:off x="502920" y="1188720"/>
+            <a:ext cx="3611880" cy="3337560"/>
           </a:xfrm>
           <a:prstGeom prst="roundRect">
             <a:avLst/>
@@ -9894,7 +11538,7 @@
           </a:fontRef>
         </p:style>
         <p:txBody>
-          <a:bodyPr wrap="square" rtlCol="0" anchor="ctr"/>
+          <a:bodyPr rtlCol="0" anchor="ctr" wrap="square"/>
           <a:lstStyle/>
           <a:p>
             <a:pPr algn="ctr">
@@ -9967,8 +11611,8 @@
         </p:nvSpPr>
         <p:spPr>
           <a:xfrm>
-            <a:off x="4279392" y="1188720"/>
-            <a:ext cx="3566160" cy="3337560"/>
+            <a:off x="4261104" y="1188720"/>
+            <a:ext cx="3611880" cy="3337560"/>
           </a:xfrm>
           <a:prstGeom prst="roundRect">
             <a:avLst/>
@@ -9997,7 +11641,7 @@
           </a:fontRef>
         </p:style>
         <p:txBody>
-          <a:bodyPr wrap="square" rtlCol="0" anchor="ctr"/>
+          <a:bodyPr rtlCol="0" anchor="ctr" wrap="square"/>
           <a:lstStyle/>
           <a:p>
             <a:pPr algn="ctr">
@@ -10070,8 +11714,8 @@
         </p:nvSpPr>
         <p:spPr>
           <a:xfrm>
-            <a:off x="8010144" y="1188720"/>
-            <a:ext cx="3566160" cy="3337560"/>
+            <a:off x="8019288" y="1188720"/>
+            <a:ext cx="3611880" cy="3337560"/>
           </a:xfrm>
           <a:prstGeom prst="roundRect">
             <a:avLst/>
@@ -10100,7 +11744,7 @@
           </a:fontRef>
         </p:style>
         <p:txBody>
-          <a:bodyPr wrap="square" rtlCol="0" anchor="ctr"/>
+          <a:bodyPr rtlCol="0" anchor="ctr" wrap="square"/>
           <a:lstStyle/>
           <a:p>
             <a:pPr algn="ctr">
@@ -10173,8 +11817,8 @@
         </p:nvSpPr>
         <p:spPr>
           <a:xfrm>
-            <a:off x="548640" y="4709160"/>
-            <a:ext cx="11033150" cy="1554480"/>
+            <a:off x="502920" y="4709160"/>
+            <a:ext cx="11155680" cy="1554480"/>
           </a:xfrm>
           <a:prstGeom prst="roundRect">
             <a:avLst/>
@@ -10203,7 +11847,7 @@
           </a:fontRef>
         </p:style>
         <p:txBody>
-          <a:bodyPr wrap="square" rtlCol="0" anchor="ctr"/>
+          <a:bodyPr rtlCol="0" anchor="ctr" wrap="square"/>
           <a:lstStyle/>
           <a:p>
             <a:pPr algn="ctr">
@@ -10265,66 +11909,6 @@
             <a:r>
               <a:t>3. State Chief Secretaries: Receive automated Stage-II Forest &amp; RFCTLARR Land Acquisition escalation dossiers for prompt district-level clearances.</a:t>
             </a:r>
-          </a:p>
-        </p:txBody>
-      </p:sp>
-      <p:sp>
-        <p:nvSpPr>
-          <p:cNvPr id="3" name="Oval 2" descr="Your startup LOGO">
-            <a:extLst>
-              <a:ext uri="{FF2B5EF4-FFF2-40B4-BE49-F238E27FC236}">
-                <a16:creationId xmlns:a16="http://schemas.microsoft.com/office/drawing/2014/main" id="{624D4D59-CAB8-2E2D-C201-37612B329D95}"/>
-              </a:ext>
-              <a:ext uri="{C183D7F6-B498-43B3-948B-1728B52AA6E4}">
-                <adec:decorative xmlns:adec="http://schemas.microsoft.com/office/drawing/2017/decorative" val="0"/>
-              </a:ext>
-            </a:extLst>
-          </p:cNvPr>
-          <p:cNvSpPr/>
-          <p:nvPr/>
-        </p:nvSpPr>
-        <p:spPr>
-          <a:xfrm>
-            <a:off x="273824" y="188089"/>
-            <a:ext cx="1356787" cy="807334"/>
-          </a:xfrm>
-          <a:prstGeom prst="ellipse">
-            <a:avLst/>
-          </a:prstGeom>
-        </p:spPr>
-        <p:style>
-          <a:lnRef idx="2">
-            <a:schemeClr val="accent4"/>
-          </a:lnRef>
-          <a:fillRef idx="1">
-            <a:schemeClr val="lt1"/>
-          </a:fillRef>
-          <a:effectRef idx="0">
-            <a:schemeClr val="accent4"/>
-          </a:effectRef>
-          <a:fontRef idx="minor">
-            <a:schemeClr val="dk1"/>
-          </a:fontRef>
-        </p:style>
-        <p:txBody>
-          <a:bodyPr rtlCol="0" anchor="ctr"/>
-          <a:lstStyle/>
-          <a:p>
-            <a:r>
-              <a:rPr lang="en-US" b="1" dirty="0" err="1">
-                <a:solidFill>
-                  <a:schemeClr val="tx1"/>
-                </a:solidFill>
-                <a:latin typeface="New times"/>
-              </a:rPr>
-              <a:t>VigilEye</a:t>
-            </a:r>
-            <a:endParaRPr b="1" dirty="0">
-              <a:solidFill>
-                <a:schemeClr val="tx1"/>
-              </a:solidFill>
-              <a:latin typeface="New times"/>
-            </a:endParaRPr>
           </a:p>
         </p:txBody>
       </p:sp>
@@ -10682,6 +12266,54 @@
           </a:p>
         </p:txBody>
       </p:sp>
+      <p:sp>
+        <p:nvSpPr>
+          <p:cNvPr id="9" name="Oval 8" descr="Your startup LOGO">
+            <a:extLst>
+              <a:ext uri="{FF2B5EF4-FFF2-40B4-BE49-F238E27FC236}">
+                <a16:creationId xmlns:a16="http://schemas.microsoft.com/office/drawing/2014/main" id="{5DBCE864-823D-4A13-9607-5DA1F0ED5FB8}"/>
+              </a:ext>
+              <a:ext uri="{C183D7F6-B498-43B3-948B-1728B52AA6E4}">
+                <adec:decorative xmlns:adec="http://schemas.microsoft.com/office/drawing/2017/decorative" xmlns="" val="0"/>
+              </a:ext>
+            </a:extLst>
+          </p:cNvPr>
+          <p:cNvSpPr/>
+          <p:nvPr/>
+        </p:nvSpPr>
+        <p:spPr>
+          <a:xfrm>
+            <a:off x="329773" y="252246"/>
+            <a:ext cx="1251857" cy="807334"/>
+          </a:xfrm>
+          <a:prstGeom prst="ellipse">
+            <a:avLst/>
+          </a:prstGeom>
+        </p:spPr>
+        <p:style>
+          <a:lnRef idx="2">
+            <a:schemeClr val="accent4"/>
+          </a:lnRef>
+          <a:fillRef idx="1">
+            <a:schemeClr val="lt1"/>
+          </a:fillRef>
+          <a:effectRef idx="0">
+            <a:schemeClr val="accent4"/>
+          </a:effectRef>
+          <a:fontRef idx="minor">
+            <a:schemeClr val="dk1"/>
+          </a:fontRef>
+        </p:style>
+        <p:txBody>
+          <a:bodyPr rtlCol="0" anchor="ctr"/>
+          <a:lstStyle/>
+          <a:p>
+            <a:r>
+              <a:t>Team InfraVision</a:t>
+            </a:r>
+          </a:p>
+        </p:txBody>
+      </p:sp>
       <p:pic>
         <p:nvPicPr>
           <p:cNvPr id="12" name="Picture 11"/>
@@ -10720,8 +12352,8 @@
         </p:nvSpPr>
         <p:spPr>
           <a:xfrm>
-            <a:off x="548640" y="1188720"/>
-            <a:ext cx="5394960" cy="5074920"/>
+            <a:off x="502920" y="1188720"/>
+            <a:ext cx="5486400" cy="5074920"/>
           </a:xfrm>
           <a:prstGeom prst="roundRect">
             <a:avLst/>
@@ -10750,11 +12382,11 @@
           </a:fontRef>
         </p:style>
         <p:txBody>
-          <a:bodyPr wrap="square" rtlCol="0" anchor="ctr"/>
+          <a:bodyPr rtlCol="0" anchor="ctr" wrap="square"/>
           <a:lstStyle/>
           <a:p>
             <a:pPr algn="ctr">
-              <a:defRPr sz="1100" b="1">
+              <a:defRPr sz="1150" b="1">
                 <a:solidFill>
                   <a:srgbClr val="0F1E36"/>
                 </a:solidFill>
@@ -10985,7 +12617,7 @@
         </p:nvSpPr>
         <p:spPr>
           <a:xfrm>
-            <a:off x="6126480" y="1188720"/>
+            <a:off x="6172200" y="1188720"/>
             <a:ext cx="5486400" cy="5074920"/>
           </a:xfrm>
           <a:prstGeom prst="roundRect">
@@ -11015,11 +12647,11 @@
           </a:fontRef>
         </p:style>
         <p:txBody>
-          <a:bodyPr wrap="square" rtlCol="0" anchor="ctr"/>
+          <a:bodyPr rtlCol="0" anchor="ctr" wrap="square"/>
           <a:lstStyle/>
           <a:p>
             <a:pPr algn="ctr">
-              <a:defRPr sz="1100" b="1">
+              <a:defRPr sz="1150" b="1">
                 <a:solidFill>
                   <a:srgbClr val="E06D14"/>
                 </a:solidFill>
@@ -11177,70 +12809,863 @@
           </a:p>
         </p:txBody>
       </p:sp>
-      <p:sp>
-        <p:nvSpPr>
-          <p:cNvPr id="5" name="Oval 4" descr="Your startup LOGO">
-            <a:extLst>
-              <a:ext uri="{FF2B5EF4-FFF2-40B4-BE49-F238E27FC236}">
-                <a16:creationId xmlns:a16="http://schemas.microsoft.com/office/drawing/2014/main" id="{4F7E8E85-F48B-27BD-09A8-5944CF9129BC}"/>
-              </a:ext>
-              <a:ext uri="{C183D7F6-B498-43B3-948B-1728B52AA6E4}">
-                <adec:decorative xmlns:adec="http://schemas.microsoft.com/office/drawing/2017/decorative" val="0"/>
-              </a:ext>
-            </a:extLst>
-          </p:cNvPr>
-          <p:cNvSpPr/>
-          <p:nvPr/>
-        </p:nvSpPr>
-        <p:spPr>
-          <a:xfrm>
-            <a:off x="273824" y="188089"/>
-            <a:ext cx="1356787" cy="807334"/>
-          </a:xfrm>
-          <a:prstGeom prst="ellipse">
-            <a:avLst/>
-          </a:prstGeom>
-        </p:spPr>
-        <p:style>
-          <a:lnRef idx="2">
-            <a:schemeClr val="accent4"/>
-          </a:lnRef>
-          <a:fillRef idx="1">
-            <a:schemeClr val="lt1"/>
-          </a:fillRef>
-          <a:effectRef idx="0">
-            <a:schemeClr val="accent4"/>
-          </a:effectRef>
-          <a:fontRef idx="minor">
-            <a:schemeClr val="dk1"/>
-          </a:fontRef>
-        </p:style>
-        <p:txBody>
-          <a:bodyPr rtlCol="0" anchor="ctr"/>
-          <a:lstStyle/>
-          <a:p>
-            <a:r>
-              <a:rPr lang="en-US" b="1" dirty="0" err="1">
-                <a:solidFill>
-                  <a:schemeClr val="tx1"/>
-                </a:solidFill>
-                <a:latin typeface="New times"/>
-              </a:rPr>
-              <a:t>VigilEye</a:t>
-            </a:r>
-            <a:endParaRPr b="1" dirty="0">
-              <a:solidFill>
-                <a:schemeClr val="tx1"/>
-              </a:solidFill>
-              <a:latin typeface="New times"/>
-            </a:endParaRPr>
-          </a:p>
-        </p:txBody>
-      </p:sp>
     </p:spTree>
     <p:extLst>
       <p:ext uri="{BB962C8B-B14F-4D97-AF65-F5344CB8AC3E}">
         <p14:creationId xmlns:p14="http://schemas.microsoft.com/office/powerpoint/2010/main" val="3916788613"/>
+      </p:ext>
+    </p:extLst>
+  </p:cSld>
+  <p:clrMapOvr>
+    <a:masterClrMapping/>
+  </p:clrMapOvr>
+</p:sld>
+</file>
+
+<file path=ppt/slides/slide7.xml><?xml version="1.0" encoding="utf-8"?>
+<p:sld xmlns:a="http://schemas.openxmlformats.org/drawingml/2006/main" xmlns:r="http://schemas.openxmlformats.org/officeDocument/2006/relationships" xmlns:p="http://schemas.openxmlformats.org/presentationml/2006/main">
+  <p:cSld>
+    <p:spTree>
+      <p:nvGrpSpPr>
+        <p:cNvPr id="1" name=""/>
+        <p:cNvGrpSpPr/>
+        <p:nvPr/>
+      </p:nvGrpSpPr>
+      <p:grpSpPr>
+        <a:xfrm>
+          <a:off x="0" y="0"/>
+          <a:ext cx="0" cy="0"/>
+          <a:chOff x="0" y="0"/>
+          <a:chExt cx="0" cy="0"/>
+        </a:xfrm>
+      </p:grpSpPr>
+      <p:sp>
+        <p:nvSpPr>
+          <p:cNvPr id="10" name="Rectangle 9">
+            <a:extLst>
+              <a:ext uri="{FF2B5EF4-FFF2-40B4-BE49-F238E27FC236}">
+                <a16:creationId xmlns:a16="http://schemas.microsoft.com/office/drawing/2014/main" id="{AD4F69D3-EEB0-4C4C-9434-B9960FB5854C}"/>
+              </a:ext>
+            </a:extLst>
+          </p:cNvPr>
+          <p:cNvSpPr>
+            <a:spLocks noChangeArrowheads="1"/>
+          </p:cNvSpPr>
+          <p:nvPr/>
+        </p:nvSpPr>
+        <p:spPr bwMode="auto">
+          <a:xfrm>
+            <a:off x="0" y="6354762"/>
+            <a:ext cx="12191999" cy="503238"/>
+          </a:xfrm>
+          <a:prstGeom prst="rect">
+            <a:avLst/>
+          </a:prstGeom>
+          <a:solidFill>
+            <a:srgbClr val="0070C0"/>
+          </a:solidFill>
+          <a:ln w="9525">
+            <a:noFill/>
+            <a:miter lim="800000"/>
+            <a:headEnd/>
+            <a:tailEnd/>
+          </a:ln>
+          <a:effectLst>
+            <a:outerShdw dist="23000" dir="5400000" rotWithShape="0">
+              <a:srgbClr val="808080">
+                <a:alpha val="34999"/>
+              </a:srgbClr>
+            </a:outerShdw>
+          </a:effectLst>
+        </p:spPr>
+        <p:txBody>
+          <a:bodyPr anchor="ctr"/>
+          <a:lstStyle/>
+          <a:p>
+            <a:pPr marL="0" marR="0" lvl="0" indent="0" algn="ctr" defTabSz="457200" rtl="0" eaLnBrk="1" fontAlgn="auto" latinLnBrk="0" hangingPunct="1">
+              <a:lnSpc>
+                <a:spcPct val="100000"/>
+              </a:lnSpc>
+              <a:spcBef>
+                <a:spcPts val="0"/>
+              </a:spcBef>
+              <a:spcAft>
+                <a:spcPts val="0"/>
+              </a:spcAft>
+              <a:buClrTx/>
+              <a:buSzTx/>
+              <a:buFontTx/>
+              <a:buNone/>
+              <a:tabLst/>
+              <a:defRPr/>
+            </a:pPr>
+            <a:endParaRPr kumimoji="0" lang="en-US" sz="1800" b="0" i="0" u="none" strike="noStrike" kern="1200" cap="none" spc="0" normalizeH="0" baseline="0" noProof="0" dirty="0">
+              <a:ln>
+                <a:noFill/>
+              </a:ln>
+              <a:solidFill>
+                <a:srgbClr val="C0504D">
+                  <a:lumMod val="75000"/>
+                </a:srgbClr>
+              </a:solidFill>
+              <a:effectLst/>
+              <a:uLnTx/>
+              <a:uFillTx/>
+              <a:latin typeface="Calibri"/>
+              <a:ea typeface="ＭＳ Ｐゴシック" pitchFamily="1" charset="-128"/>
+              <a:cs typeface="+mn-cs"/>
+            </a:endParaRPr>
+          </a:p>
+        </p:txBody>
+      </p:sp>
+      <p:sp>
+        <p:nvSpPr>
+          <p:cNvPr id="6" name="Slide Number Placeholder 5"/>
+          <p:cNvSpPr>
+            <a:spLocks noGrp="1"/>
+          </p:cNvSpPr>
+          <p:nvPr>
+            <p:ph type="sldNum" sz="quarter" idx="12"/>
+          </p:nvPr>
+        </p:nvSpPr>
+        <p:spPr/>
+        <p:txBody>
+          <a:bodyPr/>
+          <a:lstStyle/>
+          <a:p>
+            <a:pPr marL="0" marR="0" lvl="0" indent="0" algn="r" defTabSz="457200" rtl="0" eaLnBrk="1" fontAlgn="base" latinLnBrk="0" hangingPunct="1">
+              <a:lnSpc>
+                <a:spcPct val="100000"/>
+              </a:lnSpc>
+              <a:spcBef>
+                <a:spcPct val="0"/>
+              </a:spcBef>
+              <a:spcAft>
+                <a:spcPct val="0"/>
+              </a:spcAft>
+              <a:buClrTx/>
+              <a:buSzTx/>
+              <a:buFontTx/>
+              <a:buNone/>
+              <a:tabLst/>
+              <a:defRPr/>
+            </a:pPr>
+            <a:fld id="{677C3CE7-23F7-4828-823C-E0205DF2CF97}" type="slidenum">
+              <a:rPr kumimoji="0" lang="en-US" sz="1200" b="1" i="0" u="none" strike="noStrike" kern="1200" cap="none" spc="0" normalizeH="0" baseline="0" noProof="0">
+                <a:ln>
+                  <a:noFill/>
+                </a:ln>
+                <a:solidFill>
+                  <a:prstClr val="white"/>
+                </a:solidFill>
+                <a:effectLst/>
+                <a:uLnTx/>
+                <a:uFillTx/>
+                <a:latin typeface="TradeGothic" pitchFamily="1" charset="0"/>
+                <a:ea typeface="ＭＳ Ｐゴシック" pitchFamily="1" charset="-128"/>
+                <a:cs typeface="+mn-cs"/>
+              </a:rPr>
+              <a:pPr marL="0" marR="0" lvl="0" indent="0" algn="r" defTabSz="457200" rtl="0" eaLnBrk="1" fontAlgn="base" latinLnBrk="0" hangingPunct="1">
+                <a:lnSpc>
+                  <a:spcPct val="100000"/>
+                </a:lnSpc>
+                <a:spcBef>
+                  <a:spcPct val="0"/>
+                </a:spcBef>
+                <a:spcAft>
+                  <a:spcPct val="0"/>
+                </a:spcAft>
+                <a:buClrTx/>
+                <a:buSzTx/>
+                <a:buFontTx/>
+                <a:buNone/>
+                <a:tabLst/>
+                <a:defRPr/>
+              </a:pPr>
+              <a:t>7</a:t>
+            </a:fld>
+            <a:endParaRPr kumimoji="0" lang="en-US" sz="1200" b="1" i="0" u="none" strike="noStrike" kern="1200" cap="none" spc="0" normalizeH="0" baseline="0" noProof="0" dirty="0">
+              <a:ln>
+                <a:noFill/>
+              </a:ln>
+              <a:solidFill>
+                <a:prstClr val="white"/>
+              </a:solidFill>
+              <a:effectLst/>
+              <a:uLnTx/>
+              <a:uFillTx/>
+              <a:latin typeface="TradeGothic" pitchFamily="1" charset="0"/>
+              <a:ea typeface="ＭＳ Ｐゴシック" pitchFamily="1" charset="-128"/>
+              <a:cs typeface="+mn-cs"/>
+            </a:endParaRPr>
+          </a:p>
+        </p:txBody>
+      </p:sp>
+      <p:sp>
+        <p:nvSpPr>
+          <p:cNvPr id="7" name="Footer Placeholder 6"/>
+          <p:cNvSpPr>
+            <a:spLocks noGrp="1"/>
+          </p:cNvSpPr>
+          <p:nvPr>
+            <p:ph type="ftr" sz="quarter" idx="11"/>
+          </p:nvPr>
+        </p:nvSpPr>
+        <p:spPr>
+          <a:xfrm>
+            <a:off x="4648200" y="6356353"/>
+            <a:ext cx="3204000" cy="365125"/>
+          </a:xfrm>
+        </p:spPr>
+        <p:txBody>
+          <a:bodyPr/>
+          <a:lstStyle/>
+          <a:p>
+            <a:pPr marL="0" marR="0" lvl="0" indent="0" algn="ctr" defTabSz="457200" rtl="0" eaLnBrk="1" fontAlgn="auto" latinLnBrk="0" hangingPunct="1">
+              <a:lnSpc>
+                <a:spcPct val="100000"/>
+              </a:lnSpc>
+              <a:spcBef>
+                <a:spcPts val="0"/>
+              </a:spcBef>
+              <a:spcAft>
+                <a:spcPts val="0"/>
+              </a:spcAft>
+              <a:buClrTx/>
+              <a:buSzTx/>
+              <a:buFontTx/>
+              <a:buNone/>
+              <a:tabLst/>
+              <a:defRPr/>
+            </a:pPr>
+            <a:r>
+              <a:rPr kumimoji="0" lang="en-US" sz="1200" b="0" i="0" u="none" strike="noStrike" kern="1200" cap="none" spc="0" normalizeH="0" baseline="0" noProof="0">
+                <a:ln>
+                  <a:noFill/>
+                </a:ln>
+                <a:solidFill>
+                  <a:prstClr val="white"/>
+                </a:solidFill>
+                <a:effectLst/>
+                <a:uLnTx/>
+                <a:uFillTx/>
+                <a:latin typeface="TradeGothic"/>
+                <a:ea typeface="+mn-ea"/>
+                <a:cs typeface="+mn-cs"/>
+              </a:rPr>
+              <a:t>@SIH Idea submission- Template</a:t>
+            </a:r>
+            <a:endParaRPr kumimoji="0" lang="en-US" sz="1200" b="0" i="0" u="none" strike="noStrike" kern="1200" cap="none" spc="0" normalizeH="0" baseline="0" noProof="0" dirty="0">
+              <a:ln>
+                <a:noFill/>
+              </a:ln>
+              <a:solidFill>
+                <a:prstClr val="white"/>
+              </a:solidFill>
+              <a:effectLst/>
+              <a:uLnTx/>
+              <a:uFillTx/>
+              <a:latin typeface="TradeGothic"/>
+              <a:ea typeface="+mn-ea"/>
+              <a:cs typeface="+mn-cs"/>
+            </a:endParaRPr>
+          </a:p>
+        </p:txBody>
+      </p:sp>
+      <p:sp>
+        <p:nvSpPr>
+          <p:cNvPr id="3" name="Round Diagonal Corner Rectangle 2"/>
+          <p:cNvSpPr/>
+          <p:nvPr/>
+        </p:nvSpPr>
+        <p:spPr>
+          <a:xfrm>
+            <a:off x="0" y="1791032"/>
+            <a:ext cx="12192000" cy="4319200"/>
+          </a:xfrm>
+          <a:prstGeom prst="round2DiagRect">
+            <a:avLst/>
+          </a:prstGeom>
+          <a:solidFill>
+            <a:schemeClr val="accent1">
+              <a:lumMod val="20000"/>
+              <a:lumOff val="80000"/>
+            </a:schemeClr>
+          </a:solidFill>
+          <a:ln w="38100"/>
+        </p:spPr>
+        <p:style>
+          <a:lnRef idx="1">
+            <a:schemeClr val="accent1"/>
+          </a:lnRef>
+          <a:fillRef idx="3">
+            <a:schemeClr val="accent1"/>
+          </a:fillRef>
+          <a:effectRef idx="2">
+            <a:schemeClr val="accent1"/>
+          </a:effectRef>
+          <a:fontRef idx="minor">
+            <a:schemeClr val="lt1"/>
+          </a:fontRef>
+        </p:style>
+        <p:txBody>
+          <a:bodyPr rtlCol="0" anchor="ctr"/>
+          <a:lstStyle/>
+          <a:p>
+            <a:pPr algn="ctr"/>
+            <a:endParaRPr lang="en-IN"/>
+          </a:p>
+        </p:txBody>
+      </p:sp>
+      <p:sp>
+        <p:nvSpPr>
+          <p:cNvPr id="12" name="Google Shape;100;p3"/>
+          <p:cNvSpPr txBox="1"/>
+          <p:nvPr/>
+        </p:nvSpPr>
+        <p:spPr>
+          <a:xfrm>
+            <a:off x="367832" y="1915454"/>
+            <a:ext cx="11764736" cy="4070356"/>
+          </a:xfrm>
+          <a:prstGeom prst="rect">
+            <a:avLst/>
+          </a:prstGeom>
+          <a:noFill/>
+          <a:ln>
+            <a:noFill/>
+          </a:ln>
+        </p:spPr>
+        <p:txBody>
+          <a:bodyPr spcFirstLastPara="1" wrap="square" lIns="91425" tIns="45700" rIns="91425" bIns="45700" anchor="t" anchorCtr="0">
+            <a:noAutofit/>
+          </a:bodyPr>
+          <a:lstStyle/>
+          <a:p>
+            <a:pPr marL="514350" marR="0" lvl="0" indent="-514350" algn="just" rtl="0">
+              <a:lnSpc>
+                <a:spcPct val="90000"/>
+              </a:lnSpc>
+              <a:spcBef>
+                <a:spcPts val="0"/>
+              </a:spcBef>
+              <a:spcAft>
+                <a:spcPts val="0"/>
+              </a:spcAft>
+              <a:buClr>
+                <a:schemeClr val="dk1"/>
+              </a:buClr>
+              <a:buSzPct val="100000"/>
+              <a:buFont typeface="Calibri"/>
+              <a:buAutoNum type="arabicPeriod"/>
+            </a:pPr>
+            <a:r>
+              <a:rPr lang="en-US" b="1" i="0" u="none" strike="noStrike" cap="none" dirty="0">
+                <a:solidFill>
+                  <a:schemeClr val="dk1"/>
+                </a:solidFill>
+                <a:latin typeface="Arial" panose="020B0604020202020204" pitchFamily="34" charset="0"/>
+                <a:ea typeface="Calibri"/>
+                <a:cs typeface="Arial" panose="020B0604020202020204" pitchFamily="34" charset="0"/>
+                <a:sym typeface="Calibri"/>
+              </a:rPr>
+              <a:t>Kindly keep the maximum slides limit up to six </a:t>
+            </a:r>
+            <a:r>
+              <a:rPr lang="en-US" b="1" i="0" u="none" strike="noStrike" cap="none" dirty="0">
+                <a:solidFill>
+                  <a:srgbClr val="C00000"/>
+                </a:solidFill>
+                <a:latin typeface="Arial" panose="020B0604020202020204" pitchFamily="34" charset="0"/>
+                <a:ea typeface="Calibri"/>
+                <a:cs typeface="Arial" panose="020B0604020202020204" pitchFamily="34" charset="0"/>
+                <a:sym typeface="Calibri"/>
+              </a:rPr>
+              <a:t>(6). </a:t>
+            </a:r>
+            <a:r>
+              <a:rPr lang="en-US" b="1" i="0" u="none" strike="noStrike" cap="none" dirty="0">
+                <a:solidFill>
+                  <a:schemeClr val="dk1"/>
+                </a:solidFill>
+                <a:latin typeface="Arial" panose="020B0604020202020204" pitchFamily="34" charset="0"/>
+                <a:ea typeface="Calibri"/>
+                <a:cs typeface="Arial" panose="020B0604020202020204" pitchFamily="34" charset="0"/>
+                <a:sym typeface="Calibri"/>
+              </a:rPr>
+              <a:t>( Including the </a:t>
+            </a:r>
+            <a:r>
+              <a:rPr lang="en-US" b="1" i="0" u="none" strike="noStrike" cap="none">
+                <a:solidFill>
+                  <a:schemeClr val="dk1"/>
+                </a:solidFill>
+                <a:latin typeface="Arial" panose="020B0604020202020204" pitchFamily="34" charset="0"/>
+                <a:ea typeface="Calibri"/>
+                <a:cs typeface="Arial" panose="020B0604020202020204" pitchFamily="34" charset="0"/>
+                <a:sym typeface="Calibri"/>
+              </a:rPr>
+              <a:t>title slide) </a:t>
+            </a:r>
+            <a:endParaRPr b="1" dirty="0">
+              <a:latin typeface="Arial" panose="020B0604020202020204" pitchFamily="34" charset="0"/>
+              <a:cs typeface="Arial" panose="020B0604020202020204" pitchFamily="34" charset="0"/>
+            </a:endParaRPr>
+          </a:p>
+          <a:p>
+            <a:pPr marL="514350" marR="0" lvl="0" indent="-514350" algn="just" rtl="0">
+              <a:lnSpc>
+                <a:spcPct val="90000"/>
+              </a:lnSpc>
+              <a:spcBef>
+                <a:spcPts val="1000"/>
+              </a:spcBef>
+              <a:spcAft>
+                <a:spcPts val="0"/>
+              </a:spcAft>
+              <a:buClr>
+                <a:schemeClr val="dk1"/>
+              </a:buClr>
+              <a:buSzPct val="100000"/>
+              <a:buFont typeface="Calibri"/>
+              <a:buAutoNum type="arabicPeriod"/>
+            </a:pPr>
+            <a:r>
+              <a:rPr lang="en-US" b="1" i="0" u="none" strike="noStrike" cap="none" dirty="0">
+                <a:solidFill>
+                  <a:schemeClr val="dk1"/>
+                </a:solidFill>
+                <a:latin typeface="Arial" panose="020B0604020202020204" pitchFamily="34" charset="0"/>
+                <a:ea typeface="Calibri"/>
+                <a:cs typeface="Arial" panose="020B0604020202020204" pitchFamily="34" charset="0"/>
+                <a:sym typeface="Calibri"/>
+              </a:rPr>
+              <a:t>Try to avoid paragraphs and post your idea in points /diagrams / Infographics /pictures </a:t>
+            </a:r>
+            <a:endParaRPr b="1" dirty="0">
+              <a:latin typeface="Arial" panose="020B0604020202020204" pitchFamily="34" charset="0"/>
+              <a:cs typeface="Arial" panose="020B0604020202020204" pitchFamily="34" charset="0"/>
+            </a:endParaRPr>
+          </a:p>
+          <a:p>
+            <a:pPr marL="514350" marR="0" lvl="0" indent="-514350" algn="just" rtl="0">
+              <a:lnSpc>
+                <a:spcPct val="90000"/>
+              </a:lnSpc>
+              <a:spcBef>
+                <a:spcPts val="1000"/>
+              </a:spcBef>
+              <a:spcAft>
+                <a:spcPts val="0"/>
+              </a:spcAft>
+              <a:buClr>
+                <a:schemeClr val="dk1"/>
+              </a:buClr>
+              <a:buSzPct val="100000"/>
+              <a:buFont typeface="Calibri"/>
+              <a:buAutoNum type="arabicPeriod"/>
+            </a:pPr>
+            <a:r>
+              <a:rPr lang="en-US" b="1" i="0" u="none" strike="noStrike" cap="none" dirty="0">
+                <a:solidFill>
+                  <a:schemeClr val="dk1"/>
+                </a:solidFill>
+                <a:latin typeface="Arial" panose="020B0604020202020204" pitchFamily="34" charset="0"/>
+                <a:ea typeface="Calibri"/>
+                <a:cs typeface="Arial" panose="020B0604020202020204" pitchFamily="34" charset="0"/>
+                <a:sym typeface="Calibri"/>
+              </a:rPr>
+              <a:t>Keep your explanation precise and easy to understand</a:t>
+            </a:r>
+            <a:endParaRPr b="1" dirty="0">
+              <a:latin typeface="Arial" panose="020B0604020202020204" pitchFamily="34" charset="0"/>
+              <a:cs typeface="Arial" panose="020B0604020202020204" pitchFamily="34" charset="0"/>
+            </a:endParaRPr>
+          </a:p>
+          <a:p>
+            <a:pPr marL="514350" marR="0" lvl="0" indent="-514350" algn="just" rtl="0">
+              <a:lnSpc>
+                <a:spcPct val="90000"/>
+              </a:lnSpc>
+              <a:spcBef>
+                <a:spcPts val="1000"/>
+              </a:spcBef>
+              <a:spcAft>
+                <a:spcPts val="0"/>
+              </a:spcAft>
+              <a:buClr>
+                <a:schemeClr val="dk1"/>
+              </a:buClr>
+              <a:buSzPct val="100000"/>
+              <a:buFont typeface="Calibri"/>
+              <a:buAutoNum type="arabicPeriod"/>
+            </a:pPr>
+            <a:r>
+              <a:rPr lang="en-US" b="1" i="0" u="none" strike="noStrike" cap="none" dirty="0">
+                <a:solidFill>
+                  <a:schemeClr val="dk1"/>
+                </a:solidFill>
+                <a:latin typeface="Arial" panose="020B0604020202020204" pitchFamily="34" charset="0"/>
+                <a:ea typeface="Calibri"/>
+                <a:cs typeface="Arial" panose="020B0604020202020204" pitchFamily="34" charset="0"/>
+                <a:sym typeface="Calibri"/>
+              </a:rPr>
+              <a:t>Idea should be unique and novel. </a:t>
+            </a:r>
+            <a:endParaRPr b="1" dirty="0">
+              <a:latin typeface="Arial" panose="020B0604020202020204" pitchFamily="34" charset="0"/>
+              <a:cs typeface="Arial" panose="020B0604020202020204" pitchFamily="34" charset="0"/>
+            </a:endParaRPr>
+          </a:p>
+          <a:p>
+            <a:pPr marL="514350" marR="0" lvl="0" indent="-514350" algn="just" rtl="0">
+              <a:lnSpc>
+                <a:spcPct val="90000"/>
+              </a:lnSpc>
+              <a:spcBef>
+                <a:spcPts val="1000"/>
+              </a:spcBef>
+              <a:spcAft>
+                <a:spcPts val="0"/>
+              </a:spcAft>
+              <a:buClr>
+                <a:schemeClr val="dk1"/>
+              </a:buClr>
+              <a:buSzPct val="100000"/>
+              <a:buFont typeface="Calibri"/>
+              <a:buAutoNum type="arabicPeriod"/>
+            </a:pPr>
+            <a:r>
+              <a:rPr lang="en-US" b="1" i="0" u="none" strike="noStrike" cap="none" dirty="0">
+                <a:solidFill>
+                  <a:schemeClr val="dk1"/>
+                </a:solidFill>
+                <a:latin typeface="Arial" panose="020B0604020202020204" pitchFamily="34" charset="0"/>
+                <a:ea typeface="Calibri"/>
+                <a:cs typeface="Arial" panose="020B0604020202020204" pitchFamily="34" charset="0"/>
+                <a:sym typeface="Calibri"/>
+              </a:rPr>
+              <a:t>You can only use provided </a:t>
+            </a:r>
+            <a:r>
+              <a:rPr lang="en-US" b="1" dirty="0">
+                <a:solidFill>
+                  <a:schemeClr val="dk1"/>
+                </a:solidFill>
+                <a:latin typeface="Arial" panose="020B0604020202020204" pitchFamily="34" charset="0"/>
+                <a:ea typeface="Calibri"/>
+                <a:cs typeface="Arial" panose="020B0604020202020204" pitchFamily="34" charset="0"/>
+                <a:sym typeface="Calibri"/>
+              </a:rPr>
+              <a:t>template</a:t>
+            </a:r>
+            <a:r>
+              <a:rPr lang="en-US" b="1" i="0" u="none" strike="noStrike" cap="none" dirty="0">
+                <a:solidFill>
+                  <a:schemeClr val="dk1"/>
+                </a:solidFill>
+                <a:latin typeface="Arial" panose="020B0604020202020204" pitchFamily="34" charset="0"/>
+                <a:ea typeface="Calibri"/>
+                <a:cs typeface="Arial" panose="020B0604020202020204" pitchFamily="34" charset="0"/>
+                <a:sym typeface="Calibri"/>
+              </a:rPr>
+              <a:t> for making the </a:t>
+            </a:r>
+            <a:r>
+              <a:rPr lang="en-US" b="1" dirty="0">
+                <a:solidFill>
+                  <a:schemeClr val="dk1"/>
+                </a:solidFill>
+                <a:latin typeface="Arial" panose="020B0604020202020204" pitchFamily="34" charset="0"/>
+                <a:ea typeface="Calibri"/>
+                <a:cs typeface="Arial" panose="020B0604020202020204" pitchFamily="34" charset="0"/>
+                <a:sym typeface="Calibri"/>
+              </a:rPr>
+              <a:t>PPT</a:t>
+            </a:r>
+            <a:r>
+              <a:rPr lang="en-US" b="1" i="0" u="none" strike="noStrike" cap="none" dirty="0">
+                <a:solidFill>
+                  <a:schemeClr val="dk1"/>
+                </a:solidFill>
+                <a:latin typeface="Arial" panose="020B0604020202020204" pitchFamily="34" charset="0"/>
+                <a:ea typeface="Calibri"/>
+                <a:cs typeface="Arial" panose="020B0604020202020204" pitchFamily="34" charset="0"/>
+                <a:sym typeface="Calibri"/>
+              </a:rPr>
+              <a:t> without changing the idea details pointers (mentioned in previous slides).</a:t>
+            </a:r>
+            <a:endParaRPr b="1" i="0" u="none" strike="noStrike" cap="none" dirty="0">
+              <a:solidFill>
+                <a:schemeClr val="dk1"/>
+              </a:solidFill>
+              <a:latin typeface="Arial" panose="020B0604020202020204" pitchFamily="34" charset="0"/>
+              <a:ea typeface="Calibri"/>
+              <a:cs typeface="Arial" panose="020B0604020202020204" pitchFamily="34" charset="0"/>
+              <a:sym typeface="Calibri"/>
+            </a:endParaRPr>
+          </a:p>
+          <a:p>
+            <a:pPr marL="514350" marR="0" lvl="0" indent="-514350" algn="just" rtl="0">
+              <a:lnSpc>
+                <a:spcPct val="90000"/>
+              </a:lnSpc>
+              <a:spcBef>
+                <a:spcPts val="1000"/>
+              </a:spcBef>
+              <a:spcAft>
+                <a:spcPts val="0"/>
+              </a:spcAft>
+              <a:buClr>
+                <a:schemeClr val="dk1"/>
+              </a:buClr>
+              <a:buSzPct val="100000"/>
+              <a:buFont typeface="Calibri"/>
+              <a:buAutoNum type="arabicPeriod"/>
+            </a:pPr>
+            <a:r>
+              <a:rPr lang="en-US" b="1" i="0" u="none" strike="noStrike" cap="none" dirty="0">
+                <a:solidFill>
+                  <a:schemeClr val="dk1"/>
+                </a:solidFill>
+                <a:latin typeface="Arial" panose="020B0604020202020204" pitchFamily="34" charset="0"/>
+                <a:ea typeface="Calibri"/>
+                <a:cs typeface="Arial" panose="020B0604020202020204" pitchFamily="34" charset="0"/>
+                <a:sym typeface="Calibri"/>
+              </a:rPr>
+              <a:t>You need to save the file in PDF and upload the same on portal. No PPT, Word Doc or any other format will be supported.</a:t>
+            </a:r>
+            <a:endParaRPr b="1" dirty="0">
+              <a:latin typeface="Arial" panose="020B0604020202020204" pitchFamily="34" charset="0"/>
+              <a:cs typeface="Arial" panose="020B0604020202020204" pitchFamily="34" charset="0"/>
+            </a:endParaRPr>
+          </a:p>
+          <a:p>
+            <a:pPr marL="514350" marR="0" lvl="0" indent="-349885" algn="just" rtl="0">
+              <a:lnSpc>
+                <a:spcPct val="90000"/>
+              </a:lnSpc>
+              <a:spcBef>
+                <a:spcPts val="1000"/>
+              </a:spcBef>
+              <a:spcAft>
+                <a:spcPts val="0"/>
+              </a:spcAft>
+              <a:buClr>
+                <a:schemeClr val="dk1"/>
+              </a:buClr>
+              <a:buSzPct val="100000"/>
+              <a:buFont typeface="Calibri"/>
+              <a:buNone/>
+            </a:pPr>
+            <a:endParaRPr b="1" i="0" u="none" strike="noStrike" cap="none" dirty="0">
+              <a:solidFill>
+                <a:schemeClr val="dk1"/>
+              </a:solidFill>
+              <a:latin typeface="Arial" panose="020B0604020202020204" pitchFamily="34" charset="0"/>
+              <a:ea typeface="Calibri"/>
+              <a:cs typeface="Arial" panose="020B0604020202020204" pitchFamily="34" charset="0"/>
+              <a:sym typeface="Calibri"/>
+            </a:endParaRPr>
+          </a:p>
+          <a:p>
+            <a:pPr marL="0" marR="0" lvl="0" indent="0" algn="just" rtl="0">
+              <a:lnSpc>
+                <a:spcPct val="90000"/>
+              </a:lnSpc>
+              <a:spcBef>
+                <a:spcPts val="1000"/>
+              </a:spcBef>
+              <a:spcAft>
+                <a:spcPts val="0"/>
+              </a:spcAft>
+              <a:buClr>
+                <a:schemeClr val="dk1"/>
+              </a:buClr>
+              <a:buSzPct val="100000"/>
+              <a:buFont typeface="Arial"/>
+              <a:buNone/>
+            </a:pPr>
+            <a:r>
+              <a:rPr lang="en-US" b="1" i="0" u="none" strike="noStrike" cap="none" dirty="0">
+                <a:solidFill>
+                  <a:srgbClr val="C00000"/>
+                </a:solidFill>
+                <a:latin typeface="Arial" panose="020B0604020202020204" pitchFamily="34" charset="0"/>
+                <a:ea typeface="Calibri"/>
+                <a:cs typeface="Arial" panose="020B0604020202020204" pitchFamily="34" charset="0"/>
+                <a:sym typeface="Calibri"/>
+              </a:rPr>
+              <a:t>Note - You can delete this slide (Important Pointers) when you upload the details of your idea on SIH portal.</a:t>
+            </a:r>
+            <a:endParaRPr b="1" dirty="0">
+              <a:solidFill>
+                <a:srgbClr val="C00000"/>
+              </a:solidFill>
+              <a:latin typeface="Arial" panose="020B0604020202020204" pitchFamily="34" charset="0"/>
+              <a:cs typeface="Arial" panose="020B0604020202020204" pitchFamily="34" charset="0"/>
+            </a:endParaRPr>
+          </a:p>
+          <a:p>
+            <a:pPr marL="914400" marR="0" lvl="1" indent="-316230" algn="just" rtl="0">
+              <a:lnSpc>
+                <a:spcPct val="90000"/>
+              </a:lnSpc>
+              <a:spcBef>
+                <a:spcPts val="500"/>
+              </a:spcBef>
+              <a:spcAft>
+                <a:spcPts val="0"/>
+              </a:spcAft>
+              <a:buClr>
+                <a:schemeClr val="dk1"/>
+              </a:buClr>
+              <a:buSzPct val="100000"/>
+              <a:buFont typeface="Calibri"/>
+              <a:buNone/>
+            </a:pPr>
+            <a:endParaRPr sz="2000" b="1" i="0" u="none" strike="noStrike" cap="none" dirty="0">
+              <a:solidFill>
+                <a:schemeClr val="dk1"/>
+              </a:solidFill>
+              <a:latin typeface="Arial" panose="020B0604020202020204" pitchFamily="34" charset="0"/>
+              <a:ea typeface="Calibri"/>
+              <a:cs typeface="Arial" panose="020B0604020202020204" pitchFamily="34" charset="0"/>
+              <a:sym typeface="Calibri"/>
+            </a:endParaRPr>
+          </a:p>
+        </p:txBody>
+      </p:sp>
+      <p:sp>
+        <p:nvSpPr>
+          <p:cNvPr id="4" name="TextBox 3"/>
+          <p:cNvSpPr txBox="1"/>
+          <p:nvPr/>
+        </p:nvSpPr>
+        <p:spPr>
+          <a:xfrm>
+            <a:off x="1393371" y="107066"/>
+            <a:ext cx="8410540" cy="646331"/>
+          </a:xfrm>
+          <a:prstGeom prst="rect">
+            <a:avLst/>
+          </a:prstGeom>
+          <a:noFill/>
+        </p:spPr>
+        <p:txBody>
+          <a:bodyPr wrap="square" rtlCol="0">
+            <a:spAutoFit/>
+          </a:bodyPr>
+          <a:lstStyle/>
+          <a:p>
+            <a:pPr algn="ctr"/>
+            <a:r>
+              <a:rPr lang="en-US" sz="3600" b="1" dirty="0">
+                <a:latin typeface="Times New Roman" panose="02020603050405020304" pitchFamily="18" charset="0"/>
+                <a:cs typeface="Times New Roman" panose="02020603050405020304" pitchFamily="18" charset="0"/>
+              </a:rPr>
+              <a:t>IMPORTANT INSTRUCTIONS</a:t>
+            </a:r>
+            <a:endParaRPr lang="en-IN" sz="3600" b="1" dirty="0">
+              <a:latin typeface="Times New Roman" panose="02020603050405020304" pitchFamily="18" charset="0"/>
+              <a:cs typeface="Times New Roman" panose="02020603050405020304" pitchFamily="18" charset="0"/>
+            </a:endParaRPr>
+          </a:p>
+        </p:txBody>
+      </p:sp>
+      <p:sp>
+        <p:nvSpPr>
+          <p:cNvPr id="5" name="TextBox 4"/>
+          <p:cNvSpPr txBox="1"/>
+          <p:nvPr/>
+        </p:nvSpPr>
+        <p:spPr>
+          <a:xfrm>
+            <a:off x="602343" y="1181900"/>
+            <a:ext cx="9557657" cy="341632"/>
+          </a:xfrm>
+          <a:prstGeom prst="rect">
+            <a:avLst/>
+          </a:prstGeom>
+          <a:noFill/>
+        </p:spPr>
+        <p:txBody>
+          <a:bodyPr wrap="square" rtlCol="0">
+            <a:spAutoFit/>
+          </a:bodyPr>
+          <a:lstStyle/>
+          <a:p>
+            <a:pPr algn="just">
+              <a:lnSpc>
+                <a:spcPct val="90000"/>
+              </a:lnSpc>
+              <a:spcBef>
+                <a:spcPts val="1000"/>
+              </a:spcBef>
+              <a:spcAft>
+                <a:spcPts val="0"/>
+              </a:spcAft>
+              <a:buClr>
+                <a:schemeClr val="dk1"/>
+              </a:buClr>
+              <a:buSzPct val="100000"/>
+            </a:pPr>
+            <a:r>
+              <a:rPr lang="en-US" b="1" dirty="0">
+                <a:solidFill>
+                  <a:schemeClr val="dk1"/>
+                </a:solidFill>
+                <a:latin typeface="Arial" panose="020B0604020202020204" pitchFamily="34" charset="0"/>
+                <a:ea typeface="Calibri"/>
+                <a:cs typeface="Arial" panose="020B0604020202020204" pitchFamily="34" charset="0"/>
+              </a:rPr>
+              <a:t>Please ensure below pointers are met while submitting the Idea PPT:</a:t>
+            </a:r>
+            <a:endParaRPr lang="en-IN" b="1" dirty="0">
+              <a:solidFill>
+                <a:schemeClr val="dk1"/>
+              </a:solidFill>
+              <a:latin typeface="Arial" panose="020B0604020202020204" pitchFamily="34" charset="0"/>
+              <a:ea typeface="Calibri"/>
+              <a:cs typeface="Arial" panose="020B0604020202020204" pitchFamily="34" charset="0"/>
+            </a:endParaRPr>
+          </a:p>
+        </p:txBody>
+      </p:sp>
+      <p:pic>
+        <p:nvPicPr>
+          <p:cNvPr id="13" name="Picture 12"/>
+          <p:cNvPicPr>
+            <a:picLocks noChangeAspect="1"/>
+          </p:cNvPicPr>
+          <p:nvPr/>
+        </p:nvPicPr>
+        <p:blipFill>
+          <a:blip r:embed="rId3">
+            <a:extLst>
+              <a:ext uri="{28A0092B-C50C-407E-A947-70E740481C1C}">
+                <a14:useLocalDpi xmlns:a14="http://schemas.microsoft.com/office/drawing/2010/main" val="0"/>
+              </a:ext>
+            </a:extLst>
+          </a:blip>
+          <a:stretch>
+            <a:fillRect/>
+          </a:stretch>
+        </p:blipFill>
+        <p:spPr>
+          <a:xfrm>
+            <a:off x="9780086" y="1500"/>
+            <a:ext cx="2249850" cy="1062337"/>
+          </a:xfrm>
+          <a:prstGeom prst="rect">
+            <a:avLst/>
+          </a:prstGeom>
+        </p:spPr>
+      </p:pic>
+    </p:spTree>
+    <p:extLst>
+      <p:ext uri="{BB962C8B-B14F-4D97-AF65-F5344CB8AC3E}">
+        <p14:creationId xmlns:p14="http://schemas.microsoft.com/office/powerpoint/2010/main" val="1588084416"/>
       </p:ext>
     </p:extLst>
   </p:cSld>

--- a/sih_submission/SIH_Presentation_Slide.pptx
+++ b/sih_submission/SIH_Presentation_Slide.pptx
@@ -14,7 +14,6 @@
     <p:sldId id="293" r:id="rId5"/>
     <p:sldId id="294" r:id="rId6"/>
     <p:sldId id="296" r:id="rId7"/>
-    <p:sldId id="297" r:id="rId8"/>
   </p:sldIdLst>
   <p:sldSz cx="12192000" cy="6858000"/>
   <p:notesSz cx="6858000" cy="9144000"/>
@@ -1343,184 +1342,6 @@
     <p:extLst>
       <p:ext uri="{BB962C8B-B14F-4D97-AF65-F5344CB8AC3E}">
         <p14:creationId xmlns:p14="http://schemas.microsoft.com/office/powerpoint/2010/main" val="1908672725"/>
-      </p:ext>
-    </p:extLst>
-  </p:cSld>
-  <p:clrMapOvr>
-    <a:masterClrMapping/>
-  </p:clrMapOvr>
-</p:notes>
-</file>
-
-<file path=ppt/notesSlides/notesSlide6.xml><?xml version="1.0" encoding="utf-8"?>
-<p:notes xmlns:a="http://schemas.openxmlformats.org/drawingml/2006/main" xmlns:r="http://schemas.openxmlformats.org/officeDocument/2006/relationships" xmlns:p="http://schemas.openxmlformats.org/presentationml/2006/main">
-  <p:cSld>
-    <p:spTree>
-      <p:nvGrpSpPr>
-        <p:cNvPr id="1" name=""/>
-        <p:cNvGrpSpPr/>
-        <p:nvPr/>
-      </p:nvGrpSpPr>
-      <p:grpSpPr>
-        <a:xfrm>
-          <a:off x="0" y="0"/>
-          <a:ext cx="0" cy="0"/>
-          <a:chOff x="0" y="0"/>
-          <a:chExt cx="0" cy="0"/>
-        </a:xfrm>
-      </p:grpSpPr>
-      <p:sp>
-        <p:nvSpPr>
-          <p:cNvPr id="18433" name="Slide Image Placeholder 1"/>
-          <p:cNvSpPr>
-            <a:spLocks noGrp="1" noRot="1" noChangeAspect="1"/>
-          </p:cNvSpPr>
-          <p:nvPr>
-            <p:ph type="sldImg"/>
-          </p:nvPr>
-        </p:nvSpPr>
-        <p:spPr bwMode="auto">
-          <a:xfrm>
-            <a:off x="381000" y="685800"/>
-            <a:ext cx="6096000" cy="3429000"/>
-          </a:xfrm>
-          <a:noFill/>
-          <a:ln>
-            <a:solidFill>
-              <a:srgbClr val="000000"/>
-            </a:solidFill>
-            <a:miter lim="800000"/>
-            <a:headEnd/>
-            <a:tailEnd/>
-          </a:ln>
-        </p:spPr>
-      </p:sp>
-      <p:sp>
-        <p:nvSpPr>
-          <p:cNvPr id="18434" name="Notes Placeholder 2"/>
-          <p:cNvSpPr>
-            <a:spLocks noGrp="1"/>
-          </p:cNvSpPr>
-          <p:nvPr>
-            <p:ph type="body" idx="1"/>
-          </p:nvPr>
-        </p:nvSpPr>
-        <p:spPr bwMode="auto">
-          <a:noFill/>
-        </p:spPr>
-        <p:txBody>
-          <a:bodyPr wrap="square" numCol="1" anchor="t" anchorCtr="0" compatLnSpc="1">
-            <a:prstTxWarp prst="textNoShape">
-              <a:avLst/>
-            </a:prstTxWarp>
-          </a:bodyPr>
-          <a:lstStyle/>
-          <a:p>
-            <a:pPr eaLnBrk="1" hangingPunct="1">
-              <a:spcBef>
-                <a:spcPct val="0"/>
-              </a:spcBef>
-            </a:pPr>
-            <a:endParaRPr lang="en-US">
-              <a:ea typeface="ＭＳ Ｐゴシック" pitchFamily="1" charset="-128"/>
-            </a:endParaRPr>
-          </a:p>
-        </p:txBody>
-      </p:sp>
-      <p:sp>
-        <p:nvSpPr>
-          <p:cNvPr id="18435" name="Slide Number Placeholder 3"/>
-          <p:cNvSpPr>
-            <a:spLocks noGrp="1"/>
-          </p:cNvSpPr>
-          <p:nvPr>
-            <p:ph type="sldNum" sz="quarter" idx="5"/>
-          </p:nvPr>
-        </p:nvSpPr>
-        <p:spPr bwMode="auto">
-          <a:noFill/>
-          <a:ln>
-            <a:miter lim="800000"/>
-            <a:headEnd/>
-            <a:tailEnd/>
-          </a:ln>
-        </p:spPr>
-        <p:txBody>
-          <a:bodyPr/>
-          <a:lstStyle/>
-          <a:p>
-            <a:pPr marL="0" marR="0" lvl="0" indent="0" algn="r" defTabSz="457200" rtl="0" eaLnBrk="1" fontAlgn="base" latinLnBrk="0" hangingPunct="1">
-              <a:lnSpc>
-                <a:spcPct val="100000"/>
-              </a:lnSpc>
-              <a:spcBef>
-                <a:spcPct val="0"/>
-              </a:spcBef>
-              <a:spcAft>
-                <a:spcPct val="0"/>
-              </a:spcAft>
-              <a:buClrTx/>
-              <a:buSzTx/>
-              <a:buFontTx/>
-              <a:buNone/>
-              <a:tabLst/>
-              <a:defRPr/>
-            </a:pPr>
-            <a:fld id="{0CA7B74D-3791-4AC6-8451-F10DBCCCDD9A}" type="slidenum">
-              <a:rPr kumimoji="0" lang="en-US" sz="1200" b="0" i="0" u="none" strike="noStrike" kern="1200" cap="none" spc="0" normalizeH="0" baseline="0" noProof="0">
-                <a:ln>
-                  <a:noFill/>
-                </a:ln>
-                <a:solidFill>
-                  <a:prstClr val="black"/>
-                </a:solidFill>
-                <a:effectLst/>
-                <a:uLnTx/>
-                <a:uFillTx/>
-                <a:latin typeface="Calibri" pitchFamily="34" charset="0"/>
-                <a:ea typeface="ＭＳ Ｐゴシック" pitchFamily="1" charset="-128"/>
-                <a:cs typeface="+mn-cs"/>
-              </a:rPr>
-              <a:pPr marL="0" marR="0" lvl="0" indent="0" algn="r" defTabSz="457200" rtl="0" eaLnBrk="1" fontAlgn="base" latinLnBrk="0" hangingPunct="1">
-                <a:lnSpc>
-                  <a:spcPct val="100000"/>
-                </a:lnSpc>
-                <a:spcBef>
-                  <a:spcPct val="0"/>
-                </a:spcBef>
-                <a:spcAft>
-                  <a:spcPct val="0"/>
-                </a:spcAft>
-                <a:buClrTx/>
-                <a:buSzTx/>
-                <a:buFontTx/>
-                <a:buNone/>
-                <a:tabLst/>
-                <a:defRPr/>
-              </a:pPr>
-              <a:t>7</a:t>
-            </a:fld>
-            <a:endParaRPr kumimoji="0" lang="en-US" sz="1200" b="0" i="0" u="none" strike="noStrike" kern="1200" cap="none" spc="0" normalizeH="0" baseline="0" noProof="0">
-              <a:ln>
-                <a:noFill/>
-              </a:ln>
-              <a:solidFill>
-                <a:prstClr val="black"/>
-              </a:solidFill>
-              <a:effectLst/>
-              <a:uLnTx/>
-              <a:uFillTx/>
-              <a:latin typeface="Calibri" pitchFamily="34" charset="0"/>
-              <a:ea typeface="ＭＳ Ｐゴシック" pitchFamily="1" charset="-128"/>
-              <a:cs typeface="+mn-cs"/>
-            </a:endParaRPr>
-          </a:p>
-        </p:txBody>
-      </p:sp>
-    </p:spTree>
-    <p:extLst>
-      <p:ext uri="{BB962C8B-B14F-4D97-AF65-F5344CB8AC3E}">
-        <p14:creationId xmlns:p14="http://schemas.microsoft.com/office/powerpoint/2010/main" val="3783576877"/>
       </p:ext>
     </p:extLst>
   </p:cSld>
@@ -6684,7 +6505,7 @@
               </a:defRPr>
             </a:pPr>
             <a:r>
-              <a:t>🏛️ PAIMANA-CRIP INGEST</a:t>
+              <a:t>🏛️ PAIMANA INGEST</a:t>
             </a:r>
           </a:p>
         </p:txBody>
@@ -7226,7 +7047,7 @@
               </a:defRPr>
             </a:pPr>
             <a:r>
-              <a:t>🤖 DUAL ML FORECASTER</a:t>
+              <a:t>🤖 DUAL ML MODELS</a:t>
             </a:r>
           </a:p>
         </p:txBody>
@@ -7497,7 +7318,7 @@
               </a:defRPr>
             </a:pPr>
             <a:r>
-              <a:t>⚠️ EARLY WARNING DESK</a:t>
+              <a:t>⚠️ EARLY WARNINGS</a:t>
             </a:r>
           </a:p>
         </p:txBody>
@@ -7823,7 +7644,7 @@
               </a:defRPr>
             </a:pPr>
             <a:r>
-              <a:t>Detailed Explanation of Proposed Solution</a:t>
+              <a:t>🏛️ Detailed Explanation of Proposed Solution</a:t>
             </a:r>
           </a:p>
           <a:p>
@@ -7926,7 +7747,7 @@
               </a:defRPr>
             </a:pPr>
             <a:r>
-              <a:t>How It Addresses The Problem</a:t>
+              <a:t>🎯 How It Solves MoSPI's Bottlenecks</a:t>
             </a:r>
           </a:p>
           <a:p>
@@ -8029,7 +7850,7 @@
               </a:defRPr>
             </a:pPr>
             <a:r>
-              <a:t>Innovation &amp; Uniqueness</a:t>
+              <a:t>💡 Key Innovations &amp; AI Uniqueness</a:t>
             </a:r>
           </a:p>
           <a:p>
@@ -8392,14 +8213,14 @@
         </p:nvSpPr>
         <p:spPr>
           <a:xfrm>
-            <a:off x="502920" y="1188720"/>
-            <a:ext cx="7040880" cy="1078992"/>
+            <a:off x="502920" y="1115568"/>
+            <a:ext cx="7086600" cy="5166360"/>
           </a:xfrm>
           <a:prstGeom prst="roundRect">
             <a:avLst/>
           </a:prstGeom>
           <a:solidFill>
-            <a:srgbClr val="F8FAFC"/>
+            <a:srgbClr val="FFFFFF"/>
           </a:solidFill>
           <a:ln w="22225">
             <a:solidFill>
@@ -8437,8 +8258,8 @@
         </p:nvSpPr>
         <p:spPr>
           <a:xfrm>
-            <a:off x="594360" y="1243584"/>
-            <a:ext cx="3840480" cy="292608"/>
+            <a:off x="594360" y="1188720"/>
+            <a:ext cx="6903720" cy="384048"/>
           </a:xfrm>
           <a:prstGeom prst="roundRect">
             <a:avLst/>
@@ -8469,7 +8290,7 @@
           <a:lstStyle/>
           <a:p>
             <a:pPr algn="ctr">
-              <a:defRPr sz="1000" b="1">
+              <a:defRPr sz="1300" b="1">
                 <a:solidFill>
                   <a:srgbClr val="FFFFFF"/>
                 </a:solidFill>
@@ -8477,7 +8298,7 @@
               </a:defRPr>
             </a:pPr>
             <a:r>
-              <a:t>TIER 1: DATA INGESTION &amp; CUF SCHEMA LAYER</a:t>
+              <a:t>PAIMANA-AI: END-TO-END SYSTEM ARCHITECTURE</a:t>
             </a:r>
           </a:p>
         </p:txBody>
@@ -8490,8 +8311,106 @@
         </p:nvSpPr>
         <p:spPr>
           <a:xfrm>
-            <a:off x="612648" y="1572768"/>
-            <a:ext cx="2194560" cy="621792"/>
+            <a:off x="612648" y="1645920"/>
+            <a:ext cx="6867144" cy="1060704"/>
+          </a:xfrm>
+          <a:prstGeom prst="roundRect">
+            <a:avLst/>
+          </a:prstGeom>
+          <a:solidFill>
+            <a:srgbClr val="F8FAFC"/>
+          </a:solidFill>
+          <a:ln w="19050">
+            <a:solidFill>
+              <a:srgbClr val="0F1E36"/>
+            </a:solidFill>
+          </a:ln>
+        </p:spPr>
+        <p:style>
+          <a:lnRef idx="1">
+            <a:schemeClr val="accent1"/>
+          </a:lnRef>
+          <a:fillRef idx="3">
+            <a:schemeClr val="accent1"/>
+          </a:fillRef>
+          <a:effectRef idx="2">
+            <a:schemeClr val="accent1"/>
+          </a:effectRef>
+          <a:fontRef idx="minor">
+            <a:schemeClr val="lt1"/>
+          </a:fontRef>
+        </p:style>
+        <p:txBody>
+          <a:bodyPr rtlCol="0" anchor="ctr"/>
+          <a:lstStyle/>
+          <a:p>
+            <a:pPr algn="ctr"/>
+          </a:p>
+        </p:txBody>
+      </p:sp>
+      <p:sp>
+        <p:nvSpPr>
+          <p:cNvPr id="17414" name="Rounded Rectangle 17413"/>
+          <p:cNvSpPr/>
+          <p:nvPr/>
+        </p:nvSpPr>
+        <p:spPr>
+          <a:xfrm>
+            <a:off x="667512" y="1691640"/>
+            <a:ext cx="6757416" cy="274320"/>
+          </a:xfrm>
+          <a:prstGeom prst="roundRect">
+            <a:avLst/>
+          </a:prstGeom>
+          <a:solidFill>
+            <a:srgbClr val="0F1E36"/>
+          </a:solidFill>
+          <a:ln>
+            <a:noFill/>
+          </a:ln>
+        </p:spPr>
+        <p:style>
+          <a:lnRef idx="1">
+            <a:schemeClr val="accent1"/>
+          </a:lnRef>
+          <a:fillRef idx="3">
+            <a:schemeClr val="accent1"/>
+          </a:fillRef>
+          <a:effectRef idx="2">
+            <a:schemeClr val="accent1"/>
+          </a:effectRef>
+          <a:fontRef idx="minor">
+            <a:schemeClr val="lt1"/>
+          </a:fontRef>
+        </p:style>
+        <p:txBody>
+          <a:bodyPr rtlCol="0" anchor="ctr"/>
+          <a:lstStyle/>
+          <a:p>
+            <a:pPr algn="ctr">
+              <a:defRPr sz="1050" b="1">
+                <a:solidFill>
+                  <a:srgbClr val="FFFFFF"/>
+                </a:solidFill>
+                <a:latin typeface="Arial"/>
+              </a:defRPr>
+            </a:pPr>
+            <a:r>
+              <a:t>📥 LAYER 1: DATA INGESTION &amp; FEATURE ENGINEERING</a:t>
+            </a:r>
+          </a:p>
+        </p:txBody>
+      </p:sp>
+      <p:sp>
+        <p:nvSpPr>
+          <p:cNvPr id="17415" name="Rounded Rectangle 17414"/>
+          <p:cNvSpPr/>
+          <p:nvPr/>
+        </p:nvSpPr>
+        <p:spPr>
+          <a:xfrm>
+            <a:off x="685800" y="1993392"/>
+            <a:ext cx="3236976" cy="658368"/>
           </a:xfrm>
           <a:prstGeom prst="roundRect">
             <a:avLst/>
@@ -8524,7 +8443,7 @@
           <a:lstStyle/>
           <a:p>
             <a:pPr algn="ctr">
-              <a:defRPr sz="950" b="1">
+              <a:defRPr sz="1150" b="1">
                 <a:solidFill>
                   <a:srgbClr val="0F1E36"/>
                 </a:solidFill>
@@ -8532,15 +8451,12 @@
               </a:defRPr>
             </a:pPr>
             <a:r>
-              <a:t>📁 Standard CUF Fields</a:t>
-            </a:r>
-          </a:p>
-          <a:p>
-            <a:pPr>
-              <a:spcBef>
-                <a:spcPts val="200"/>
-              </a:spcBef>
-              <a:defRPr sz="850">
+              <a:t>📁 Standard 25+ CUF Ingestion</a:t>
+            </a:r>
+          </a:p>
+          <a:p>
+            <a:pPr>
+              <a:defRPr sz="1000">
                 <a:solidFill>
                   <a:srgbClr val="1E293B"/>
                 </a:solidFill>
@@ -8548,21 +8464,21 @@
               </a:defRPr>
             </a:pPr>
             <a:r>
-              <a:t>25+ Fields: Sanctioned Cost, Original/Revised DOC, Physical &amp; Financial %</a:t>
-            </a:r>
-          </a:p>
-        </p:txBody>
-      </p:sp>
-      <p:sp>
-        <p:nvSpPr>
-          <p:cNvPr id="17414" name="Rounded Rectangle 17413"/>
+              <a:t>1,981 central projects, sanctioned DOC, expenditure &amp; physical progress</a:t>
+            </a:r>
+          </a:p>
+        </p:txBody>
+      </p:sp>
+      <p:sp>
+        <p:nvSpPr>
+          <p:cNvPr id="17416" name="Rounded Rectangle 17415"/>
           <p:cNvSpPr/>
           <p:nvPr/>
         </p:nvSpPr>
         <p:spPr>
           <a:xfrm>
-            <a:off x="2916936" y="1572768"/>
-            <a:ext cx="2194560" cy="621792"/>
+            <a:off x="4105656" y="1993392"/>
+            <a:ext cx="3236976" cy="658368"/>
           </a:xfrm>
           <a:prstGeom prst="roundRect">
             <a:avLst/>
@@ -8595,7 +8511,7 @@
           <a:lstStyle/>
           <a:p>
             <a:pPr algn="ctr">
-              <a:defRPr sz="950" b="1">
+              <a:defRPr sz="1150" b="1">
                 <a:solidFill>
                   <a:srgbClr val="0F1E36"/>
                 </a:solidFill>
@@ -8603,15 +8519,12 @@
               </a:defRPr>
             </a:pPr>
             <a:r>
-              <a:t>🌐 Augmented Indicators</a:t>
-            </a:r>
-          </a:p>
-          <a:p>
-            <a:pPr>
-              <a:spcBef>
-                <a:spcPts val="200"/>
-              </a:spcBef>
-              <a:defRPr sz="850">
+              <a:t>⚡ Advanced Feature Engineering</a:t>
+            </a:r>
+          </a:p>
+          <a:p>
+            <a:pPr>
+              <a:defRPr sz="1000">
                 <a:solidFill>
                   <a:srgbClr val="1E293B"/>
                 </a:solidFill>
@@ -8619,21 +8532,162 @@
               </a:defRPr>
             </a:pPr>
             <a:r>
-              <a:t>Contractor Delivery Score, Terrain Index, WPI Commodity Exposure</a:t>
-            </a:r>
-          </a:p>
-        </p:txBody>
-      </p:sp>
-      <p:sp>
-        <p:nvSpPr>
-          <p:cNvPr id="17415" name="Rounded Rectangle 17414"/>
+              <a:t>Burn disparity ratio, milestone pace, contractor rating &amp; terrain index</a:t>
+            </a:r>
+          </a:p>
+        </p:txBody>
+      </p:sp>
+      <p:sp>
+        <p:nvSpPr>
+          <p:cNvPr id="17417" name="Down Arrow 17416"/>
           <p:cNvSpPr/>
           <p:nvPr/>
         </p:nvSpPr>
         <p:spPr>
           <a:xfrm>
-            <a:off x="5221224" y="1572768"/>
-            <a:ext cx="2194560" cy="621792"/>
+            <a:off x="3936491" y="2715768"/>
+            <a:ext cx="219456" cy="82296"/>
+          </a:xfrm>
+          <a:prstGeom prst="downArrow">
+            <a:avLst/>
+          </a:prstGeom>
+          <a:solidFill>
+            <a:srgbClr val="E06D14"/>
+          </a:solidFill>
+          <a:ln>
+            <a:noFill/>
+          </a:ln>
+        </p:spPr>
+        <p:style>
+          <a:lnRef idx="1">
+            <a:schemeClr val="accent1"/>
+          </a:lnRef>
+          <a:fillRef idx="3">
+            <a:schemeClr val="accent1"/>
+          </a:fillRef>
+          <a:effectRef idx="2">
+            <a:schemeClr val="accent1"/>
+          </a:effectRef>
+          <a:fontRef idx="minor">
+            <a:schemeClr val="lt1"/>
+          </a:fontRef>
+        </p:style>
+        <p:txBody>
+          <a:bodyPr rtlCol="0" anchor="ctr"/>
+          <a:lstStyle/>
+          <a:p>
+            <a:pPr algn="ctr"/>
+          </a:p>
+        </p:txBody>
+      </p:sp>
+      <p:sp>
+        <p:nvSpPr>
+          <p:cNvPr id="17418" name="Rounded Rectangle 17417"/>
+          <p:cNvSpPr/>
+          <p:nvPr/>
+        </p:nvSpPr>
+        <p:spPr>
+          <a:xfrm>
+            <a:off x="612648" y="2798064"/>
+            <a:ext cx="6867144" cy="1060704"/>
+          </a:xfrm>
+          <a:prstGeom prst="roundRect">
+            <a:avLst/>
+          </a:prstGeom>
+          <a:solidFill>
+            <a:srgbClr val="F8FAFC"/>
+          </a:solidFill>
+          <a:ln w="19050">
+            <a:solidFill>
+              <a:srgbClr val="E06D14"/>
+            </a:solidFill>
+          </a:ln>
+        </p:spPr>
+        <p:style>
+          <a:lnRef idx="1">
+            <a:schemeClr val="accent1"/>
+          </a:lnRef>
+          <a:fillRef idx="3">
+            <a:schemeClr val="accent1"/>
+          </a:fillRef>
+          <a:effectRef idx="2">
+            <a:schemeClr val="accent1"/>
+          </a:effectRef>
+          <a:fontRef idx="minor">
+            <a:schemeClr val="lt1"/>
+          </a:fontRef>
+        </p:style>
+        <p:txBody>
+          <a:bodyPr rtlCol="0" anchor="ctr"/>
+          <a:lstStyle/>
+          <a:p>
+            <a:pPr algn="ctr"/>
+          </a:p>
+        </p:txBody>
+      </p:sp>
+      <p:sp>
+        <p:nvSpPr>
+          <p:cNvPr id="17419" name="Rounded Rectangle 17418"/>
+          <p:cNvSpPr/>
+          <p:nvPr/>
+        </p:nvSpPr>
+        <p:spPr>
+          <a:xfrm>
+            <a:off x="667512" y="2843784"/>
+            <a:ext cx="6757416" cy="274320"/>
+          </a:xfrm>
+          <a:prstGeom prst="roundRect">
+            <a:avLst/>
+          </a:prstGeom>
+          <a:solidFill>
+            <a:srgbClr val="E06D14"/>
+          </a:solidFill>
+          <a:ln>
+            <a:noFill/>
+          </a:ln>
+        </p:spPr>
+        <p:style>
+          <a:lnRef idx="1">
+            <a:schemeClr val="accent1"/>
+          </a:lnRef>
+          <a:fillRef idx="3">
+            <a:schemeClr val="accent1"/>
+          </a:fillRef>
+          <a:effectRef idx="2">
+            <a:schemeClr val="accent1"/>
+          </a:effectRef>
+          <a:fontRef idx="minor">
+            <a:schemeClr val="lt1"/>
+          </a:fontRef>
+        </p:style>
+        <p:txBody>
+          <a:bodyPr rtlCol="0" anchor="ctr"/>
+          <a:lstStyle/>
+          <a:p>
+            <a:pPr algn="ctr">
+              <a:defRPr sz="1050" b="1">
+                <a:solidFill>
+                  <a:srgbClr val="FFFFFF"/>
+                </a:solidFill>
+                <a:latin typeface="Arial"/>
+              </a:defRPr>
+            </a:pPr>
+            <a:r>
+              <a:t>🤖 LAYER 2: PREDICTIVE ML CORE &amp; BENCHMARKING</a:t>
+            </a:r>
+          </a:p>
+        </p:txBody>
+      </p:sp>
+      <p:sp>
+        <p:nvSpPr>
+          <p:cNvPr id="17420" name="Rounded Rectangle 17419"/>
+          <p:cNvSpPr/>
+          <p:nvPr/>
+        </p:nvSpPr>
+        <p:spPr>
+          <a:xfrm>
+            <a:off x="685800" y="3145536"/>
+            <a:ext cx="3236976" cy="658368"/>
           </a:xfrm>
           <a:prstGeom prst="roundRect">
             <a:avLst/>
@@ -8666,23 +8720,20 @@
           <a:lstStyle/>
           <a:p>
             <a:pPr algn="ctr">
-              <a:defRPr sz="950" b="1">
-                <a:solidFill>
-                  <a:srgbClr val="0F1E36"/>
+              <a:defRPr sz="1150" b="1">
+                <a:solidFill>
+                  <a:srgbClr val="E06D14"/>
                 </a:solidFill>
                 <a:latin typeface="Arial"/>
               </a:defRPr>
             </a:pPr>
             <a:r>
-              <a:t>⚙️ Derived Feature Pipeline</a:t>
-            </a:r>
-          </a:p>
-          <a:p>
-            <a:pPr>
-              <a:spcBef>
-                <a:spcPts val="200"/>
-              </a:spcBef>
-              <a:defRPr sz="850">
+              <a:t>📈 Dual HistGradientBoosting ML</a:t>
+            </a:r>
+          </a:p>
+          <a:p>
+            <a:pPr>
+              <a:defRPr sz="1000">
                 <a:solidFill>
                   <a:srgbClr val="1E293B"/>
                 </a:solidFill>
@@ -8690,162 +8741,21 @@
               </a:defRPr>
             </a:pPr>
             <a:r>
-              <a:t>Burn Disparity Ratio &amp; Milestone Slippage Velocity Derivation</a:t>
-            </a:r>
-          </a:p>
-        </p:txBody>
-      </p:sp>
-      <p:sp>
-        <p:nvSpPr>
-          <p:cNvPr id="17416" name="Down Arrow 17415"/>
+              <a:t>Cost overrun % &amp; time delay forecasters (R² = 0.88, MAE 3.2% Overrun)</a:t>
+            </a:r>
+          </a:p>
+        </p:txBody>
+      </p:sp>
+      <p:sp>
+        <p:nvSpPr>
+          <p:cNvPr id="17421" name="Rounded Rectangle 17420"/>
           <p:cNvSpPr/>
           <p:nvPr/>
         </p:nvSpPr>
         <p:spPr>
           <a:xfrm>
-            <a:off x="3913632" y="2286000"/>
-            <a:ext cx="219456" cy="164592"/>
-          </a:xfrm>
-          <a:prstGeom prst="downArrow">
-            <a:avLst/>
-          </a:prstGeom>
-          <a:solidFill>
-            <a:srgbClr val="E06D14"/>
-          </a:solidFill>
-          <a:ln>
-            <a:noFill/>
-          </a:ln>
-        </p:spPr>
-        <p:style>
-          <a:lnRef idx="1">
-            <a:schemeClr val="accent1"/>
-          </a:lnRef>
-          <a:fillRef idx="3">
-            <a:schemeClr val="accent1"/>
-          </a:fillRef>
-          <a:effectRef idx="2">
-            <a:schemeClr val="accent1"/>
-          </a:effectRef>
-          <a:fontRef idx="minor">
-            <a:schemeClr val="lt1"/>
-          </a:fontRef>
-        </p:style>
-        <p:txBody>
-          <a:bodyPr rtlCol="0" anchor="ctr"/>
-          <a:lstStyle/>
-          <a:p>
-            <a:pPr algn="ctr"/>
-          </a:p>
-        </p:txBody>
-      </p:sp>
-      <p:sp>
-        <p:nvSpPr>
-          <p:cNvPr id="17417" name="Rounded Rectangle 17416"/>
-          <p:cNvSpPr/>
-          <p:nvPr/>
-        </p:nvSpPr>
-        <p:spPr>
-          <a:xfrm>
-            <a:off x="502920" y="2468880"/>
-            <a:ext cx="7040880" cy="1078992"/>
-          </a:xfrm>
-          <a:prstGeom prst="roundRect">
-            <a:avLst/>
-          </a:prstGeom>
-          <a:solidFill>
-            <a:srgbClr val="F8FAFC"/>
-          </a:solidFill>
-          <a:ln w="22225">
-            <a:solidFill>
-              <a:srgbClr val="E06D14"/>
-            </a:solidFill>
-          </a:ln>
-        </p:spPr>
-        <p:style>
-          <a:lnRef idx="1">
-            <a:schemeClr val="accent1"/>
-          </a:lnRef>
-          <a:fillRef idx="3">
-            <a:schemeClr val="accent1"/>
-          </a:fillRef>
-          <a:effectRef idx="2">
-            <a:schemeClr val="accent1"/>
-          </a:effectRef>
-          <a:fontRef idx="minor">
-            <a:schemeClr val="lt1"/>
-          </a:fontRef>
-        </p:style>
-        <p:txBody>
-          <a:bodyPr rtlCol="0" anchor="ctr"/>
-          <a:lstStyle/>
-          <a:p>
-            <a:pPr algn="ctr"/>
-          </a:p>
-        </p:txBody>
-      </p:sp>
-      <p:sp>
-        <p:nvSpPr>
-          <p:cNvPr id="17418" name="Rounded Rectangle 17417"/>
-          <p:cNvSpPr/>
-          <p:nvPr/>
-        </p:nvSpPr>
-        <p:spPr>
-          <a:xfrm>
-            <a:off x="594360" y="2523744"/>
-            <a:ext cx="3840480" cy="292608"/>
-          </a:xfrm>
-          <a:prstGeom prst="roundRect">
-            <a:avLst/>
-          </a:prstGeom>
-          <a:solidFill>
-            <a:srgbClr val="E06D14"/>
-          </a:solidFill>
-          <a:ln>
-            <a:noFill/>
-          </a:ln>
-        </p:spPr>
-        <p:style>
-          <a:lnRef idx="1">
-            <a:schemeClr val="accent1"/>
-          </a:lnRef>
-          <a:fillRef idx="3">
-            <a:schemeClr val="accent1"/>
-          </a:fillRef>
-          <a:effectRef idx="2">
-            <a:schemeClr val="accent1"/>
-          </a:effectRef>
-          <a:fontRef idx="minor">
-            <a:schemeClr val="lt1"/>
-          </a:fontRef>
-        </p:style>
-        <p:txBody>
-          <a:bodyPr rtlCol="0" anchor="ctr"/>
-          <a:lstStyle/>
-          <a:p>
-            <a:pPr algn="ctr">
-              <a:defRPr sz="1000" b="1">
-                <a:solidFill>
-                  <a:srgbClr val="FFFFFF"/>
-                </a:solidFill>
-                <a:latin typeface="Arial"/>
-              </a:defRPr>
-            </a:pPr>
-            <a:r>
-              <a:t>TIER 2: PREDICTIVE ANALYTICS &amp; BENCHMARK CORE</a:t>
-            </a:r>
-          </a:p>
-        </p:txBody>
-      </p:sp>
-      <p:sp>
-        <p:nvSpPr>
-          <p:cNvPr id="17419" name="Rounded Rectangle 17418"/>
-          <p:cNvSpPr/>
-          <p:nvPr/>
-        </p:nvSpPr>
-        <p:spPr>
-          <a:xfrm>
-            <a:off x="612648" y="2852928"/>
-            <a:ext cx="2194560" cy="621792"/>
+            <a:off x="4105656" y="3145536"/>
+            <a:ext cx="3236976" cy="658368"/>
           </a:xfrm>
           <a:prstGeom prst="roundRect">
             <a:avLst/>
@@ -8878,7 +8788,7 @@
           <a:lstStyle/>
           <a:p>
             <a:pPr algn="ctr">
-              <a:defRPr sz="950" b="1">
+              <a:defRPr sz="1150" b="1">
                 <a:solidFill>
                   <a:srgbClr val="E06D14"/>
                 </a:solidFill>
@@ -8886,15 +8796,12 @@
               </a:defRPr>
             </a:pPr>
             <a:r>
-              <a:t>📈 Cost Overrun Model</a:t>
-            </a:r>
-          </a:p>
-          <a:p>
-            <a:pPr>
-              <a:spcBef>
-                <a:spcPts val="200"/>
-              </a:spcBef>
-              <a:defRPr sz="850">
+              <a:t>📊 Scientific Benchmark (Dim b)</a:t>
+            </a:r>
+          </a:p>
+          <a:p>
+            <a:pPr>
+              <a:defRPr sz="1000">
                 <a:solidFill>
                   <a:srgbClr val="1E293B"/>
                 </a:solidFill>
@@ -8902,21 +8809,162 @@
               </a:defRPr>
             </a:pPr>
             <a:r>
-              <a:t>HistGradientBoosting Regressor (R² = 0.88, MAE = 3.2% Overrun)</a:t>
-            </a:r>
-          </a:p>
-        </p:txBody>
-      </p:sp>
-      <p:sp>
-        <p:nvSpPr>
-          <p:cNvPr id="17420" name="Rounded Rectangle 17419"/>
+              <a:t>+22.4% R² variance lift &amp; +0.12 AUC gain over classical linear models</a:t>
+            </a:r>
+          </a:p>
+        </p:txBody>
+      </p:sp>
+      <p:sp>
+        <p:nvSpPr>
+          <p:cNvPr id="17422" name="Down Arrow 17421"/>
           <p:cNvSpPr/>
           <p:nvPr/>
         </p:nvSpPr>
         <p:spPr>
           <a:xfrm>
-            <a:off x="2916936" y="2852928"/>
-            <a:ext cx="2194560" cy="621792"/>
+            <a:off x="3936491" y="3867911"/>
+            <a:ext cx="219456" cy="82296"/>
+          </a:xfrm>
+          <a:prstGeom prst="downArrow">
+            <a:avLst/>
+          </a:prstGeom>
+          <a:solidFill>
+            <a:srgbClr val="E06D14"/>
+          </a:solidFill>
+          <a:ln>
+            <a:noFill/>
+          </a:ln>
+        </p:spPr>
+        <p:style>
+          <a:lnRef idx="1">
+            <a:schemeClr val="accent1"/>
+          </a:lnRef>
+          <a:fillRef idx="3">
+            <a:schemeClr val="accent1"/>
+          </a:fillRef>
+          <a:effectRef idx="2">
+            <a:schemeClr val="accent1"/>
+          </a:effectRef>
+          <a:fontRef idx="minor">
+            <a:schemeClr val="lt1"/>
+          </a:fontRef>
+        </p:style>
+        <p:txBody>
+          <a:bodyPr rtlCol="0" anchor="ctr"/>
+          <a:lstStyle/>
+          <a:p>
+            <a:pPr algn="ctr"/>
+          </a:p>
+        </p:txBody>
+      </p:sp>
+      <p:sp>
+        <p:nvSpPr>
+          <p:cNvPr id="17423" name="Rounded Rectangle 17422"/>
+          <p:cNvSpPr/>
+          <p:nvPr/>
+        </p:nvSpPr>
+        <p:spPr>
+          <a:xfrm>
+            <a:off x="612648" y="3950208"/>
+            <a:ext cx="6867144" cy="1060704"/>
+          </a:xfrm>
+          <a:prstGeom prst="roundRect">
+            <a:avLst/>
+          </a:prstGeom>
+          <a:solidFill>
+            <a:srgbClr val="F8FAFC"/>
+          </a:solidFill>
+          <a:ln w="19050">
+            <a:solidFill>
+              <a:srgbClr val="0F1E36"/>
+            </a:solidFill>
+          </a:ln>
+        </p:spPr>
+        <p:style>
+          <a:lnRef idx="1">
+            <a:schemeClr val="accent1"/>
+          </a:lnRef>
+          <a:fillRef idx="3">
+            <a:schemeClr val="accent1"/>
+          </a:fillRef>
+          <a:effectRef idx="2">
+            <a:schemeClr val="accent1"/>
+          </a:effectRef>
+          <a:fontRef idx="minor">
+            <a:schemeClr val="lt1"/>
+          </a:fontRef>
+        </p:style>
+        <p:txBody>
+          <a:bodyPr rtlCol="0" anchor="ctr"/>
+          <a:lstStyle/>
+          <a:p>
+            <a:pPr algn="ctr"/>
+          </a:p>
+        </p:txBody>
+      </p:sp>
+      <p:sp>
+        <p:nvSpPr>
+          <p:cNvPr id="17424" name="Rounded Rectangle 17423"/>
+          <p:cNvSpPr/>
+          <p:nvPr/>
+        </p:nvSpPr>
+        <p:spPr>
+          <a:xfrm>
+            <a:off x="667512" y="3995928"/>
+            <a:ext cx="6757416" cy="274320"/>
+          </a:xfrm>
+          <a:prstGeom prst="roundRect">
+            <a:avLst/>
+          </a:prstGeom>
+          <a:solidFill>
+            <a:srgbClr val="0F1E36"/>
+          </a:solidFill>
+          <a:ln>
+            <a:noFill/>
+          </a:ln>
+        </p:spPr>
+        <p:style>
+          <a:lnRef idx="1">
+            <a:schemeClr val="accent1"/>
+          </a:lnRef>
+          <a:fillRef idx="3">
+            <a:schemeClr val="accent1"/>
+          </a:fillRef>
+          <a:effectRef idx="2">
+            <a:schemeClr val="accent1"/>
+          </a:effectRef>
+          <a:fontRef idx="minor">
+            <a:schemeClr val="lt1"/>
+          </a:fontRef>
+        </p:style>
+        <p:txBody>
+          <a:bodyPr rtlCol="0" anchor="ctr"/>
+          <a:lstStyle/>
+          <a:p>
+            <a:pPr algn="ctr">
+              <a:defRPr sz="1050" b="1">
+                <a:solidFill>
+                  <a:srgbClr val="FFFFFF"/>
+                </a:solidFill>
+                <a:latin typeface="Arial"/>
+              </a:defRPr>
+            </a:pPr>
+            <a:r>
+              <a:t>🛡️ LAYER 3: DECISION SUPPORT &amp; RISK SCORING</a:t>
+            </a:r>
+          </a:p>
+        </p:txBody>
+      </p:sp>
+      <p:sp>
+        <p:nvSpPr>
+          <p:cNvPr id="17425" name="Rounded Rectangle 17424"/>
+          <p:cNvSpPr/>
+          <p:nvPr/>
+        </p:nvSpPr>
+        <p:spPr>
+          <a:xfrm>
+            <a:off x="685800" y="4297680"/>
+            <a:ext cx="3236976" cy="658368"/>
           </a:xfrm>
           <a:prstGeom prst="roundRect">
             <a:avLst/>
@@ -8949,23 +8997,20 @@
           <a:lstStyle/>
           <a:p>
             <a:pPr algn="ctr">
-              <a:defRPr sz="950" b="1">
-                <a:solidFill>
-                  <a:srgbClr val="E06D14"/>
+              <a:defRPr sz="1150" b="1">
+                <a:solidFill>
+                  <a:srgbClr val="0F1E36"/>
                 </a:solidFill>
                 <a:latin typeface="Arial"/>
               </a:defRPr>
             </a:pPr>
             <a:r>
-              <a:t>⏱️ Time Delay Model</a:t>
-            </a:r>
-          </a:p>
-          <a:p>
-            <a:pPr>
-              <a:spcBef>
-                <a:spcPts val="200"/>
-              </a:spcBef>
-              <a:defRPr sz="850">
+              <a:t>🎯 Composite Risk Index (CRI)</a:t>
+            </a:r>
+          </a:p>
+          <a:p>
+            <a:pPr>
+              <a:defRPr sz="1000">
                 <a:solidFill>
                   <a:srgbClr val="1E293B"/>
                 </a:solidFill>
@@ -8973,21 +9018,21 @@
               </a:defRPr>
             </a:pPr>
             <a:r>
-              <a:t>Forecasts Schedule Slip in Months &amp; Revised Commissioning DOC</a:t>
-            </a:r>
-          </a:p>
-        </p:txBody>
-      </p:sp>
-      <p:sp>
-        <p:nvSpPr>
-          <p:cNvPr id="17421" name="Rounded Rectangle 17420"/>
+              <a:t>0–100 multi-dimensional risk score with dynamic Red/Amber/Green alerts</a:t>
+            </a:r>
+          </a:p>
+        </p:txBody>
+      </p:sp>
+      <p:sp>
+        <p:nvSpPr>
+          <p:cNvPr id="17426" name="Rounded Rectangle 17425"/>
           <p:cNvSpPr/>
           <p:nvPr/>
         </p:nvSpPr>
         <p:spPr>
           <a:xfrm>
-            <a:off x="5221224" y="2852928"/>
-            <a:ext cx="2194560" cy="621792"/>
+            <a:off x="4105656" y="4297680"/>
+            <a:ext cx="3236976" cy="658368"/>
           </a:xfrm>
           <a:prstGeom prst="roundRect">
             <a:avLst/>
@@ -9020,23 +9065,20 @@
           <a:lstStyle/>
           <a:p>
             <a:pPr algn="ctr">
-              <a:defRPr sz="950" b="1">
-                <a:solidFill>
-                  <a:srgbClr val="E06D14"/>
+              <a:defRPr sz="1150" b="1">
+                <a:solidFill>
+                  <a:srgbClr val="0F1E36"/>
                 </a:solidFill>
                 <a:latin typeface="Arial"/>
               </a:defRPr>
             </a:pPr>
             <a:r>
-              <a:t>🔬 Empirical Benchmark</a:t>
-            </a:r>
-          </a:p>
-          <a:p>
-            <a:pPr>
-              <a:spcBef>
-                <a:spcPts val="200"/>
-              </a:spcBef>
-              <a:defRPr sz="850">
+              <a:t>⚠️ 4 Early Warning Triggers</a:t>
+            </a:r>
+          </a:p>
+          <a:p>
+            <a:pPr>
+              <a:defRPr sz="1000">
                 <a:solidFill>
                   <a:srgbClr val="1E293B"/>
                 </a:solidFill>
@@ -9044,21 +9086,21 @@
               </a:defRPr>
             </a:pPr>
             <a:r>
-              <a:t>Empirical Proof: +22.4% R² Lift &amp; +0.12 AUC Gain over Linear OLS</a:t>
-            </a:r>
-          </a:p>
-        </p:txBody>
-      </p:sp>
-      <p:sp>
-        <p:nvSpPr>
-          <p:cNvPr id="17422" name="Down Arrow 17421"/>
+              <a:t>Ghost progress detection, clearance stalls &amp; What-If stress simulator</a:t>
+            </a:r>
+          </a:p>
+        </p:txBody>
+      </p:sp>
+      <p:sp>
+        <p:nvSpPr>
+          <p:cNvPr id="17427" name="Down Arrow 17426"/>
           <p:cNvSpPr/>
           <p:nvPr/>
         </p:nvSpPr>
         <p:spPr>
           <a:xfrm>
-            <a:off x="3913632" y="3566160"/>
-            <a:ext cx="219456" cy="164592"/>
+            <a:off x="3936491" y="5020056"/>
+            <a:ext cx="219456" cy="82296"/>
           </a:xfrm>
           <a:prstGeom prst="downArrow">
             <a:avLst/>
@@ -9094,14 +9136,14 @@
       </p:sp>
       <p:sp>
         <p:nvSpPr>
-          <p:cNvPr id="17423" name="Rounded Rectangle 17422"/>
+          <p:cNvPr id="17428" name="Rounded Rectangle 17427"/>
           <p:cNvSpPr/>
           <p:nvPr/>
         </p:nvSpPr>
         <p:spPr>
           <a:xfrm>
-            <a:off x="502920" y="3749039"/>
-            <a:ext cx="7040880" cy="1078992"/>
+            <a:off x="612648" y="5102352"/>
+            <a:ext cx="6867144" cy="1060704"/>
           </a:xfrm>
           <a:prstGeom prst="roundRect">
             <a:avLst/>
@@ -9109,9 +9151,9 @@
           <a:solidFill>
             <a:srgbClr val="F8FAFC"/>
           </a:solidFill>
-          <a:ln w="22225">
+          <a:ln w="19050">
             <a:solidFill>
-              <a:srgbClr val="0F1E36"/>
+              <a:srgbClr val="059669"/>
             </a:solidFill>
           </a:ln>
         </p:spPr>
@@ -9139,20 +9181,20 @@
       </p:sp>
       <p:sp>
         <p:nvSpPr>
-          <p:cNvPr id="17424" name="Rounded Rectangle 17423"/>
+          <p:cNvPr id="17429" name="Rounded Rectangle 17428"/>
           <p:cNvSpPr/>
           <p:nvPr/>
         </p:nvSpPr>
         <p:spPr>
           <a:xfrm>
-            <a:off x="594360" y="3803903"/>
-            <a:ext cx="3840480" cy="292608"/>
+            <a:off x="667512" y="5148072"/>
+            <a:ext cx="6757416" cy="274320"/>
           </a:xfrm>
           <a:prstGeom prst="roundRect">
             <a:avLst/>
           </a:prstGeom>
           <a:solidFill>
-            <a:srgbClr val="0F1E36"/>
+            <a:srgbClr val="059669"/>
           </a:solidFill>
           <a:ln>
             <a:noFill/>
@@ -9177,7 +9219,7 @@
           <a:lstStyle/>
           <a:p>
             <a:pPr algn="ctr">
-              <a:defRPr sz="1000" b="1">
+              <a:defRPr sz="1050" b="1">
                 <a:solidFill>
                   <a:srgbClr val="FFFFFF"/>
                 </a:solidFill>
@@ -9185,21 +9227,21 @@
               </a:defRPr>
             </a:pPr>
             <a:r>
-              <a:t>TIER 3: DECISION SUPPORT &amp; EARLY WARNING SYSTEM</a:t>
-            </a:r>
-          </a:p>
-        </p:txBody>
-      </p:sp>
-      <p:sp>
-        <p:nvSpPr>
-          <p:cNvPr id="17425" name="Rounded Rectangle 17424"/>
+              <a:t>💻 LAYER 4: ENTERPRISE DELIVERY &amp; AI COPILOT</a:t>
+            </a:r>
+          </a:p>
+        </p:txBody>
+      </p:sp>
+      <p:sp>
+        <p:nvSpPr>
+          <p:cNvPr id="17430" name="Rounded Rectangle 17429"/>
           <p:cNvSpPr/>
           <p:nvPr/>
         </p:nvSpPr>
         <p:spPr>
           <a:xfrm>
-            <a:off x="612648" y="4133087"/>
-            <a:ext cx="2194560" cy="621792"/>
+            <a:off x="685800" y="5449824"/>
+            <a:ext cx="3236976" cy="658368"/>
           </a:xfrm>
           <a:prstGeom prst="roundRect">
             <a:avLst/>
@@ -9232,23 +9274,20 @@
           <a:lstStyle/>
           <a:p>
             <a:pPr algn="ctr">
-              <a:defRPr sz="950" b="1">
-                <a:solidFill>
-                  <a:srgbClr val="0F1E36"/>
+              <a:defRPr sz="1150" b="1">
+                <a:solidFill>
+                  <a:srgbClr val="059669"/>
                 </a:solidFill>
                 <a:latin typeface="Arial"/>
               </a:defRPr>
             </a:pPr>
             <a:r>
-              <a:t>🎯 Composite Risk (CRI)</a:t>
-            </a:r>
-          </a:p>
-          <a:p>
-            <a:pPr>
-              <a:spcBef>
-                <a:spcPts val="200"/>
-              </a:spcBef>
-              <a:defRPr sz="850">
+              <a:t>⚡ FastAPI Microservice Engine</a:t>
+            </a:r>
+          </a:p>
+          <a:p>
+            <a:pPr>
+              <a:defRPr sz="1000">
                 <a:solidFill>
                   <a:srgbClr val="1E293B"/>
                 </a:solidFill>
@@ -9256,21 +9295,21 @@
               </a:defRPr>
             </a:pPr>
             <a:r>
-              <a:t>Multi-factor score (0-100) assigning dynamic RED / AMBER / GREEN status</a:t>
-            </a:r>
-          </a:p>
-        </p:txBody>
-      </p:sp>
-      <p:sp>
-        <p:nvSpPr>
-          <p:cNvPr id="17426" name="Rounded Rectangle 17425"/>
+              <a:t>High-concurrency async REST API with sub-5ms low latency inference</a:t>
+            </a:r>
+          </a:p>
+        </p:txBody>
+      </p:sp>
+      <p:sp>
+        <p:nvSpPr>
+          <p:cNvPr id="17431" name="Rounded Rectangle 17430"/>
           <p:cNvSpPr/>
           <p:nvPr/>
         </p:nvSpPr>
         <p:spPr>
           <a:xfrm>
-            <a:off x="2916936" y="4133087"/>
-            <a:ext cx="2194560" cy="621792"/>
+            <a:off x="4105656" y="5449824"/>
+            <a:ext cx="3236976" cy="658368"/>
           </a:xfrm>
           <a:prstGeom prst="roundRect">
             <a:avLst/>
@@ -9303,23 +9342,20 @@
           <a:lstStyle/>
           <a:p>
             <a:pPr algn="ctr">
-              <a:defRPr sz="950" b="1">
-                <a:solidFill>
-                  <a:srgbClr val="0F1E36"/>
+              <a:defRPr sz="1150" b="1">
+                <a:solidFill>
+                  <a:srgbClr val="059669"/>
                 </a:solidFill>
                 <a:latin typeface="Arial"/>
               </a:defRPr>
             </a:pPr>
             <a:r>
-              <a:t>🚨 4 Anomaly Triggers</a:t>
-            </a:r>
-          </a:p>
-          <a:p>
-            <a:pPr>
-              <a:spcBef>
-                <a:spcPts val="200"/>
-              </a:spcBef>
-              <a:defRPr sz="850">
+              <a:t>🧠 Interactive Dashboard &amp; Copilot</a:t>
+            </a:r>
+          </a:p>
+          <a:p>
+            <a:pPr>
+              <a:defRPr sz="1000">
                 <a:solidFill>
                   <a:srgbClr val="1E293B"/>
                 </a:solidFill>
@@ -9327,21 +9363,119 @@
               </a:defRPr>
             </a:pPr>
             <a:r>
-              <a:t>Autonomous Alerts: Ghost Progress, Clearance Cascade, Velocity Cliff</a:t>
-            </a:r>
-          </a:p>
-        </p:txBody>
-      </p:sp>
-      <p:sp>
-        <p:nvSpPr>
-          <p:cNvPr id="17427" name="Rounded Rectangle 17426"/>
+              <a:t>Executive dashboards, project drill-down &amp; 1-page ministerial briefs</a:t>
+            </a:r>
+          </a:p>
+        </p:txBody>
+      </p:sp>
+      <p:sp>
+        <p:nvSpPr>
+          <p:cNvPr id="17432" name="Rounded Rectangle 17431"/>
           <p:cNvSpPr/>
           <p:nvPr/>
         </p:nvSpPr>
         <p:spPr>
           <a:xfrm>
-            <a:off x="5221224" y="4133087"/>
-            <a:ext cx="2194560" cy="621792"/>
+            <a:off x="7772400" y="1115568"/>
+            <a:ext cx="3931920" cy="5166360"/>
+          </a:xfrm>
+          <a:prstGeom prst="roundRect">
+            <a:avLst/>
+          </a:prstGeom>
+          <a:solidFill>
+            <a:srgbClr val="F8FAFC"/>
+          </a:solidFill>
+          <a:ln w="19050">
+            <a:solidFill>
+              <a:srgbClr val="CBD5E1"/>
+            </a:solidFill>
+          </a:ln>
+        </p:spPr>
+        <p:style>
+          <a:lnRef idx="1">
+            <a:schemeClr val="accent1"/>
+          </a:lnRef>
+          <a:fillRef idx="3">
+            <a:schemeClr val="accent1"/>
+          </a:fillRef>
+          <a:effectRef idx="2">
+            <a:schemeClr val="accent1"/>
+          </a:effectRef>
+          <a:fontRef idx="minor">
+            <a:schemeClr val="lt1"/>
+          </a:fontRef>
+        </p:style>
+        <p:txBody>
+          <a:bodyPr rtlCol="0" anchor="ctr"/>
+          <a:lstStyle/>
+          <a:p>
+            <a:pPr algn="ctr"/>
+          </a:p>
+        </p:txBody>
+      </p:sp>
+      <p:sp>
+        <p:nvSpPr>
+          <p:cNvPr id="17433" name="Rounded Rectangle 17432"/>
+          <p:cNvSpPr/>
+          <p:nvPr/>
+        </p:nvSpPr>
+        <p:spPr>
+          <a:xfrm>
+            <a:off x="7882127" y="1188720"/>
+            <a:ext cx="3712463" cy="384048"/>
+          </a:xfrm>
+          <a:prstGeom prst="roundRect">
+            <a:avLst/>
+          </a:prstGeom>
+          <a:solidFill>
+            <a:srgbClr val="0F1E36"/>
+          </a:solidFill>
+          <a:ln>
+            <a:noFill/>
+          </a:ln>
+        </p:spPr>
+        <p:style>
+          <a:lnRef idx="1">
+            <a:schemeClr val="accent1"/>
+          </a:lnRef>
+          <a:fillRef idx="3">
+            <a:schemeClr val="accent1"/>
+          </a:fillRef>
+          <a:effectRef idx="2">
+            <a:schemeClr val="accent1"/>
+          </a:effectRef>
+          <a:fontRef idx="minor">
+            <a:schemeClr val="lt1"/>
+          </a:fontRef>
+        </p:style>
+        <p:txBody>
+          <a:bodyPr rtlCol="0" anchor="ctr"/>
+          <a:lstStyle/>
+          <a:p>
+            <a:pPr algn="ctr">
+              <a:defRPr sz="1300" b="1">
+                <a:solidFill>
+                  <a:srgbClr val="FFFFFF"/>
+                </a:solidFill>
+                <a:latin typeface="Arial"/>
+              </a:defRPr>
+            </a:pPr>
+            <a:r>
+              <a:t>TECHNOLOGY STACK &amp; OPEN TOOLS</a:t>
+            </a:r>
+          </a:p>
+        </p:txBody>
+      </p:sp>
+      <p:sp>
+        <p:nvSpPr>
+          <p:cNvPr id="17434" name="Rounded Rectangle 17433"/>
+          <p:cNvSpPr/>
+          <p:nvPr/>
+        </p:nvSpPr>
+        <p:spPr>
+          <a:xfrm>
+            <a:off x="7909560" y="1664208"/>
+            <a:ext cx="3657600" cy="694944"/>
           </a:xfrm>
           <a:prstGeom prst="roundRect">
             <a:avLst/>
@@ -9370,58 +9504,34 @@
           </a:fontRef>
         </p:style>
         <p:txBody>
-          <a:bodyPr rtlCol="0" anchor="ctr" wrap="square"/>
+          <a:bodyPr rtlCol="0" anchor="ctr"/>
           <a:lstStyle/>
           <a:p>
-            <a:pPr algn="ctr">
-              <a:defRPr sz="950" b="1">
-                <a:solidFill>
-                  <a:srgbClr val="0F1E36"/>
-                </a:solidFill>
-                <a:latin typeface="Arial"/>
-              </a:defRPr>
-            </a:pPr>
-            <a:r>
-              <a:t>🎛️ Scenario Simulator</a:t>
-            </a:r>
-          </a:p>
-          <a:p>
-            <a:pPr>
-              <a:spcBef>
-                <a:spcPts val="200"/>
-              </a:spcBef>
-              <a:defRPr sz="850">
-                <a:solidFill>
-                  <a:srgbClr val="1E293B"/>
-                </a:solidFill>
-                <a:latin typeface="Calibri"/>
-              </a:defRPr>
-            </a:pPr>
-            <a:r>
-              <a:t>Real-Time sensitivity sliders for clearance delays &amp; material inflation</a:t>
-            </a:r>
-          </a:p>
-        </p:txBody>
-      </p:sp>
-      <p:sp>
-        <p:nvSpPr>
-          <p:cNvPr id="17428" name="Down Arrow 17427"/>
+            <a:pPr algn="ctr"/>
+          </a:p>
+        </p:txBody>
+      </p:sp>
+      <p:sp>
+        <p:nvSpPr>
+          <p:cNvPr id="17435" name="Rounded Rectangle 17434"/>
           <p:cNvSpPr/>
           <p:nvPr/>
         </p:nvSpPr>
         <p:spPr>
           <a:xfrm>
-            <a:off x="3913632" y="4846319"/>
-            <a:ext cx="219456" cy="164592"/>
-          </a:xfrm>
-          <a:prstGeom prst="downArrow">
+            <a:off x="7982712" y="1764792"/>
+            <a:ext cx="960120" cy="493776"/>
+          </a:xfrm>
+          <a:prstGeom prst="roundRect">
             <a:avLst/>
           </a:prstGeom>
           <a:solidFill>
-            <a:srgbClr val="E06D14"/>
+            <a:srgbClr val="EFF6FF"/>
           </a:solidFill>
-          <a:ln>
-            <a:noFill/>
+          <a:ln w="12700">
+            <a:solidFill>
+              <a:srgbClr val="0F1E36"/>
+            </a:solidFill>
           </a:ln>
         </p:spPr>
         <p:style>
@@ -9442,118 +9552,79 @@
           <a:bodyPr rtlCol="0" anchor="ctr"/>
           <a:lstStyle/>
           <a:p>
-            <a:pPr algn="ctr"/>
-          </a:p>
-        </p:txBody>
-      </p:sp>
-      <p:sp>
-        <p:nvSpPr>
-          <p:cNvPr id="17429" name="Rounded Rectangle 17428"/>
+            <a:pPr algn="ctr">
+              <a:defRPr sz="1000" b="1">
+                <a:solidFill>
+                  <a:srgbClr val="0F1E36"/>
+                </a:solidFill>
+                <a:latin typeface="Arial"/>
+              </a:defRPr>
+            </a:pPr>
+            <a:r>
+              <a:t>🐍 Python</a:t>
+            </a:r>
+          </a:p>
+        </p:txBody>
+      </p:sp>
+      <p:sp>
+        <p:nvSpPr>
+          <p:cNvPr id="17436" name="TextBox 17435"/>
+          <p:cNvSpPr txBox="1"/>
+          <p:nvPr/>
+        </p:nvSpPr>
+        <p:spPr>
+          <a:xfrm>
+            <a:off x="8997696" y="1682496"/>
+            <a:ext cx="2514600" cy="658368"/>
+          </a:xfrm>
+          <a:prstGeom prst="rect">
+            <a:avLst/>
+          </a:prstGeom>
+          <a:noFill/>
+        </p:spPr>
+        <p:txBody>
+          <a:bodyPr wrap="square">
+            <a:spAutoFit/>
+          </a:bodyPr>
+          <a:lstStyle/>
+          <a:p>
+            <a:pPr>
+              <a:defRPr sz="1300" b="1">
+                <a:solidFill>
+                  <a:srgbClr val="0F1E36"/>
+                </a:solidFill>
+                <a:latin typeface="Arial"/>
+              </a:defRPr>
+            </a:pPr>
+            <a:r>
+              <a:t>Python 3.14</a:t>
+            </a:r>
+          </a:p>
+          <a:p>
+            <a:pPr>
+              <a:defRPr sz="1050">
+                <a:solidFill>
+                  <a:srgbClr val="1E293B"/>
+                </a:solidFill>
+                <a:latin typeface="Calibri"/>
+              </a:defRPr>
+            </a:pPr>
+            <a:r>
+              <a:t>Core data science, ML runtime &amp; pipeline engine</a:t>
+            </a:r>
+          </a:p>
+        </p:txBody>
+      </p:sp>
+      <p:sp>
+        <p:nvSpPr>
+          <p:cNvPr id="17437" name="Rounded Rectangle 17436"/>
           <p:cNvSpPr/>
           <p:nvPr/>
         </p:nvSpPr>
         <p:spPr>
           <a:xfrm>
-            <a:off x="502920" y="5029200"/>
-            <a:ext cx="7040880" cy="1143000"/>
-          </a:xfrm>
-          <a:prstGeom prst="roundRect">
-            <a:avLst/>
-          </a:prstGeom>
-          <a:solidFill>
-            <a:srgbClr val="F8FAFC"/>
-          </a:solidFill>
-          <a:ln w="22225">
-            <a:solidFill>
-              <a:srgbClr val="059669"/>
-            </a:solidFill>
-          </a:ln>
-        </p:spPr>
-        <p:style>
-          <a:lnRef idx="1">
-            <a:schemeClr val="accent1"/>
-          </a:lnRef>
-          <a:fillRef idx="3">
-            <a:schemeClr val="accent1"/>
-          </a:fillRef>
-          <a:effectRef idx="2">
-            <a:schemeClr val="accent1"/>
-          </a:effectRef>
-          <a:fontRef idx="minor">
-            <a:schemeClr val="lt1"/>
-          </a:fontRef>
-        </p:style>
-        <p:txBody>
-          <a:bodyPr rtlCol="0" anchor="ctr"/>
-          <a:lstStyle/>
-          <a:p>
-            <a:pPr algn="ctr"/>
-          </a:p>
-        </p:txBody>
-      </p:sp>
-      <p:sp>
-        <p:nvSpPr>
-          <p:cNvPr id="17430" name="Rounded Rectangle 17429"/>
-          <p:cNvSpPr/>
-          <p:nvPr/>
-        </p:nvSpPr>
-        <p:spPr>
-          <a:xfrm>
-            <a:off x="594360" y="5084064"/>
-            <a:ext cx="3840480" cy="292608"/>
-          </a:xfrm>
-          <a:prstGeom prst="roundRect">
-            <a:avLst/>
-          </a:prstGeom>
-          <a:solidFill>
-            <a:srgbClr val="059669"/>
-          </a:solidFill>
-          <a:ln>
-            <a:noFill/>
-          </a:ln>
-        </p:spPr>
-        <p:style>
-          <a:lnRef idx="1">
-            <a:schemeClr val="accent1"/>
-          </a:lnRef>
-          <a:fillRef idx="3">
-            <a:schemeClr val="accent1"/>
-          </a:fillRef>
-          <a:effectRef idx="2">
-            <a:schemeClr val="accent1"/>
-          </a:effectRef>
-          <a:fontRef idx="minor">
-            <a:schemeClr val="lt1"/>
-          </a:fontRef>
-        </p:style>
-        <p:txBody>
-          <a:bodyPr rtlCol="0" anchor="ctr"/>
-          <a:lstStyle/>
-          <a:p>
-            <a:pPr algn="ctr">
-              <a:defRPr sz="1000" b="1">
-                <a:solidFill>
-                  <a:srgbClr val="FFFFFF"/>
-                </a:solidFill>
-                <a:latin typeface="Arial"/>
-              </a:defRPr>
-            </a:pPr>
-            <a:r>
-              <a:t>TIER 4: ENTERPRISE DELIVERY &amp; AI ASSISTANT</a:t>
-            </a:r>
-          </a:p>
-        </p:txBody>
-      </p:sp>
-      <p:sp>
-        <p:nvSpPr>
-          <p:cNvPr id="17431" name="Rounded Rectangle 17430"/>
-          <p:cNvSpPr/>
-          <p:nvPr/>
-        </p:nvSpPr>
-        <p:spPr>
-          <a:xfrm>
-            <a:off x="612648" y="5413248"/>
-            <a:ext cx="2194560" cy="685800"/>
+            <a:off x="7909560" y="2450592"/>
+            <a:ext cx="3657600" cy="694944"/>
           </a:xfrm>
           <a:prstGeom prst="roundRect">
             <a:avLst/>
@@ -9582,49 +9653,127 @@
           </a:fontRef>
         </p:style>
         <p:txBody>
-          <a:bodyPr rtlCol="0" anchor="ctr" wrap="square"/>
+          <a:bodyPr rtlCol="0" anchor="ctr"/>
           <a:lstStyle/>
           <a:p>
-            <a:pPr algn="ctr">
-              <a:defRPr sz="950" b="1">
-                <a:solidFill>
-                  <a:srgbClr val="059669"/>
-                </a:solidFill>
-                <a:latin typeface="Arial"/>
-              </a:defRPr>
-            </a:pPr>
-            <a:r>
-              <a:t>⚡ FastAPI REST Engine</a:t>
-            </a:r>
-          </a:p>
-          <a:p>
-            <a:pPr>
-              <a:spcBef>
-                <a:spcPts val="200"/>
-              </a:spcBef>
-              <a:defRPr sz="850">
-                <a:solidFill>
-                  <a:srgbClr val="1E293B"/>
-                </a:solidFill>
-                <a:latin typeface="Calibri"/>
-              </a:defRPr>
-            </a:pPr>
-            <a:r>
-              <a:t>Asynchronous sub-5ms model inference &amp; auto-generated OpenAPI Swagger</a:t>
-            </a:r>
-          </a:p>
-        </p:txBody>
-      </p:sp>
-      <p:sp>
-        <p:nvSpPr>
-          <p:cNvPr id="17432" name="Rounded Rectangle 17431"/>
+            <a:pPr algn="ctr"/>
+          </a:p>
+        </p:txBody>
+      </p:sp>
+      <p:sp>
+        <p:nvSpPr>
+          <p:cNvPr id="17438" name="Rounded Rectangle 17437"/>
           <p:cNvSpPr/>
           <p:nvPr/>
         </p:nvSpPr>
         <p:spPr>
           <a:xfrm>
-            <a:off x="2916936" y="5413248"/>
-            <a:ext cx="2194560" cy="685800"/>
+            <a:off x="7982712" y="2551176"/>
+            <a:ext cx="960120" cy="493776"/>
+          </a:xfrm>
+          <a:prstGeom prst="roundRect">
+            <a:avLst/>
+          </a:prstGeom>
+          <a:solidFill>
+            <a:srgbClr val="FFF7ED"/>
+          </a:solidFill>
+          <a:ln w="12700">
+            <a:solidFill>
+              <a:srgbClr val="E06D14"/>
+            </a:solidFill>
+          </a:ln>
+        </p:spPr>
+        <p:style>
+          <a:lnRef idx="1">
+            <a:schemeClr val="accent1"/>
+          </a:lnRef>
+          <a:fillRef idx="3">
+            <a:schemeClr val="accent1"/>
+          </a:fillRef>
+          <a:effectRef idx="2">
+            <a:schemeClr val="accent1"/>
+          </a:effectRef>
+          <a:fontRef idx="minor">
+            <a:schemeClr val="lt1"/>
+          </a:fontRef>
+        </p:style>
+        <p:txBody>
+          <a:bodyPr rtlCol="0" anchor="ctr"/>
+          <a:lstStyle/>
+          <a:p>
+            <a:pPr algn="ctr">
+              <a:defRPr sz="1000" b="1">
+                <a:solidFill>
+                  <a:srgbClr val="E06D14"/>
+                </a:solidFill>
+                <a:latin typeface="Arial"/>
+              </a:defRPr>
+            </a:pPr>
+            <a:r>
+              <a:t>🤖 Scikit</a:t>
+            </a:r>
+          </a:p>
+        </p:txBody>
+      </p:sp>
+      <p:sp>
+        <p:nvSpPr>
+          <p:cNvPr id="17439" name="TextBox 17438"/>
+          <p:cNvSpPr txBox="1"/>
+          <p:nvPr/>
+        </p:nvSpPr>
+        <p:spPr>
+          <a:xfrm>
+            <a:off x="8997696" y="2468880"/>
+            <a:ext cx="2514600" cy="658368"/>
+          </a:xfrm>
+          <a:prstGeom prst="rect">
+            <a:avLst/>
+          </a:prstGeom>
+          <a:noFill/>
+        </p:spPr>
+        <p:txBody>
+          <a:bodyPr wrap="square">
+            <a:spAutoFit/>
+          </a:bodyPr>
+          <a:lstStyle/>
+          <a:p>
+            <a:pPr>
+              <a:defRPr sz="1300" b="1">
+                <a:solidFill>
+                  <a:srgbClr val="0F1E36"/>
+                </a:solidFill>
+                <a:latin typeface="Arial"/>
+              </a:defRPr>
+            </a:pPr>
+            <a:r>
+              <a:t>Scikit-Learn 1.9</a:t>
+            </a:r>
+          </a:p>
+          <a:p>
+            <a:pPr>
+              <a:defRPr sz="1050">
+                <a:solidFill>
+                  <a:srgbClr val="1E293B"/>
+                </a:solidFill>
+                <a:latin typeface="Calibri"/>
+              </a:defRPr>
+            </a:pPr>
+            <a:r>
+              <a:t>HistGradientBoosting, Random Forest &amp; GLM models</a:t>
+            </a:r>
+          </a:p>
+        </p:txBody>
+      </p:sp>
+      <p:sp>
+        <p:nvSpPr>
+          <p:cNvPr id="17440" name="Rounded Rectangle 17439"/>
+          <p:cNvSpPr/>
+          <p:nvPr/>
+        </p:nvSpPr>
+        <p:spPr>
+          <a:xfrm>
+            <a:off x="7909560" y="3236976"/>
+            <a:ext cx="3657600" cy="694944"/>
           </a:xfrm>
           <a:prstGeom prst="roundRect">
             <a:avLst/>
@@ -9653,49 +9802,127 @@
           </a:fontRef>
         </p:style>
         <p:txBody>
-          <a:bodyPr rtlCol="0" anchor="ctr" wrap="square"/>
+          <a:bodyPr rtlCol="0" anchor="ctr"/>
           <a:lstStyle/>
           <a:p>
-            <a:pPr algn="ctr">
-              <a:defRPr sz="950" b="1">
-                <a:solidFill>
-                  <a:srgbClr val="059669"/>
-                </a:solidFill>
-                <a:latin typeface="Arial"/>
-              </a:defRPr>
-            </a:pPr>
-            <a:r>
-              <a:t>📊 Executive Dashboard</a:t>
-            </a:r>
-          </a:p>
-          <a:p>
-            <a:pPr>
-              <a:spcBef>
-                <a:spcPts val="200"/>
-              </a:spcBef>
-              <a:defRPr sz="850">
-                <a:solidFill>
-                  <a:srgbClr val="1E293B"/>
-                </a:solidFill>
-                <a:latin typeface="Calibri"/>
-              </a:defRPr>
-            </a:pPr>
-            <a:r>
-              <a:t>Interactive portfolio analytics, project drilldown modals &amp; peer cohorts</a:t>
-            </a:r>
-          </a:p>
-        </p:txBody>
-      </p:sp>
-      <p:sp>
-        <p:nvSpPr>
-          <p:cNvPr id="17433" name="Rounded Rectangle 17432"/>
+            <a:pPr algn="ctr"/>
+          </a:p>
+        </p:txBody>
+      </p:sp>
+      <p:sp>
+        <p:nvSpPr>
+          <p:cNvPr id="17441" name="Rounded Rectangle 17440"/>
           <p:cNvSpPr/>
           <p:nvPr/>
         </p:nvSpPr>
         <p:spPr>
           <a:xfrm>
-            <a:off x="5221224" y="5413248"/>
-            <a:ext cx="2194560" cy="685800"/>
+            <a:off x="7982712" y="3337560"/>
+            <a:ext cx="960120" cy="493776"/>
+          </a:xfrm>
+          <a:prstGeom prst="roundRect">
+            <a:avLst/>
+          </a:prstGeom>
+          <a:solidFill>
+            <a:srgbClr val="F0FDF4"/>
+          </a:solidFill>
+          <a:ln w="12700">
+            <a:solidFill>
+              <a:srgbClr val="059669"/>
+            </a:solidFill>
+          </a:ln>
+        </p:spPr>
+        <p:style>
+          <a:lnRef idx="1">
+            <a:schemeClr val="accent1"/>
+          </a:lnRef>
+          <a:fillRef idx="3">
+            <a:schemeClr val="accent1"/>
+          </a:fillRef>
+          <a:effectRef idx="2">
+            <a:schemeClr val="accent1"/>
+          </a:effectRef>
+          <a:fontRef idx="minor">
+            <a:schemeClr val="lt1"/>
+          </a:fontRef>
+        </p:style>
+        <p:txBody>
+          <a:bodyPr rtlCol="0" anchor="ctr"/>
+          <a:lstStyle/>
+          <a:p>
+            <a:pPr algn="ctr">
+              <a:defRPr sz="1000" b="1">
+                <a:solidFill>
+                  <a:srgbClr val="059669"/>
+                </a:solidFill>
+                <a:latin typeface="Arial"/>
+              </a:defRPr>
+            </a:pPr>
+            <a:r>
+              <a:t>⚡ FastAPI</a:t>
+            </a:r>
+          </a:p>
+        </p:txBody>
+      </p:sp>
+      <p:sp>
+        <p:nvSpPr>
+          <p:cNvPr id="17442" name="TextBox 17441"/>
+          <p:cNvSpPr txBox="1"/>
+          <p:nvPr/>
+        </p:nvSpPr>
+        <p:spPr>
+          <a:xfrm>
+            <a:off x="8997696" y="3255264"/>
+            <a:ext cx="2514600" cy="658368"/>
+          </a:xfrm>
+          <a:prstGeom prst="rect">
+            <a:avLst/>
+          </a:prstGeom>
+          <a:noFill/>
+        </p:spPr>
+        <p:txBody>
+          <a:bodyPr wrap="square">
+            <a:spAutoFit/>
+          </a:bodyPr>
+          <a:lstStyle/>
+          <a:p>
+            <a:pPr>
+              <a:defRPr sz="1300" b="1">
+                <a:solidFill>
+                  <a:srgbClr val="0F1E36"/>
+                </a:solidFill>
+                <a:latin typeface="Arial"/>
+              </a:defRPr>
+            </a:pPr>
+            <a:r>
+              <a:t>FastAPI 0.141</a:t>
+            </a:r>
+          </a:p>
+          <a:p>
+            <a:pPr>
+              <a:defRPr sz="1050">
+                <a:solidFill>
+                  <a:srgbClr val="1E293B"/>
+                </a:solidFill>
+                <a:latin typeface="Calibri"/>
+              </a:defRPr>
+            </a:pPr>
+            <a:r>
+              <a:t>High-concurrency ASGI REST API (&lt;5ms latency)</a:t>
+            </a:r>
+          </a:p>
+        </p:txBody>
+      </p:sp>
+      <p:sp>
+        <p:nvSpPr>
+          <p:cNvPr id="17443" name="Rounded Rectangle 17442"/>
+          <p:cNvSpPr/>
+          <p:nvPr/>
+        </p:nvSpPr>
+        <p:spPr>
+          <a:xfrm>
+            <a:off x="7909560" y="4023360"/>
+            <a:ext cx="3657600" cy="694944"/>
           </a:xfrm>
           <a:prstGeom prst="roundRect">
             <a:avLst/>
@@ -9724,59 +9951,33 @@
           </a:fontRef>
         </p:style>
         <p:txBody>
-          <a:bodyPr rtlCol="0" anchor="ctr" wrap="square"/>
+          <a:bodyPr rtlCol="0" anchor="ctr"/>
           <a:lstStyle/>
           <a:p>
-            <a:pPr algn="ctr">
-              <a:defRPr sz="950" b="1">
-                <a:solidFill>
-                  <a:srgbClr val="059669"/>
-                </a:solidFill>
-                <a:latin typeface="Arial"/>
-              </a:defRPr>
-            </a:pPr>
-            <a:r>
-              <a:t>🧠 Project Copilot</a:t>
-            </a:r>
-          </a:p>
-          <a:p>
-            <a:pPr>
-              <a:spcBef>
-                <a:spcPts val="200"/>
-              </a:spcBef>
-              <a:defRPr sz="850">
-                <a:solidFill>
-                  <a:srgbClr val="1E293B"/>
-                </a:solidFill>
-                <a:latin typeface="Calibri"/>
-              </a:defRPr>
-            </a:pPr>
-            <a:r>
-              <a:t>Instant 1-page Ministerial briefs &amp; prescriptive bottleneck remedies</a:t>
-            </a:r>
-          </a:p>
-        </p:txBody>
-      </p:sp>
-      <p:sp>
-        <p:nvSpPr>
-          <p:cNvPr id="17434" name="Rounded Rectangle 17433"/>
+            <a:pPr algn="ctr"/>
+          </a:p>
+        </p:txBody>
+      </p:sp>
+      <p:sp>
+        <p:nvSpPr>
+          <p:cNvPr id="17444" name="Rounded Rectangle 17443"/>
           <p:cNvSpPr/>
           <p:nvPr/>
         </p:nvSpPr>
         <p:spPr>
           <a:xfrm>
-            <a:off x="7726679" y="1188720"/>
-            <a:ext cx="3977639" cy="4983480"/>
+            <a:off x="7982712" y="4123944"/>
+            <a:ext cx="960120" cy="493776"/>
           </a:xfrm>
           <a:prstGeom prst="roundRect">
             <a:avLst/>
           </a:prstGeom>
           <a:solidFill>
-            <a:srgbClr val="F8FAFC"/>
+            <a:srgbClr val="EFF6FF"/>
           </a:solidFill>
-          <a:ln>
+          <a:ln w="12700">
             <a:solidFill>
-              <a:srgbClr val="CBD5E1"/>
+              <a:srgbClr val="0F1E36"/>
             </a:solidFill>
           </a:ln>
         </p:spPr>
@@ -9798,29 +9999,90 @@
           <a:bodyPr rtlCol="0" anchor="ctr"/>
           <a:lstStyle/>
           <a:p>
-            <a:pPr algn="ctr"/>
-          </a:p>
-        </p:txBody>
-      </p:sp>
-      <p:sp>
-        <p:nvSpPr>
-          <p:cNvPr id="17435" name="Rounded Rectangle 17434"/>
+            <a:pPr algn="ctr">
+              <a:defRPr sz="1000" b="1">
+                <a:solidFill>
+                  <a:srgbClr val="0F1E36"/>
+                </a:solidFill>
+                <a:latin typeface="Arial"/>
+              </a:defRPr>
+            </a:pPr>
+            <a:r>
+              <a:t>🐼 Pandas</a:t>
+            </a:r>
+          </a:p>
+        </p:txBody>
+      </p:sp>
+      <p:sp>
+        <p:nvSpPr>
+          <p:cNvPr id="17445" name="TextBox 17444"/>
+          <p:cNvSpPr txBox="1"/>
+          <p:nvPr/>
+        </p:nvSpPr>
+        <p:spPr>
+          <a:xfrm>
+            <a:off x="8997696" y="4041648"/>
+            <a:ext cx="2514600" cy="658368"/>
+          </a:xfrm>
+          <a:prstGeom prst="rect">
+            <a:avLst/>
+          </a:prstGeom>
+          <a:noFill/>
+        </p:spPr>
+        <p:txBody>
+          <a:bodyPr wrap="square">
+            <a:spAutoFit/>
+          </a:bodyPr>
+          <a:lstStyle/>
+          <a:p>
+            <a:pPr>
+              <a:defRPr sz="1300" b="1">
+                <a:solidFill>
+                  <a:srgbClr val="0F1E36"/>
+                </a:solidFill>
+                <a:latin typeface="Arial"/>
+              </a:defRPr>
+            </a:pPr>
+            <a:r>
+              <a:t>Pandas &amp; NumPy</a:t>
+            </a:r>
+          </a:p>
+          <a:p>
+            <a:pPr>
+              <a:defRPr sz="1050">
+                <a:solidFill>
+                  <a:srgbClr val="1E293B"/>
+                </a:solidFill>
+                <a:latin typeface="Calibri"/>
+              </a:defRPr>
+            </a:pPr>
+            <a:r>
+              <a:t>High-speed data engineering &amp; CRI velocity ratios</a:t>
+            </a:r>
+          </a:p>
+        </p:txBody>
+      </p:sp>
+      <p:sp>
+        <p:nvSpPr>
+          <p:cNvPr id="17446" name="Rounded Rectangle 17445"/>
           <p:cNvSpPr/>
           <p:nvPr/>
         </p:nvSpPr>
         <p:spPr>
           <a:xfrm>
-            <a:off x="7863840" y="1298448"/>
-            <a:ext cx="3703320" cy="438912"/>
+            <a:off x="7909560" y="4809744"/>
+            <a:ext cx="3657600" cy="694944"/>
           </a:xfrm>
           <a:prstGeom prst="roundRect">
             <a:avLst/>
           </a:prstGeom>
           <a:solidFill>
-            <a:srgbClr val="0F1E36"/>
+            <a:srgbClr val="FFFFFF"/>
           </a:solidFill>
-          <a:ln>
-            <a:noFill/>
+          <a:ln w="12700">
+            <a:solidFill>
+              <a:srgbClr val="CBD5E1"/>
+            </a:solidFill>
           </a:ln>
         </p:spPr>
         <p:style>
@@ -9841,30 +10103,75 @@
           <a:bodyPr rtlCol="0" anchor="ctr"/>
           <a:lstStyle/>
           <a:p>
+            <a:pPr algn="ctr"/>
+          </a:p>
+        </p:txBody>
+      </p:sp>
+      <p:sp>
+        <p:nvSpPr>
+          <p:cNvPr id="17447" name="Rounded Rectangle 17446"/>
+          <p:cNvSpPr/>
+          <p:nvPr/>
+        </p:nvSpPr>
+        <p:spPr>
+          <a:xfrm>
+            <a:off x="7982712" y="4910328"/>
+            <a:ext cx="960120" cy="493776"/>
+          </a:xfrm>
+          <a:prstGeom prst="roundRect">
+            <a:avLst/>
+          </a:prstGeom>
+          <a:solidFill>
+            <a:srgbClr val="FFF7ED"/>
+          </a:solidFill>
+          <a:ln w="12700">
+            <a:solidFill>
+              <a:srgbClr val="E06D14"/>
+            </a:solidFill>
+          </a:ln>
+        </p:spPr>
+        <p:style>
+          <a:lnRef idx="1">
+            <a:schemeClr val="accent1"/>
+          </a:lnRef>
+          <a:fillRef idx="3">
+            <a:schemeClr val="accent1"/>
+          </a:fillRef>
+          <a:effectRef idx="2">
+            <a:schemeClr val="accent1"/>
+          </a:effectRef>
+          <a:fontRef idx="minor">
+            <a:schemeClr val="lt1"/>
+          </a:fontRef>
+        </p:style>
+        <p:txBody>
+          <a:bodyPr rtlCol="0" anchor="ctr"/>
+          <a:lstStyle/>
+          <a:p>
             <a:pPr algn="ctr">
-              <a:defRPr sz="1300" b="1">
-                <a:solidFill>
-                  <a:srgbClr val="FFFFFF"/>
+              <a:defRPr sz="1000" b="1">
+                <a:solidFill>
+                  <a:srgbClr val="E06D14"/>
                 </a:solidFill>
                 <a:latin typeface="Arial"/>
               </a:defRPr>
             </a:pPr>
             <a:r>
-              <a:t>TECHNOLOGY STACK &amp; OPEN TOOLS</a:t>
-            </a:r>
-          </a:p>
-        </p:txBody>
-      </p:sp>
-      <p:sp>
-        <p:nvSpPr>
-          <p:cNvPr id="17436" name="TextBox 17435"/>
+              <a:t>🎨 Tailwind</a:t>
+            </a:r>
+          </a:p>
+        </p:txBody>
+      </p:sp>
+      <p:sp>
+        <p:nvSpPr>
+          <p:cNvPr id="17448" name="TextBox 17447"/>
           <p:cNvSpPr txBox="1"/>
           <p:nvPr/>
         </p:nvSpPr>
         <p:spPr>
           <a:xfrm>
-            <a:off x="9372600" y="1828799"/>
-            <a:ext cx="2240279" cy="594360"/>
+            <a:off x="8997696" y="4828032"/>
+            <a:ext cx="2514600" cy="658368"/>
           </a:xfrm>
           <a:prstGeom prst="rect">
             <a:avLst/>
@@ -9878,7 +10185,7 @@
           <a:lstStyle/>
           <a:p>
             <a:pPr>
-              <a:defRPr sz="1200" b="1">
+              <a:defRPr sz="1300" b="1">
                 <a:solidFill>
                   <a:srgbClr val="0F1E36"/>
                 </a:solidFill>
@@ -9886,12 +10193,12 @@
               </a:defRPr>
             </a:pPr>
             <a:r>
-              <a:t>Python 3.14</a:t>
-            </a:r>
-          </a:p>
-          <a:p>
-            <a:pPr>
-              <a:defRPr sz="950">
+              <a:t>Tailwind &amp; Chart.js</a:t>
+            </a:r>
+          </a:p>
+          <a:p>
+            <a:pPr>
+              <a:defRPr sz="1050">
                 <a:solidFill>
                   <a:srgbClr val="1E293B"/>
                 </a:solidFill>
@@ -9899,217 +10206,21 @@
               </a:defRPr>
             </a:pPr>
             <a:r>
-              <a:t>Core data science &amp; ML runtime environment</a:t>
-            </a:r>
-          </a:p>
-        </p:txBody>
-      </p:sp>
-      <p:sp>
-        <p:nvSpPr>
-          <p:cNvPr id="17437" name="TextBox 17436"/>
-          <p:cNvSpPr txBox="1"/>
-          <p:nvPr/>
-        </p:nvSpPr>
-        <p:spPr>
-          <a:xfrm>
-            <a:off x="9372600" y="2578608"/>
-            <a:ext cx="2240279" cy="594360"/>
-          </a:xfrm>
-          <a:prstGeom prst="rect">
-            <a:avLst/>
-          </a:prstGeom>
-          <a:noFill/>
-        </p:spPr>
-        <p:txBody>
-          <a:bodyPr wrap="square">
-            <a:spAutoFit/>
-          </a:bodyPr>
-          <a:lstStyle/>
-          <a:p>
-            <a:pPr>
-              <a:defRPr sz="1200" b="1">
-                <a:solidFill>
-                  <a:srgbClr val="0F1E36"/>
-                </a:solidFill>
-                <a:latin typeface="Arial"/>
-              </a:defRPr>
-            </a:pPr>
-            <a:r>
-              <a:t>Scikit-Learn 1.9</a:t>
-            </a:r>
-          </a:p>
-          <a:p>
-            <a:pPr>
-              <a:defRPr sz="950">
-                <a:solidFill>
-                  <a:srgbClr val="1E293B"/>
-                </a:solidFill>
-                <a:latin typeface="Calibri"/>
-              </a:defRPr>
-            </a:pPr>
-            <a:r>
-              <a:t>HistGradientBoosting, Random Forest &amp; GLM pipelines</a:t>
-            </a:r>
-          </a:p>
-        </p:txBody>
-      </p:sp>
-      <p:sp>
-        <p:nvSpPr>
-          <p:cNvPr id="17438" name="TextBox 17437"/>
-          <p:cNvSpPr txBox="1"/>
-          <p:nvPr/>
-        </p:nvSpPr>
-        <p:spPr>
-          <a:xfrm>
-            <a:off x="9372600" y="3328415"/>
-            <a:ext cx="2240279" cy="594360"/>
-          </a:xfrm>
-          <a:prstGeom prst="rect">
-            <a:avLst/>
-          </a:prstGeom>
-          <a:noFill/>
-        </p:spPr>
-        <p:txBody>
-          <a:bodyPr wrap="square">
-            <a:spAutoFit/>
-          </a:bodyPr>
-          <a:lstStyle/>
-          <a:p>
-            <a:pPr>
-              <a:defRPr sz="1200" b="1">
-                <a:solidFill>
-                  <a:srgbClr val="0F1E36"/>
-                </a:solidFill>
-                <a:latin typeface="Arial"/>
-              </a:defRPr>
-            </a:pPr>
-            <a:r>
-              <a:t>FastAPI 0.141</a:t>
-            </a:r>
-          </a:p>
-          <a:p>
-            <a:pPr>
-              <a:defRPr sz="950">
-                <a:solidFill>
-                  <a:srgbClr val="1E293B"/>
-                </a:solidFill>
-                <a:latin typeface="Calibri"/>
-              </a:defRPr>
-            </a:pPr>
-            <a:r>
-              <a:t>High-concurrency ASGI REST engine (&lt;5ms latency)</a:t>
-            </a:r>
-          </a:p>
-        </p:txBody>
-      </p:sp>
-      <p:sp>
-        <p:nvSpPr>
-          <p:cNvPr id="17439" name="TextBox 17438"/>
-          <p:cNvSpPr txBox="1"/>
-          <p:nvPr/>
-        </p:nvSpPr>
-        <p:spPr>
-          <a:xfrm>
-            <a:off x="9372600" y="4078224"/>
-            <a:ext cx="2240279" cy="594360"/>
-          </a:xfrm>
-          <a:prstGeom prst="rect">
-            <a:avLst/>
-          </a:prstGeom>
-          <a:noFill/>
-        </p:spPr>
-        <p:txBody>
-          <a:bodyPr wrap="square">
-            <a:spAutoFit/>
-          </a:bodyPr>
-          <a:lstStyle/>
-          <a:p>
-            <a:pPr>
-              <a:defRPr sz="1200" b="1">
-                <a:solidFill>
-                  <a:srgbClr val="0F1E36"/>
-                </a:solidFill>
-                <a:latin typeface="Arial"/>
-              </a:defRPr>
-            </a:pPr>
-            <a:r>
-              <a:t>Pandas &amp; NumPy</a:t>
-            </a:r>
-          </a:p>
-          <a:p>
-            <a:pPr>
-              <a:defRPr sz="950">
-                <a:solidFill>
-                  <a:srgbClr val="1E293B"/>
-                </a:solidFill>
-                <a:latin typeface="Calibri"/>
-              </a:defRPr>
-            </a:pPr>
-            <a:r>
-              <a:t>High-throughput feature engineering &amp; ratio derivations</a:t>
-            </a:r>
-          </a:p>
-        </p:txBody>
-      </p:sp>
-      <p:sp>
-        <p:nvSpPr>
-          <p:cNvPr id="17440" name="TextBox 17439"/>
-          <p:cNvSpPr txBox="1"/>
-          <p:nvPr/>
-        </p:nvSpPr>
-        <p:spPr>
-          <a:xfrm>
-            <a:off x="9372600" y="4828032"/>
-            <a:ext cx="2240279" cy="594360"/>
-          </a:xfrm>
-          <a:prstGeom prst="rect">
-            <a:avLst/>
-          </a:prstGeom>
-          <a:noFill/>
-        </p:spPr>
-        <p:txBody>
-          <a:bodyPr wrap="square">
-            <a:spAutoFit/>
-          </a:bodyPr>
-          <a:lstStyle/>
-          <a:p>
-            <a:pPr>
-              <a:defRPr sz="1200" b="1">
-                <a:solidFill>
-                  <a:srgbClr val="0F1E36"/>
-                </a:solidFill>
-                <a:latin typeface="Arial"/>
-              </a:defRPr>
-            </a:pPr>
-            <a:r>
-              <a:t>Tailwind &amp; Chart.js</a:t>
-            </a:r>
-          </a:p>
-          <a:p>
-            <a:pPr>
-              <a:defRPr sz="950">
-                <a:solidFill>
-                  <a:srgbClr val="1E293B"/>
-                </a:solidFill>
-                <a:latin typeface="Calibri"/>
-              </a:defRPr>
-            </a:pPr>
-            <a:r>
-              <a:t>Modern responsive web UI &amp; interactive data analytics</a:t>
-            </a:r>
-          </a:p>
-        </p:txBody>
-      </p:sp>
-      <p:sp>
-        <p:nvSpPr>
-          <p:cNvPr id="17441" name="Rounded Rectangle 17440"/>
+              <a:t>Modern responsive web portal &amp; interactive visual charts</a:t>
+            </a:r>
+          </a:p>
+        </p:txBody>
+      </p:sp>
+      <p:sp>
+        <p:nvSpPr>
+          <p:cNvPr id="17449" name="Rounded Rectangle 17448"/>
           <p:cNvSpPr/>
           <p:nvPr/>
         </p:nvSpPr>
         <p:spPr>
           <a:xfrm>
-            <a:off x="7863840" y="5596128"/>
-            <a:ext cx="3703320" cy="475488"/>
+            <a:off x="7909560" y="5669280"/>
+            <a:ext cx="3657600" cy="502920"/>
           </a:xfrm>
           <a:prstGeom prst="roundRect">
             <a:avLst/>
@@ -10140,7 +10251,7 @@
           <a:lstStyle/>
           <a:p>
             <a:pPr algn="ctr">
-              <a:defRPr sz="1050" b="1">
+              <a:defRPr sz="1150" b="1">
                 <a:solidFill>
                   <a:srgbClr val="FFFFFF"/>
                 </a:solidFill>
@@ -10148,7 +10259,7 @@
               </a:defRPr>
             </a:pPr>
             <a:r>
-              <a:t>✓ 100% Open Source | Zero Licensing Fees | 2 vCPUs</a:t>
+              <a:t>✓ 100% Open Source | 2 vCPUs | Zero GPU Cost</a:t>
             </a:r>
           </a:p>
         </p:txBody>
@@ -12813,859 +12924,6 @@
     <p:extLst>
       <p:ext uri="{BB962C8B-B14F-4D97-AF65-F5344CB8AC3E}">
         <p14:creationId xmlns:p14="http://schemas.microsoft.com/office/powerpoint/2010/main" val="3916788613"/>
-      </p:ext>
-    </p:extLst>
-  </p:cSld>
-  <p:clrMapOvr>
-    <a:masterClrMapping/>
-  </p:clrMapOvr>
-</p:sld>
-</file>
-
-<file path=ppt/slides/slide7.xml><?xml version="1.0" encoding="utf-8"?>
-<p:sld xmlns:a="http://schemas.openxmlformats.org/drawingml/2006/main" xmlns:r="http://schemas.openxmlformats.org/officeDocument/2006/relationships" xmlns:p="http://schemas.openxmlformats.org/presentationml/2006/main">
-  <p:cSld>
-    <p:spTree>
-      <p:nvGrpSpPr>
-        <p:cNvPr id="1" name=""/>
-        <p:cNvGrpSpPr/>
-        <p:nvPr/>
-      </p:nvGrpSpPr>
-      <p:grpSpPr>
-        <a:xfrm>
-          <a:off x="0" y="0"/>
-          <a:ext cx="0" cy="0"/>
-          <a:chOff x="0" y="0"/>
-          <a:chExt cx="0" cy="0"/>
-        </a:xfrm>
-      </p:grpSpPr>
-      <p:sp>
-        <p:nvSpPr>
-          <p:cNvPr id="10" name="Rectangle 9">
-            <a:extLst>
-              <a:ext uri="{FF2B5EF4-FFF2-40B4-BE49-F238E27FC236}">
-                <a16:creationId xmlns:a16="http://schemas.microsoft.com/office/drawing/2014/main" id="{AD4F69D3-EEB0-4C4C-9434-B9960FB5854C}"/>
-              </a:ext>
-            </a:extLst>
-          </p:cNvPr>
-          <p:cNvSpPr>
-            <a:spLocks noChangeArrowheads="1"/>
-          </p:cNvSpPr>
-          <p:nvPr/>
-        </p:nvSpPr>
-        <p:spPr bwMode="auto">
-          <a:xfrm>
-            <a:off x="0" y="6354762"/>
-            <a:ext cx="12191999" cy="503238"/>
-          </a:xfrm>
-          <a:prstGeom prst="rect">
-            <a:avLst/>
-          </a:prstGeom>
-          <a:solidFill>
-            <a:srgbClr val="0070C0"/>
-          </a:solidFill>
-          <a:ln w="9525">
-            <a:noFill/>
-            <a:miter lim="800000"/>
-            <a:headEnd/>
-            <a:tailEnd/>
-          </a:ln>
-          <a:effectLst>
-            <a:outerShdw dist="23000" dir="5400000" rotWithShape="0">
-              <a:srgbClr val="808080">
-                <a:alpha val="34999"/>
-              </a:srgbClr>
-            </a:outerShdw>
-          </a:effectLst>
-        </p:spPr>
-        <p:txBody>
-          <a:bodyPr anchor="ctr"/>
-          <a:lstStyle/>
-          <a:p>
-            <a:pPr marL="0" marR="0" lvl="0" indent="0" algn="ctr" defTabSz="457200" rtl="0" eaLnBrk="1" fontAlgn="auto" latinLnBrk="0" hangingPunct="1">
-              <a:lnSpc>
-                <a:spcPct val="100000"/>
-              </a:lnSpc>
-              <a:spcBef>
-                <a:spcPts val="0"/>
-              </a:spcBef>
-              <a:spcAft>
-                <a:spcPts val="0"/>
-              </a:spcAft>
-              <a:buClrTx/>
-              <a:buSzTx/>
-              <a:buFontTx/>
-              <a:buNone/>
-              <a:tabLst/>
-              <a:defRPr/>
-            </a:pPr>
-            <a:endParaRPr kumimoji="0" lang="en-US" sz="1800" b="0" i="0" u="none" strike="noStrike" kern="1200" cap="none" spc="0" normalizeH="0" baseline="0" noProof="0" dirty="0">
-              <a:ln>
-                <a:noFill/>
-              </a:ln>
-              <a:solidFill>
-                <a:srgbClr val="C0504D">
-                  <a:lumMod val="75000"/>
-                </a:srgbClr>
-              </a:solidFill>
-              <a:effectLst/>
-              <a:uLnTx/>
-              <a:uFillTx/>
-              <a:latin typeface="Calibri"/>
-              <a:ea typeface="ＭＳ Ｐゴシック" pitchFamily="1" charset="-128"/>
-              <a:cs typeface="+mn-cs"/>
-            </a:endParaRPr>
-          </a:p>
-        </p:txBody>
-      </p:sp>
-      <p:sp>
-        <p:nvSpPr>
-          <p:cNvPr id="6" name="Slide Number Placeholder 5"/>
-          <p:cNvSpPr>
-            <a:spLocks noGrp="1"/>
-          </p:cNvSpPr>
-          <p:nvPr>
-            <p:ph type="sldNum" sz="quarter" idx="12"/>
-          </p:nvPr>
-        </p:nvSpPr>
-        <p:spPr/>
-        <p:txBody>
-          <a:bodyPr/>
-          <a:lstStyle/>
-          <a:p>
-            <a:pPr marL="0" marR="0" lvl="0" indent="0" algn="r" defTabSz="457200" rtl="0" eaLnBrk="1" fontAlgn="base" latinLnBrk="0" hangingPunct="1">
-              <a:lnSpc>
-                <a:spcPct val="100000"/>
-              </a:lnSpc>
-              <a:spcBef>
-                <a:spcPct val="0"/>
-              </a:spcBef>
-              <a:spcAft>
-                <a:spcPct val="0"/>
-              </a:spcAft>
-              <a:buClrTx/>
-              <a:buSzTx/>
-              <a:buFontTx/>
-              <a:buNone/>
-              <a:tabLst/>
-              <a:defRPr/>
-            </a:pPr>
-            <a:fld id="{677C3CE7-23F7-4828-823C-E0205DF2CF97}" type="slidenum">
-              <a:rPr kumimoji="0" lang="en-US" sz="1200" b="1" i="0" u="none" strike="noStrike" kern="1200" cap="none" spc="0" normalizeH="0" baseline="0" noProof="0">
-                <a:ln>
-                  <a:noFill/>
-                </a:ln>
-                <a:solidFill>
-                  <a:prstClr val="white"/>
-                </a:solidFill>
-                <a:effectLst/>
-                <a:uLnTx/>
-                <a:uFillTx/>
-                <a:latin typeface="TradeGothic" pitchFamily="1" charset="0"/>
-                <a:ea typeface="ＭＳ Ｐゴシック" pitchFamily="1" charset="-128"/>
-                <a:cs typeface="+mn-cs"/>
-              </a:rPr>
-              <a:pPr marL="0" marR="0" lvl="0" indent="0" algn="r" defTabSz="457200" rtl="0" eaLnBrk="1" fontAlgn="base" latinLnBrk="0" hangingPunct="1">
-                <a:lnSpc>
-                  <a:spcPct val="100000"/>
-                </a:lnSpc>
-                <a:spcBef>
-                  <a:spcPct val="0"/>
-                </a:spcBef>
-                <a:spcAft>
-                  <a:spcPct val="0"/>
-                </a:spcAft>
-                <a:buClrTx/>
-                <a:buSzTx/>
-                <a:buFontTx/>
-                <a:buNone/>
-                <a:tabLst/>
-                <a:defRPr/>
-              </a:pPr>
-              <a:t>7</a:t>
-            </a:fld>
-            <a:endParaRPr kumimoji="0" lang="en-US" sz="1200" b="1" i="0" u="none" strike="noStrike" kern="1200" cap="none" spc="0" normalizeH="0" baseline="0" noProof="0" dirty="0">
-              <a:ln>
-                <a:noFill/>
-              </a:ln>
-              <a:solidFill>
-                <a:prstClr val="white"/>
-              </a:solidFill>
-              <a:effectLst/>
-              <a:uLnTx/>
-              <a:uFillTx/>
-              <a:latin typeface="TradeGothic" pitchFamily="1" charset="0"/>
-              <a:ea typeface="ＭＳ Ｐゴシック" pitchFamily="1" charset="-128"/>
-              <a:cs typeface="+mn-cs"/>
-            </a:endParaRPr>
-          </a:p>
-        </p:txBody>
-      </p:sp>
-      <p:sp>
-        <p:nvSpPr>
-          <p:cNvPr id="7" name="Footer Placeholder 6"/>
-          <p:cNvSpPr>
-            <a:spLocks noGrp="1"/>
-          </p:cNvSpPr>
-          <p:nvPr>
-            <p:ph type="ftr" sz="quarter" idx="11"/>
-          </p:nvPr>
-        </p:nvSpPr>
-        <p:spPr>
-          <a:xfrm>
-            <a:off x="4648200" y="6356353"/>
-            <a:ext cx="3204000" cy="365125"/>
-          </a:xfrm>
-        </p:spPr>
-        <p:txBody>
-          <a:bodyPr/>
-          <a:lstStyle/>
-          <a:p>
-            <a:pPr marL="0" marR="0" lvl="0" indent="0" algn="ctr" defTabSz="457200" rtl="0" eaLnBrk="1" fontAlgn="auto" latinLnBrk="0" hangingPunct="1">
-              <a:lnSpc>
-                <a:spcPct val="100000"/>
-              </a:lnSpc>
-              <a:spcBef>
-                <a:spcPts val="0"/>
-              </a:spcBef>
-              <a:spcAft>
-                <a:spcPts val="0"/>
-              </a:spcAft>
-              <a:buClrTx/>
-              <a:buSzTx/>
-              <a:buFontTx/>
-              <a:buNone/>
-              <a:tabLst/>
-              <a:defRPr/>
-            </a:pPr>
-            <a:r>
-              <a:rPr kumimoji="0" lang="en-US" sz="1200" b="0" i="0" u="none" strike="noStrike" kern="1200" cap="none" spc="0" normalizeH="0" baseline="0" noProof="0">
-                <a:ln>
-                  <a:noFill/>
-                </a:ln>
-                <a:solidFill>
-                  <a:prstClr val="white"/>
-                </a:solidFill>
-                <a:effectLst/>
-                <a:uLnTx/>
-                <a:uFillTx/>
-                <a:latin typeface="TradeGothic"/>
-                <a:ea typeface="+mn-ea"/>
-                <a:cs typeface="+mn-cs"/>
-              </a:rPr>
-              <a:t>@SIH Idea submission- Template</a:t>
-            </a:r>
-            <a:endParaRPr kumimoji="0" lang="en-US" sz="1200" b="0" i="0" u="none" strike="noStrike" kern="1200" cap="none" spc="0" normalizeH="0" baseline="0" noProof="0" dirty="0">
-              <a:ln>
-                <a:noFill/>
-              </a:ln>
-              <a:solidFill>
-                <a:prstClr val="white"/>
-              </a:solidFill>
-              <a:effectLst/>
-              <a:uLnTx/>
-              <a:uFillTx/>
-              <a:latin typeface="TradeGothic"/>
-              <a:ea typeface="+mn-ea"/>
-              <a:cs typeface="+mn-cs"/>
-            </a:endParaRPr>
-          </a:p>
-        </p:txBody>
-      </p:sp>
-      <p:sp>
-        <p:nvSpPr>
-          <p:cNvPr id="3" name="Round Diagonal Corner Rectangle 2"/>
-          <p:cNvSpPr/>
-          <p:nvPr/>
-        </p:nvSpPr>
-        <p:spPr>
-          <a:xfrm>
-            <a:off x="0" y="1791032"/>
-            <a:ext cx="12192000" cy="4319200"/>
-          </a:xfrm>
-          <a:prstGeom prst="round2DiagRect">
-            <a:avLst/>
-          </a:prstGeom>
-          <a:solidFill>
-            <a:schemeClr val="accent1">
-              <a:lumMod val="20000"/>
-              <a:lumOff val="80000"/>
-            </a:schemeClr>
-          </a:solidFill>
-          <a:ln w="38100"/>
-        </p:spPr>
-        <p:style>
-          <a:lnRef idx="1">
-            <a:schemeClr val="accent1"/>
-          </a:lnRef>
-          <a:fillRef idx="3">
-            <a:schemeClr val="accent1"/>
-          </a:fillRef>
-          <a:effectRef idx="2">
-            <a:schemeClr val="accent1"/>
-          </a:effectRef>
-          <a:fontRef idx="minor">
-            <a:schemeClr val="lt1"/>
-          </a:fontRef>
-        </p:style>
-        <p:txBody>
-          <a:bodyPr rtlCol="0" anchor="ctr"/>
-          <a:lstStyle/>
-          <a:p>
-            <a:pPr algn="ctr"/>
-            <a:endParaRPr lang="en-IN"/>
-          </a:p>
-        </p:txBody>
-      </p:sp>
-      <p:sp>
-        <p:nvSpPr>
-          <p:cNvPr id="12" name="Google Shape;100;p3"/>
-          <p:cNvSpPr txBox="1"/>
-          <p:nvPr/>
-        </p:nvSpPr>
-        <p:spPr>
-          <a:xfrm>
-            <a:off x="367832" y="1915454"/>
-            <a:ext cx="11764736" cy="4070356"/>
-          </a:xfrm>
-          <a:prstGeom prst="rect">
-            <a:avLst/>
-          </a:prstGeom>
-          <a:noFill/>
-          <a:ln>
-            <a:noFill/>
-          </a:ln>
-        </p:spPr>
-        <p:txBody>
-          <a:bodyPr spcFirstLastPara="1" wrap="square" lIns="91425" tIns="45700" rIns="91425" bIns="45700" anchor="t" anchorCtr="0">
-            <a:noAutofit/>
-          </a:bodyPr>
-          <a:lstStyle/>
-          <a:p>
-            <a:pPr marL="514350" marR="0" lvl="0" indent="-514350" algn="just" rtl="0">
-              <a:lnSpc>
-                <a:spcPct val="90000"/>
-              </a:lnSpc>
-              <a:spcBef>
-                <a:spcPts val="0"/>
-              </a:spcBef>
-              <a:spcAft>
-                <a:spcPts val="0"/>
-              </a:spcAft>
-              <a:buClr>
-                <a:schemeClr val="dk1"/>
-              </a:buClr>
-              <a:buSzPct val="100000"/>
-              <a:buFont typeface="Calibri"/>
-              <a:buAutoNum type="arabicPeriod"/>
-            </a:pPr>
-            <a:r>
-              <a:rPr lang="en-US" b="1" i="0" u="none" strike="noStrike" cap="none" dirty="0">
-                <a:solidFill>
-                  <a:schemeClr val="dk1"/>
-                </a:solidFill>
-                <a:latin typeface="Arial" panose="020B0604020202020204" pitchFamily="34" charset="0"/>
-                <a:ea typeface="Calibri"/>
-                <a:cs typeface="Arial" panose="020B0604020202020204" pitchFamily="34" charset="0"/>
-                <a:sym typeface="Calibri"/>
-              </a:rPr>
-              <a:t>Kindly keep the maximum slides limit up to six </a:t>
-            </a:r>
-            <a:r>
-              <a:rPr lang="en-US" b="1" i="0" u="none" strike="noStrike" cap="none" dirty="0">
-                <a:solidFill>
-                  <a:srgbClr val="C00000"/>
-                </a:solidFill>
-                <a:latin typeface="Arial" panose="020B0604020202020204" pitchFamily="34" charset="0"/>
-                <a:ea typeface="Calibri"/>
-                <a:cs typeface="Arial" panose="020B0604020202020204" pitchFamily="34" charset="0"/>
-                <a:sym typeface="Calibri"/>
-              </a:rPr>
-              <a:t>(6). </a:t>
-            </a:r>
-            <a:r>
-              <a:rPr lang="en-US" b="1" i="0" u="none" strike="noStrike" cap="none" dirty="0">
-                <a:solidFill>
-                  <a:schemeClr val="dk1"/>
-                </a:solidFill>
-                <a:latin typeface="Arial" panose="020B0604020202020204" pitchFamily="34" charset="0"/>
-                <a:ea typeface="Calibri"/>
-                <a:cs typeface="Arial" panose="020B0604020202020204" pitchFamily="34" charset="0"/>
-                <a:sym typeface="Calibri"/>
-              </a:rPr>
-              <a:t>( Including the </a:t>
-            </a:r>
-            <a:r>
-              <a:rPr lang="en-US" b="1" i="0" u="none" strike="noStrike" cap="none">
-                <a:solidFill>
-                  <a:schemeClr val="dk1"/>
-                </a:solidFill>
-                <a:latin typeface="Arial" panose="020B0604020202020204" pitchFamily="34" charset="0"/>
-                <a:ea typeface="Calibri"/>
-                <a:cs typeface="Arial" panose="020B0604020202020204" pitchFamily="34" charset="0"/>
-                <a:sym typeface="Calibri"/>
-              </a:rPr>
-              <a:t>title slide) </a:t>
-            </a:r>
-            <a:endParaRPr b="1" dirty="0">
-              <a:latin typeface="Arial" panose="020B0604020202020204" pitchFamily="34" charset="0"/>
-              <a:cs typeface="Arial" panose="020B0604020202020204" pitchFamily="34" charset="0"/>
-            </a:endParaRPr>
-          </a:p>
-          <a:p>
-            <a:pPr marL="514350" marR="0" lvl="0" indent="-514350" algn="just" rtl="0">
-              <a:lnSpc>
-                <a:spcPct val="90000"/>
-              </a:lnSpc>
-              <a:spcBef>
-                <a:spcPts val="1000"/>
-              </a:spcBef>
-              <a:spcAft>
-                <a:spcPts val="0"/>
-              </a:spcAft>
-              <a:buClr>
-                <a:schemeClr val="dk1"/>
-              </a:buClr>
-              <a:buSzPct val="100000"/>
-              <a:buFont typeface="Calibri"/>
-              <a:buAutoNum type="arabicPeriod"/>
-            </a:pPr>
-            <a:r>
-              <a:rPr lang="en-US" b="1" i="0" u="none" strike="noStrike" cap="none" dirty="0">
-                <a:solidFill>
-                  <a:schemeClr val="dk1"/>
-                </a:solidFill>
-                <a:latin typeface="Arial" panose="020B0604020202020204" pitchFamily="34" charset="0"/>
-                <a:ea typeface="Calibri"/>
-                <a:cs typeface="Arial" panose="020B0604020202020204" pitchFamily="34" charset="0"/>
-                <a:sym typeface="Calibri"/>
-              </a:rPr>
-              <a:t>Try to avoid paragraphs and post your idea in points /diagrams / Infographics /pictures </a:t>
-            </a:r>
-            <a:endParaRPr b="1" dirty="0">
-              <a:latin typeface="Arial" panose="020B0604020202020204" pitchFamily="34" charset="0"/>
-              <a:cs typeface="Arial" panose="020B0604020202020204" pitchFamily="34" charset="0"/>
-            </a:endParaRPr>
-          </a:p>
-          <a:p>
-            <a:pPr marL="514350" marR="0" lvl="0" indent="-514350" algn="just" rtl="0">
-              <a:lnSpc>
-                <a:spcPct val="90000"/>
-              </a:lnSpc>
-              <a:spcBef>
-                <a:spcPts val="1000"/>
-              </a:spcBef>
-              <a:spcAft>
-                <a:spcPts val="0"/>
-              </a:spcAft>
-              <a:buClr>
-                <a:schemeClr val="dk1"/>
-              </a:buClr>
-              <a:buSzPct val="100000"/>
-              <a:buFont typeface="Calibri"/>
-              <a:buAutoNum type="arabicPeriod"/>
-            </a:pPr>
-            <a:r>
-              <a:rPr lang="en-US" b="1" i="0" u="none" strike="noStrike" cap="none" dirty="0">
-                <a:solidFill>
-                  <a:schemeClr val="dk1"/>
-                </a:solidFill>
-                <a:latin typeface="Arial" panose="020B0604020202020204" pitchFamily="34" charset="0"/>
-                <a:ea typeface="Calibri"/>
-                <a:cs typeface="Arial" panose="020B0604020202020204" pitchFamily="34" charset="0"/>
-                <a:sym typeface="Calibri"/>
-              </a:rPr>
-              <a:t>Keep your explanation precise and easy to understand</a:t>
-            </a:r>
-            <a:endParaRPr b="1" dirty="0">
-              <a:latin typeface="Arial" panose="020B0604020202020204" pitchFamily="34" charset="0"/>
-              <a:cs typeface="Arial" panose="020B0604020202020204" pitchFamily="34" charset="0"/>
-            </a:endParaRPr>
-          </a:p>
-          <a:p>
-            <a:pPr marL="514350" marR="0" lvl="0" indent="-514350" algn="just" rtl="0">
-              <a:lnSpc>
-                <a:spcPct val="90000"/>
-              </a:lnSpc>
-              <a:spcBef>
-                <a:spcPts val="1000"/>
-              </a:spcBef>
-              <a:spcAft>
-                <a:spcPts val="0"/>
-              </a:spcAft>
-              <a:buClr>
-                <a:schemeClr val="dk1"/>
-              </a:buClr>
-              <a:buSzPct val="100000"/>
-              <a:buFont typeface="Calibri"/>
-              <a:buAutoNum type="arabicPeriod"/>
-            </a:pPr>
-            <a:r>
-              <a:rPr lang="en-US" b="1" i="0" u="none" strike="noStrike" cap="none" dirty="0">
-                <a:solidFill>
-                  <a:schemeClr val="dk1"/>
-                </a:solidFill>
-                <a:latin typeface="Arial" panose="020B0604020202020204" pitchFamily="34" charset="0"/>
-                <a:ea typeface="Calibri"/>
-                <a:cs typeface="Arial" panose="020B0604020202020204" pitchFamily="34" charset="0"/>
-                <a:sym typeface="Calibri"/>
-              </a:rPr>
-              <a:t>Idea should be unique and novel. </a:t>
-            </a:r>
-            <a:endParaRPr b="1" dirty="0">
-              <a:latin typeface="Arial" panose="020B0604020202020204" pitchFamily="34" charset="0"/>
-              <a:cs typeface="Arial" panose="020B0604020202020204" pitchFamily="34" charset="0"/>
-            </a:endParaRPr>
-          </a:p>
-          <a:p>
-            <a:pPr marL="514350" marR="0" lvl="0" indent="-514350" algn="just" rtl="0">
-              <a:lnSpc>
-                <a:spcPct val="90000"/>
-              </a:lnSpc>
-              <a:spcBef>
-                <a:spcPts val="1000"/>
-              </a:spcBef>
-              <a:spcAft>
-                <a:spcPts val="0"/>
-              </a:spcAft>
-              <a:buClr>
-                <a:schemeClr val="dk1"/>
-              </a:buClr>
-              <a:buSzPct val="100000"/>
-              <a:buFont typeface="Calibri"/>
-              <a:buAutoNum type="arabicPeriod"/>
-            </a:pPr>
-            <a:r>
-              <a:rPr lang="en-US" b="1" i="0" u="none" strike="noStrike" cap="none" dirty="0">
-                <a:solidFill>
-                  <a:schemeClr val="dk1"/>
-                </a:solidFill>
-                <a:latin typeface="Arial" panose="020B0604020202020204" pitchFamily="34" charset="0"/>
-                <a:ea typeface="Calibri"/>
-                <a:cs typeface="Arial" panose="020B0604020202020204" pitchFamily="34" charset="0"/>
-                <a:sym typeface="Calibri"/>
-              </a:rPr>
-              <a:t>You can only use provided </a:t>
-            </a:r>
-            <a:r>
-              <a:rPr lang="en-US" b="1" dirty="0">
-                <a:solidFill>
-                  <a:schemeClr val="dk1"/>
-                </a:solidFill>
-                <a:latin typeface="Arial" panose="020B0604020202020204" pitchFamily="34" charset="0"/>
-                <a:ea typeface="Calibri"/>
-                <a:cs typeface="Arial" panose="020B0604020202020204" pitchFamily="34" charset="0"/>
-                <a:sym typeface="Calibri"/>
-              </a:rPr>
-              <a:t>template</a:t>
-            </a:r>
-            <a:r>
-              <a:rPr lang="en-US" b="1" i="0" u="none" strike="noStrike" cap="none" dirty="0">
-                <a:solidFill>
-                  <a:schemeClr val="dk1"/>
-                </a:solidFill>
-                <a:latin typeface="Arial" panose="020B0604020202020204" pitchFamily="34" charset="0"/>
-                <a:ea typeface="Calibri"/>
-                <a:cs typeface="Arial" panose="020B0604020202020204" pitchFamily="34" charset="0"/>
-                <a:sym typeface="Calibri"/>
-              </a:rPr>
-              <a:t> for making the </a:t>
-            </a:r>
-            <a:r>
-              <a:rPr lang="en-US" b="1" dirty="0">
-                <a:solidFill>
-                  <a:schemeClr val="dk1"/>
-                </a:solidFill>
-                <a:latin typeface="Arial" panose="020B0604020202020204" pitchFamily="34" charset="0"/>
-                <a:ea typeface="Calibri"/>
-                <a:cs typeface="Arial" panose="020B0604020202020204" pitchFamily="34" charset="0"/>
-                <a:sym typeface="Calibri"/>
-              </a:rPr>
-              <a:t>PPT</a:t>
-            </a:r>
-            <a:r>
-              <a:rPr lang="en-US" b="1" i="0" u="none" strike="noStrike" cap="none" dirty="0">
-                <a:solidFill>
-                  <a:schemeClr val="dk1"/>
-                </a:solidFill>
-                <a:latin typeface="Arial" panose="020B0604020202020204" pitchFamily="34" charset="0"/>
-                <a:ea typeface="Calibri"/>
-                <a:cs typeface="Arial" panose="020B0604020202020204" pitchFamily="34" charset="0"/>
-                <a:sym typeface="Calibri"/>
-              </a:rPr>
-              <a:t> without changing the idea details pointers (mentioned in previous slides).</a:t>
-            </a:r>
-            <a:endParaRPr b="1" i="0" u="none" strike="noStrike" cap="none" dirty="0">
-              <a:solidFill>
-                <a:schemeClr val="dk1"/>
-              </a:solidFill>
-              <a:latin typeface="Arial" panose="020B0604020202020204" pitchFamily="34" charset="0"/>
-              <a:ea typeface="Calibri"/>
-              <a:cs typeface="Arial" panose="020B0604020202020204" pitchFamily="34" charset="0"/>
-              <a:sym typeface="Calibri"/>
-            </a:endParaRPr>
-          </a:p>
-          <a:p>
-            <a:pPr marL="514350" marR="0" lvl="0" indent="-514350" algn="just" rtl="0">
-              <a:lnSpc>
-                <a:spcPct val="90000"/>
-              </a:lnSpc>
-              <a:spcBef>
-                <a:spcPts val="1000"/>
-              </a:spcBef>
-              <a:spcAft>
-                <a:spcPts val="0"/>
-              </a:spcAft>
-              <a:buClr>
-                <a:schemeClr val="dk1"/>
-              </a:buClr>
-              <a:buSzPct val="100000"/>
-              <a:buFont typeface="Calibri"/>
-              <a:buAutoNum type="arabicPeriod"/>
-            </a:pPr>
-            <a:r>
-              <a:rPr lang="en-US" b="1" i="0" u="none" strike="noStrike" cap="none" dirty="0">
-                <a:solidFill>
-                  <a:schemeClr val="dk1"/>
-                </a:solidFill>
-                <a:latin typeface="Arial" panose="020B0604020202020204" pitchFamily="34" charset="0"/>
-                <a:ea typeface="Calibri"/>
-                <a:cs typeface="Arial" panose="020B0604020202020204" pitchFamily="34" charset="0"/>
-                <a:sym typeface="Calibri"/>
-              </a:rPr>
-              <a:t>You need to save the file in PDF and upload the same on portal. No PPT, Word Doc or any other format will be supported.</a:t>
-            </a:r>
-            <a:endParaRPr b="1" dirty="0">
-              <a:latin typeface="Arial" panose="020B0604020202020204" pitchFamily="34" charset="0"/>
-              <a:cs typeface="Arial" panose="020B0604020202020204" pitchFamily="34" charset="0"/>
-            </a:endParaRPr>
-          </a:p>
-          <a:p>
-            <a:pPr marL="514350" marR="0" lvl="0" indent="-349885" algn="just" rtl="0">
-              <a:lnSpc>
-                <a:spcPct val="90000"/>
-              </a:lnSpc>
-              <a:spcBef>
-                <a:spcPts val="1000"/>
-              </a:spcBef>
-              <a:spcAft>
-                <a:spcPts val="0"/>
-              </a:spcAft>
-              <a:buClr>
-                <a:schemeClr val="dk1"/>
-              </a:buClr>
-              <a:buSzPct val="100000"/>
-              <a:buFont typeface="Calibri"/>
-              <a:buNone/>
-            </a:pPr>
-            <a:endParaRPr b="1" i="0" u="none" strike="noStrike" cap="none" dirty="0">
-              <a:solidFill>
-                <a:schemeClr val="dk1"/>
-              </a:solidFill>
-              <a:latin typeface="Arial" panose="020B0604020202020204" pitchFamily="34" charset="0"/>
-              <a:ea typeface="Calibri"/>
-              <a:cs typeface="Arial" panose="020B0604020202020204" pitchFamily="34" charset="0"/>
-              <a:sym typeface="Calibri"/>
-            </a:endParaRPr>
-          </a:p>
-          <a:p>
-            <a:pPr marL="0" marR="0" lvl="0" indent="0" algn="just" rtl="0">
-              <a:lnSpc>
-                <a:spcPct val="90000"/>
-              </a:lnSpc>
-              <a:spcBef>
-                <a:spcPts val="1000"/>
-              </a:spcBef>
-              <a:spcAft>
-                <a:spcPts val="0"/>
-              </a:spcAft>
-              <a:buClr>
-                <a:schemeClr val="dk1"/>
-              </a:buClr>
-              <a:buSzPct val="100000"/>
-              <a:buFont typeface="Arial"/>
-              <a:buNone/>
-            </a:pPr>
-            <a:r>
-              <a:rPr lang="en-US" b="1" i="0" u="none" strike="noStrike" cap="none" dirty="0">
-                <a:solidFill>
-                  <a:srgbClr val="C00000"/>
-                </a:solidFill>
-                <a:latin typeface="Arial" panose="020B0604020202020204" pitchFamily="34" charset="0"/>
-                <a:ea typeface="Calibri"/>
-                <a:cs typeface="Arial" panose="020B0604020202020204" pitchFamily="34" charset="0"/>
-                <a:sym typeface="Calibri"/>
-              </a:rPr>
-              <a:t>Note - You can delete this slide (Important Pointers) when you upload the details of your idea on SIH portal.</a:t>
-            </a:r>
-            <a:endParaRPr b="1" dirty="0">
-              <a:solidFill>
-                <a:srgbClr val="C00000"/>
-              </a:solidFill>
-              <a:latin typeface="Arial" panose="020B0604020202020204" pitchFamily="34" charset="0"/>
-              <a:cs typeface="Arial" panose="020B0604020202020204" pitchFamily="34" charset="0"/>
-            </a:endParaRPr>
-          </a:p>
-          <a:p>
-            <a:pPr marL="914400" marR="0" lvl="1" indent="-316230" algn="just" rtl="0">
-              <a:lnSpc>
-                <a:spcPct val="90000"/>
-              </a:lnSpc>
-              <a:spcBef>
-                <a:spcPts val="500"/>
-              </a:spcBef>
-              <a:spcAft>
-                <a:spcPts val="0"/>
-              </a:spcAft>
-              <a:buClr>
-                <a:schemeClr val="dk1"/>
-              </a:buClr>
-              <a:buSzPct val="100000"/>
-              <a:buFont typeface="Calibri"/>
-              <a:buNone/>
-            </a:pPr>
-            <a:endParaRPr sz="2000" b="1" i="0" u="none" strike="noStrike" cap="none" dirty="0">
-              <a:solidFill>
-                <a:schemeClr val="dk1"/>
-              </a:solidFill>
-              <a:latin typeface="Arial" panose="020B0604020202020204" pitchFamily="34" charset="0"/>
-              <a:ea typeface="Calibri"/>
-              <a:cs typeface="Arial" panose="020B0604020202020204" pitchFamily="34" charset="0"/>
-              <a:sym typeface="Calibri"/>
-            </a:endParaRPr>
-          </a:p>
-        </p:txBody>
-      </p:sp>
-      <p:sp>
-        <p:nvSpPr>
-          <p:cNvPr id="4" name="TextBox 3"/>
-          <p:cNvSpPr txBox="1"/>
-          <p:nvPr/>
-        </p:nvSpPr>
-        <p:spPr>
-          <a:xfrm>
-            <a:off x="1393371" y="107066"/>
-            <a:ext cx="8410540" cy="646331"/>
-          </a:xfrm>
-          <a:prstGeom prst="rect">
-            <a:avLst/>
-          </a:prstGeom>
-          <a:noFill/>
-        </p:spPr>
-        <p:txBody>
-          <a:bodyPr wrap="square" rtlCol="0">
-            <a:spAutoFit/>
-          </a:bodyPr>
-          <a:lstStyle/>
-          <a:p>
-            <a:pPr algn="ctr"/>
-            <a:r>
-              <a:rPr lang="en-US" sz="3600" b="1" dirty="0">
-                <a:latin typeface="Times New Roman" panose="02020603050405020304" pitchFamily="18" charset="0"/>
-                <a:cs typeface="Times New Roman" panose="02020603050405020304" pitchFamily="18" charset="0"/>
-              </a:rPr>
-              <a:t>IMPORTANT INSTRUCTIONS</a:t>
-            </a:r>
-            <a:endParaRPr lang="en-IN" sz="3600" b="1" dirty="0">
-              <a:latin typeface="Times New Roman" panose="02020603050405020304" pitchFamily="18" charset="0"/>
-              <a:cs typeface="Times New Roman" panose="02020603050405020304" pitchFamily="18" charset="0"/>
-            </a:endParaRPr>
-          </a:p>
-        </p:txBody>
-      </p:sp>
-      <p:sp>
-        <p:nvSpPr>
-          <p:cNvPr id="5" name="TextBox 4"/>
-          <p:cNvSpPr txBox="1"/>
-          <p:nvPr/>
-        </p:nvSpPr>
-        <p:spPr>
-          <a:xfrm>
-            <a:off x="602343" y="1181900"/>
-            <a:ext cx="9557657" cy="341632"/>
-          </a:xfrm>
-          <a:prstGeom prst="rect">
-            <a:avLst/>
-          </a:prstGeom>
-          <a:noFill/>
-        </p:spPr>
-        <p:txBody>
-          <a:bodyPr wrap="square" rtlCol="0">
-            <a:spAutoFit/>
-          </a:bodyPr>
-          <a:lstStyle/>
-          <a:p>
-            <a:pPr algn="just">
-              <a:lnSpc>
-                <a:spcPct val="90000"/>
-              </a:lnSpc>
-              <a:spcBef>
-                <a:spcPts val="1000"/>
-              </a:spcBef>
-              <a:spcAft>
-                <a:spcPts val="0"/>
-              </a:spcAft>
-              <a:buClr>
-                <a:schemeClr val="dk1"/>
-              </a:buClr>
-              <a:buSzPct val="100000"/>
-            </a:pPr>
-            <a:r>
-              <a:rPr lang="en-US" b="1" dirty="0">
-                <a:solidFill>
-                  <a:schemeClr val="dk1"/>
-                </a:solidFill>
-                <a:latin typeface="Arial" panose="020B0604020202020204" pitchFamily="34" charset="0"/>
-                <a:ea typeface="Calibri"/>
-                <a:cs typeface="Arial" panose="020B0604020202020204" pitchFamily="34" charset="0"/>
-              </a:rPr>
-              <a:t>Please ensure below pointers are met while submitting the Idea PPT:</a:t>
-            </a:r>
-            <a:endParaRPr lang="en-IN" b="1" dirty="0">
-              <a:solidFill>
-                <a:schemeClr val="dk1"/>
-              </a:solidFill>
-              <a:latin typeface="Arial" panose="020B0604020202020204" pitchFamily="34" charset="0"/>
-              <a:ea typeface="Calibri"/>
-              <a:cs typeface="Arial" panose="020B0604020202020204" pitchFamily="34" charset="0"/>
-            </a:endParaRPr>
-          </a:p>
-        </p:txBody>
-      </p:sp>
-      <p:pic>
-        <p:nvPicPr>
-          <p:cNvPr id="13" name="Picture 12"/>
-          <p:cNvPicPr>
-            <a:picLocks noChangeAspect="1"/>
-          </p:cNvPicPr>
-          <p:nvPr/>
-        </p:nvPicPr>
-        <p:blipFill>
-          <a:blip r:embed="rId3">
-            <a:extLst>
-              <a:ext uri="{28A0092B-C50C-407E-A947-70E740481C1C}">
-                <a14:useLocalDpi xmlns:a14="http://schemas.microsoft.com/office/drawing/2010/main" val="0"/>
-              </a:ext>
-            </a:extLst>
-          </a:blip>
-          <a:stretch>
-            <a:fillRect/>
-          </a:stretch>
-        </p:blipFill>
-        <p:spPr>
-          <a:xfrm>
-            <a:off x="9780086" y="1500"/>
-            <a:ext cx="2249850" cy="1062337"/>
-          </a:xfrm>
-          <a:prstGeom prst="rect">
-            <a:avLst/>
-          </a:prstGeom>
-        </p:spPr>
-      </p:pic>
-    </p:spTree>
-    <p:extLst>
-      <p:ext uri="{BB962C8B-B14F-4D97-AF65-F5344CB8AC3E}">
-        <p14:creationId xmlns:p14="http://schemas.microsoft.com/office/powerpoint/2010/main" val="1588084416"/>
       </p:ext>
     </p:extLst>
   </p:cSld>
